--- a/presentation/Maritime_Distress_Intelligence.pptx
+++ b/presentation/Maritime_Distress_Intelligence.pptx
@@ -4,6 +4,9 @@
   <p:sldMasterIdLst>
     <p:sldMasterId id="2147483648" r:id="rId1"/>
   </p:sldMasterIdLst>
+  <p:notesMasterIdLst>
+    <p:notesMasterId r:id="rId17"/>
+  </p:notesMasterIdLst>
   <p:sldIdLst>
     <p:sldId id="256" r:id="rId2"/>
     <p:sldId id="257" r:id="rId3"/>
@@ -21,9 +24,6 @@
     <p:sldId id="269" r:id="rId15"/>
     <p:sldId id="270" r:id="rId16"/>
   </p:sldIdLst>
-  <p:notesMasterIdLst>
-    <p:notesMasterId r:id="rId17"/>
-  </p:notesMasterIdLst>
   <p:sldSz cx="12192000" cy="6858000"/>
   <p:notesSz cx="6858000" cy="12192000"/>
   <p:defaultTextStyle>
@@ -121,25 +121,25 @@
   <p:extLst>
     <p:ext uri="{521415D9-36F7-43E2-AB2F-B90AF26B5E84}">
       <p14:sectionLst xmlns:p14="http://schemas.microsoft.com/office/powerpoint/2010/main">
-        <p14:section name="Introduction" id="{11dc0a8f-5089-9557-0363-9b10fe937ff1}">
+        <p14:section name="Introduction" id="{11DC0A8F-5089-9557-0363-9B10FE937FF1}">
           <p14:sldIdLst>
             <p14:sldId id="256"/>
             <p14:sldId id="257"/>
           </p14:sldIdLst>
         </p14:section>
-        <p14:section name="Product" id="{2aeacc6e-cc61-c0d1-baaf-b87730cd1b02}">
+        <p14:section name="Product" id="{2AEACC6E-CC61-C0D1-BAAF-B87730CD1B02}">
           <p14:sldIdLst>
             <p14:sldId id="258"/>
             <p14:sldId id="259"/>
           </p14:sldIdLst>
         </p14:section>
-        <p14:section name="Data science" id="{fd7ca0e2-f8f9-e155-0d58-5cf53c026adc}">
+        <p14:section name="Data science" id="{FD7CA0E2-F8F9-E155-0D58-5CF53C026ADC}">
           <p14:sldIdLst>
             <p14:sldId id="260"/>
             <p14:sldId id="261"/>
           </p14:sldIdLst>
         </p14:section>
-        <p14:section name="Results" id="{f82612d6-101c-e812-51b5-7594ade00cba}">
+        <p14:section name="Results" id="{F82612D6-101C-E812-51B5-7594ADE00CBA}">
           <p14:sldIdLst>
             <p14:sldId id="262"/>
             <p14:sldId id="263"/>
@@ -150,7 +150,7 @@
             <p14:sldId id="268"/>
           </p14:sldIdLst>
         </p14:section>
-        <p14:section name="Close" id="{5f4fedd3-9d06-ffe4-878a-50167dd85e1d}">
+        <p14:section name="Close" id="{5F4FEDD3-9D06-FFE4-878A-50167DD85E1D}">
           <p14:sldIdLst>
             <p14:sldId id="269"/>
             <p14:sldId id="270"/>
@@ -165,10 +165,165 @@
 </p:presentation>
 </file>
 
+<file path=ppt/changesInfos/changesInfo1.xml><?xml version="1.0" encoding="utf-8"?>
+<pc:chgInfo xmlns:a="http://schemas.openxmlformats.org/drawingml/2006/main" xmlns:r="http://schemas.openxmlformats.org/officeDocument/2006/relationships" xmlns:ac="http://schemas.microsoft.com/office/drawing/2013/main/command" xmlns:pc="http://schemas.microsoft.com/office/powerpoint/2013/main/command">
+  <pc:docChgLst>
+    <pc:chgData name="Saaraah Bharat" userId="df8f7feb6ebb4efd" providerId="LiveId" clId="{52FA9AD3-7F49-413D-B2F0-23CE35846BDC}"/>
+    <pc:docChg chg="undo custSel modSld">
+      <pc:chgData name="Saaraah Bharat" userId="df8f7feb6ebb4efd" providerId="LiveId" clId="{52FA9AD3-7F49-413D-B2F0-23CE35846BDC}" dt="2026-10-21T16:56:40.913" v="69" actId="255"/>
+      <pc:docMkLst>
+        <pc:docMk/>
+      </pc:docMkLst>
+      <pc:sldChg chg="modSp mod">
+        <pc:chgData name="Saaraah Bharat" userId="df8f7feb6ebb4efd" providerId="LiveId" clId="{52FA9AD3-7F49-413D-B2F0-23CE35846BDC}" dt="2026-10-21T16:55:21.800" v="57" actId="20577"/>
+        <pc:sldMkLst>
+          <pc:docMk/>
+          <pc:sldMk cId="0" sldId="256"/>
+        </pc:sldMkLst>
+        <pc:spChg chg="mod">
+          <ac:chgData name="Saaraah Bharat" userId="df8f7feb6ebb4efd" providerId="LiveId" clId="{52FA9AD3-7F49-413D-B2F0-23CE35846BDC}" dt="2026-10-21T16:55:21.800" v="57" actId="20577"/>
+          <ac:spMkLst>
+            <pc:docMk/>
+            <pc:sldMk cId="0" sldId="256"/>
+            <ac:spMk id="10" creationId="{00000000-0000-0000-0000-000000000000}"/>
+          </ac:spMkLst>
+        </pc:spChg>
+      </pc:sldChg>
+      <pc:sldChg chg="addSp delSp modSp mod">
+        <pc:chgData name="Saaraah Bharat" userId="df8f7feb6ebb4efd" providerId="LiveId" clId="{52FA9AD3-7F49-413D-B2F0-23CE35846BDC}" dt="2026-10-21T16:55:35.592" v="60" actId="255"/>
+        <pc:sldMkLst>
+          <pc:docMk/>
+          <pc:sldMk cId="0" sldId="257"/>
+        </pc:sldMkLst>
+        <pc:spChg chg="mod">
+          <ac:chgData name="Saaraah Bharat" userId="df8f7feb6ebb4efd" providerId="LiveId" clId="{52FA9AD3-7F49-413D-B2F0-23CE35846BDC}" dt="2026-10-21T16:55:35.592" v="60" actId="255"/>
+          <ac:spMkLst>
+            <pc:docMk/>
+            <pc:sldMk cId="0" sldId="257"/>
+            <ac:spMk id="2" creationId="{00000000-0000-0000-0000-000000000000}"/>
+          </ac:spMkLst>
+        </pc:spChg>
+        <pc:spChg chg="del">
+          <ac:chgData name="Saaraah Bharat" userId="df8f7feb6ebb4efd" providerId="LiveId" clId="{52FA9AD3-7F49-413D-B2F0-23CE35846BDC}" dt="2026-10-21T16:55:28.080" v="58" actId="478"/>
+          <ac:spMkLst>
+            <pc:docMk/>
+            <pc:sldMk cId="0" sldId="257"/>
+            <ac:spMk id="3" creationId="{00000000-0000-0000-0000-000000000000}"/>
+          </ac:spMkLst>
+        </pc:spChg>
+        <pc:spChg chg="add del mod">
+          <ac:chgData name="Saaraah Bharat" userId="df8f7feb6ebb4efd" providerId="LiveId" clId="{52FA9AD3-7F49-413D-B2F0-23CE35846BDC}" dt="2026-10-21T16:55:29.328" v="59" actId="478"/>
+          <ac:spMkLst>
+            <pc:docMk/>
+            <pc:sldMk cId="0" sldId="257"/>
+            <ac:spMk id="15" creationId="{4C1CC7B0-0E8D-F8C1-7A1B-9A24266FC890}"/>
+          </ac:spMkLst>
+        </pc:spChg>
+      </pc:sldChg>
+      <pc:sldChg chg="addSp delSp modSp mod">
+        <pc:chgData name="Saaraah Bharat" userId="df8f7feb6ebb4efd" providerId="LiveId" clId="{52FA9AD3-7F49-413D-B2F0-23CE35846BDC}" dt="2026-10-21T16:56:21.843" v="63" actId="255"/>
+        <pc:sldMkLst>
+          <pc:docMk/>
+          <pc:sldMk cId="0" sldId="258"/>
+        </pc:sldMkLst>
+        <pc:spChg chg="mod">
+          <ac:chgData name="Saaraah Bharat" userId="df8f7feb6ebb4efd" providerId="LiveId" clId="{52FA9AD3-7F49-413D-B2F0-23CE35846BDC}" dt="2026-10-21T16:56:21.843" v="63" actId="255"/>
+          <ac:spMkLst>
+            <pc:docMk/>
+            <pc:sldMk cId="0" sldId="258"/>
+            <ac:spMk id="2" creationId="{00000000-0000-0000-0000-000000000000}"/>
+          </ac:spMkLst>
+        </pc:spChg>
+        <pc:spChg chg="del">
+          <ac:chgData name="Saaraah Bharat" userId="df8f7feb6ebb4efd" providerId="LiveId" clId="{52FA9AD3-7F49-413D-B2F0-23CE35846BDC}" dt="2026-10-21T16:56:15.746" v="61" actId="478"/>
+          <ac:spMkLst>
+            <pc:docMk/>
+            <pc:sldMk cId="0" sldId="258"/>
+            <ac:spMk id="3" creationId="{00000000-0000-0000-0000-000000000000}"/>
+          </ac:spMkLst>
+        </pc:spChg>
+        <pc:spChg chg="add del mod">
+          <ac:chgData name="Saaraah Bharat" userId="df8f7feb6ebb4efd" providerId="LiveId" clId="{52FA9AD3-7F49-413D-B2F0-23CE35846BDC}" dt="2026-10-21T16:56:17.145" v="62" actId="478"/>
+          <ac:spMkLst>
+            <pc:docMk/>
+            <pc:sldMk cId="0" sldId="258"/>
+            <ac:spMk id="23" creationId="{46A7D9FA-7DBA-C454-128F-EF7D8482CBE1}"/>
+          </ac:spMkLst>
+        </pc:spChg>
+      </pc:sldChg>
+      <pc:sldChg chg="addSp delSp modSp mod">
+        <pc:chgData name="Saaraah Bharat" userId="df8f7feb6ebb4efd" providerId="LiveId" clId="{52FA9AD3-7F49-413D-B2F0-23CE35846BDC}" dt="2026-10-21T16:56:31.181" v="66" actId="255"/>
+        <pc:sldMkLst>
+          <pc:docMk/>
+          <pc:sldMk cId="0" sldId="259"/>
+        </pc:sldMkLst>
+        <pc:spChg chg="mod">
+          <ac:chgData name="Saaraah Bharat" userId="df8f7feb6ebb4efd" providerId="LiveId" clId="{52FA9AD3-7F49-413D-B2F0-23CE35846BDC}" dt="2026-10-21T16:56:31.181" v="66" actId="255"/>
+          <ac:spMkLst>
+            <pc:docMk/>
+            <pc:sldMk cId="0" sldId="259"/>
+            <ac:spMk id="2" creationId="{00000000-0000-0000-0000-000000000000}"/>
+          </ac:spMkLst>
+        </pc:spChg>
+        <pc:spChg chg="del">
+          <ac:chgData name="Saaraah Bharat" userId="df8f7feb6ebb4efd" providerId="LiveId" clId="{52FA9AD3-7F49-413D-B2F0-23CE35846BDC}" dt="2026-10-21T16:56:24.919" v="64" actId="478"/>
+          <ac:spMkLst>
+            <pc:docMk/>
+            <pc:sldMk cId="0" sldId="259"/>
+            <ac:spMk id="3" creationId="{00000000-0000-0000-0000-000000000000}"/>
+          </ac:spMkLst>
+        </pc:spChg>
+        <pc:spChg chg="add del mod">
+          <ac:chgData name="Saaraah Bharat" userId="df8f7feb6ebb4efd" providerId="LiveId" clId="{52FA9AD3-7F49-413D-B2F0-23CE35846BDC}" dt="2026-10-21T16:56:26.063" v="65" actId="478"/>
+          <ac:spMkLst>
+            <pc:docMk/>
+            <pc:sldMk cId="0" sldId="259"/>
+            <ac:spMk id="35" creationId="{85F6A0A3-956B-15A7-76B5-DC005E944215}"/>
+          </ac:spMkLst>
+        </pc:spChg>
+      </pc:sldChg>
+      <pc:sldChg chg="addSp delSp modSp mod">
+        <pc:chgData name="Saaraah Bharat" userId="df8f7feb6ebb4efd" providerId="LiveId" clId="{52FA9AD3-7F49-413D-B2F0-23CE35846BDC}" dt="2026-10-21T16:56:40.913" v="69" actId="255"/>
+        <pc:sldMkLst>
+          <pc:docMk/>
+          <pc:sldMk cId="0" sldId="260"/>
+        </pc:sldMkLst>
+        <pc:spChg chg="mod">
+          <ac:chgData name="Saaraah Bharat" userId="df8f7feb6ebb4efd" providerId="LiveId" clId="{52FA9AD3-7F49-413D-B2F0-23CE35846BDC}" dt="2026-10-21T16:56:40.913" v="69" actId="255"/>
+          <ac:spMkLst>
+            <pc:docMk/>
+            <pc:sldMk cId="0" sldId="260"/>
+            <ac:spMk id="2" creationId="{00000000-0000-0000-0000-000000000000}"/>
+          </ac:spMkLst>
+        </pc:spChg>
+        <pc:spChg chg="del">
+          <ac:chgData name="Saaraah Bharat" userId="df8f7feb6ebb4efd" providerId="LiveId" clId="{52FA9AD3-7F49-413D-B2F0-23CE35846BDC}" dt="2026-10-21T16:56:35.268" v="67" actId="478"/>
+          <ac:spMkLst>
+            <pc:docMk/>
+            <pc:sldMk cId="0" sldId="260"/>
+            <ac:spMk id="3" creationId="{00000000-0000-0000-0000-000000000000}"/>
+          </ac:spMkLst>
+        </pc:spChg>
+        <pc:spChg chg="add del mod">
+          <ac:chgData name="Saaraah Bharat" userId="df8f7feb6ebb4efd" providerId="LiveId" clId="{52FA9AD3-7F49-413D-B2F0-23CE35846BDC}" dt="2026-10-21T16:56:36.370" v="68" actId="478"/>
+          <ac:spMkLst>
+            <pc:docMk/>
+            <pc:sldMk cId="0" sldId="260"/>
+            <ac:spMk id="55" creationId="{B2443AD4-91EB-0BEC-9305-4522DEE5DA0D}"/>
+          </ac:spMkLst>
+        </pc:spChg>
+      </pc:sldChg>
+    </pc:docChg>
+  </pc:docChgLst>
+</pc:chgInfo>
+</file>
+
 <file path=ppt/charts/chart1.xml><?xml version="1.0" encoding="utf-8"?>
-<c:chartSpace xmlns:c="http://schemas.openxmlformats.org/drawingml/2006/chart" xmlns:a="http://schemas.openxmlformats.org/drawingml/2006/main" xmlns:r="http://schemas.openxmlformats.org/officeDocument/2006/relationships">
+<c:chartSpace xmlns:c="http://schemas.openxmlformats.org/drawingml/2006/chart" xmlns:a="http://schemas.openxmlformats.org/drawingml/2006/main" xmlns:r="http://schemas.openxmlformats.org/officeDocument/2006/relationships" xmlns:c16r2="http://schemas.microsoft.com/office/drawing/2015/06/chart">
   <c:date1904 val="0"/>
+  <c:lang val="en-US"/>
   <c:roundedCorners val="1"/>
+  <c:style val="2"/>
   <c:chart>
     <c:title>
       <c:tx>
@@ -196,7 +351,6 @@
           </a:p>
         </c:rich>
       </c:tx>
-      <c:layout/>
       <c:overlay val="0"/>
     </c:title>
     <c:autoTitleDeleted val="0"/>
@@ -229,18 +383,26 @@
           <c:invertIfNegative val="0"/>
           <c:dLbls>
             <c:numFmt formatCode="0.00" sourceLinked="0"/>
+            <c:spPr>
+              <a:noFill/>
+              <a:ln>
+                <a:noFill/>
+              </a:ln>
+              <a:effectLst/>
+            </c:spPr>
             <c:txPr>
               <a:bodyPr/>
               <a:lstStyle/>
               <a:p>
                 <a:pPr>
-                  <a:defRPr b="0" i="0" strike="noStrike" sz="1100" u="none">
+                  <a:defRPr sz="1100" b="0" i="0" u="none" strike="noStrike">
                     <a:solidFill>
                       <a:srgbClr val="1E2A36"/>
                     </a:solidFill>
                     <a:latin typeface="+mn-lt"/>
                   </a:defRPr>
                 </a:pPr>
+                <a:endParaRPr lang="en-US"/>
               </a:p>
             </c:txPr>
             <c:showLegendKey val="0"/>
@@ -250,34 +412,37 @@
             <c:showPercent val="0"/>
             <c:showBubbleSize val="0"/>
             <c:showLeaderLines val="0"/>
+            <c:extLst>
+              <c:ext xmlns:c15="http://schemas.microsoft.com/office/drawing/2012/chart" uri="{CE6537A1-D6FC-4f65-9D91-7224C49458BB}">
+                <c15:showLeaderLines val="0"/>
+              </c:ext>
+            </c:extLst>
           </c:dLbls>
           <c:cat>
-            <c:multiLvlStrRef>
+            <c:strRef>
               <c:f>Sheet1!$A$2:$A$7</c:f>
-              <c:multiLvlStrCache>
+              <c:strCache>
                 <c:ptCount val="6"/>
-                <c:lvl>
-                  <c:pt idx="0">
-                    <c:v>INCIDENT</c:v>
-                  </c:pt>
-                  <c:pt idx="1">
-                    <c:v>MMSI</c:v>
-                  </c:pt>
-                  <c:pt idx="2">
-                    <c:v>POB</c:v>
-                  </c:pt>
-                  <c:pt idx="3">
-                    <c:v>POSITION</c:v>
-                  </c:pt>
-                  <c:pt idx="4">
-                    <c:v>VESSEL</c:v>
-                  </c:pt>
-                  <c:pt idx="5">
-                    <c:v>VESSEL TYPE</c:v>
-                  </c:pt>
-                </c:lvl>
-              </c:multiLvlStrCache>
-            </c:multiLvlStrRef>
+                <c:pt idx="0">
+                  <c:v>INCIDENT</c:v>
+                </c:pt>
+                <c:pt idx="1">
+                  <c:v>MMSI</c:v>
+                </c:pt>
+                <c:pt idx="2">
+                  <c:v>POB</c:v>
+                </c:pt>
+                <c:pt idx="3">
+                  <c:v>POSITION</c:v>
+                </c:pt>
+                <c:pt idx="4">
+                  <c:v>VESSEL</c:v>
+                </c:pt>
+                <c:pt idx="5">
+                  <c:v>VESSEL TYPE</c:v>
+                </c:pt>
+              </c:strCache>
+            </c:strRef>
           </c:cat>
           <c:val>
             <c:numRef>
@@ -306,36 +471,23 @@
               </c:numCache>
             </c:numRef>
           </c:val>
+          <c:extLst>
+            <c:ext xmlns:c16="http://schemas.microsoft.com/office/drawing/2014/chart" uri="{C3380CC4-5D6E-409C-BE32-E72D297353CC}">
+              <c16:uniqueId val="{00000000-2F15-411D-A394-723977A343A1}"/>
+            </c:ext>
+          </c:extLst>
         </c:ser>
         <c:dLbls>
-          <c:numFmt formatCode="0.00" sourceLinked="0"/>
-          <c:txPr>
-            <a:bodyPr/>
-            <a:lstStyle/>
-            <a:p>
-              <a:pPr>
-                <a:defRPr b="0" i="0" strike="noStrike" sz="1100" u="none">
-                  <a:solidFill>
-                    <a:srgbClr val="1E2A36"/>
-                  </a:solidFill>
-                  <a:latin typeface="+mn-lt"/>
-                </a:defRPr>
-              </a:pPr>
-            </a:p>
-          </c:txPr>
           <c:showLegendKey val="0"/>
           <c:showVal val="1"/>
           <c:showCatName val="0"/>
           <c:showSerName val="0"/>
           <c:showPercent val="0"/>
           <c:showBubbleSize val="0"/>
-          <c:showLeaderLines val="0"/>
         </c:dLbls>
         <c:gapWidth val="60"/>
-        <c:overlap val="0"/>
         <c:axId val="2094734554"/>
         <c:axId val="2094734552"/>
-        <c:axId val="2094734556"/>
       </c:barChart>
       <c:catAx>
         <c:axId val="2094734554"/>
@@ -374,13 +526,14 @@
         <c:crosses val="autoZero"/>
         <c:auto val="1"/>
         <c:lblAlgn val="ctr"/>
+        <c:lblOffset val="100"/>
         <c:noMultiLvlLbl val="1"/>
       </c:catAx>
       <c:valAx>
         <c:axId val="2094734552"/>
         <c:scaling>
           <c:orientation val="minMax"/>
-          <c:max val="1.12"/>
+          <c:max val="1.1200000000000001"/>
           <c:min val="0"/>
         </c:scaling>
         <c:delete val="1"/>
@@ -400,28 +553,6 @@
         <c:majorTickMark val="out"/>
         <c:minorTickMark val="none"/>
         <c:tickLblPos val="low"/>
-        <c:spPr>
-          <a:ln w="12700" cap="flat">
-            <a:noFill/>
-            <a:prstDash val="solid"/>
-            <a:round/>
-          </a:ln>
-        </c:spPr>
-        <c:txPr>
-          <a:bodyPr/>
-          <a:lstStyle/>
-          <a:p>
-            <a:pPr>
-              <a:defRPr sz="1100" b="0" i="0" u="none" strike="noStrike">
-                <a:solidFill>
-                  <a:srgbClr val="6B7785"/>
-                </a:solidFill>
-                <a:latin typeface="+mn-lt"/>
-              </a:defRPr>
-            </a:pPr>
-            <a:endParaRPr lang="en-US"/>
-          </a:p>
-        </c:txPr>
         <c:crossAx val="2094734554"/>
         <c:crosses val="autoZero"/>
         <c:crossBetween val="between"/>
@@ -436,6 +567,7 @@
     </c:plotArea>
     <c:plotVisOnly val="1"/>
     <c:dispBlanksAs val="span"/>
+    <c:showDLblsOverMax val="1"/>
   </c:chart>
   <c:spPr>
     <a:noFill/>
@@ -451,9 +583,11 @@
 </file>
 
 <file path=ppt/charts/chart2.xml><?xml version="1.0" encoding="utf-8"?>
-<c:chartSpace xmlns:c="http://schemas.openxmlformats.org/drawingml/2006/chart" xmlns:a="http://schemas.openxmlformats.org/drawingml/2006/main" xmlns:r="http://schemas.openxmlformats.org/officeDocument/2006/relationships">
+<c:chartSpace xmlns:c="http://schemas.openxmlformats.org/drawingml/2006/chart" xmlns:a="http://schemas.openxmlformats.org/drawingml/2006/main" xmlns:r="http://schemas.openxmlformats.org/officeDocument/2006/relationships" xmlns:c16r2="http://schemas.microsoft.com/office/drawing/2015/06/chart">
   <c:date1904 val="0"/>
+  <c:lang val="en-US"/>
   <c:roundedCorners val="1"/>
+  <c:style val="2"/>
   <c:chart>
     <c:title>
       <c:tx>
@@ -481,7 +615,6 @@
           </a:p>
         </c:rich>
       </c:tx>
-      <c:layout/>
       <c:overlay val="0"/>
     </c:title>
     <c:autoTitleDeleted val="0"/>
@@ -512,40 +645,15 @@
             <a:effectLst/>
           </c:spPr>
           <c:invertIfNegative val="0"/>
-          <c:dLbls>
-            <c:numFmt formatCode="0.000" sourceLinked="0"/>
-            <c:txPr>
-              <a:bodyPr/>
-              <a:lstStyle/>
-              <a:p>
-                <a:pPr>
-                  <a:defRPr b="0" i="0" strike="noStrike" sz="1100" u="none">
-                    <a:solidFill>
-                      <a:srgbClr val="1E2A36"/>
-                    </a:solidFill>
-                    <a:latin typeface="+mn-lt"/>
-                  </a:defRPr>
-                </a:pPr>
-              </a:p>
-            </c:txPr>
-            <c:showLegendKey val="0"/>
-            <c:showVal val="1"/>
-            <c:showCatName val="0"/>
-            <c:showSerName val="0"/>
-            <c:showPercent val="0"/>
-            <c:showBubbleSize val="0"/>
-            <c:showLeaderLines val="0"/>
-          </c:dLbls>
           <c:dPt>
             <c:idx val="0"/>
             <c:invertIfNegative val="0"/>
             <c:bubble3D val="0"/>
-            <c:spPr>
-              <a:solidFill>
-                <a:srgbClr val="8FB1CC"/>
-              </a:solidFill>
-              <a:effectLst/>
-            </c:spPr>
+            <c:extLst>
+              <c:ext xmlns:c16="http://schemas.microsoft.com/office/drawing/2014/chart" uri="{C3380CC4-5D6E-409C-BE32-E72D297353CC}">
+                <c16:uniqueId val="{00000001-0FFF-429E-93FF-3992E6A03D0B}"/>
+              </c:ext>
+            </c:extLst>
           </c:dPt>
           <c:dPt>
             <c:idx val="1"/>
@@ -557,22 +665,62 @@
               </a:solidFill>
               <a:effectLst/>
             </c:spPr>
+            <c:extLst>
+              <c:ext xmlns:c16="http://schemas.microsoft.com/office/drawing/2014/chart" uri="{C3380CC4-5D6E-409C-BE32-E72D297353CC}">
+                <c16:uniqueId val="{00000003-0FFF-429E-93FF-3992E6A03D0B}"/>
+              </c:ext>
+            </c:extLst>
           </c:dPt>
+          <c:dLbls>
+            <c:numFmt formatCode="0.000" sourceLinked="0"/>
+            <c:spPr>
+              <a:noFill/>
+              <a:ln>
+                <a:noFill/>
+              </a:ln>
+              <a:effectLst/>
+            </c:spPr>
+            <c:txPr>
+              <a:bodyPr/>
+              <a:lstStyle/>
+              <a:p>
+                <a:pPr>
+                  <a:defRPr sz="1100" b="0" i="0" u="none" strike="noStrike">
+                    <a:solidFill>
+                      <a:srgbClr val="1E2A36"/>
+                    </a:solidFill>
+                    <a:latin typeface="+mn-lt"/>
+                  </a:defRPr>
+                </a:pPr>
+                <a:endParaRPr lang="en-US"/>
+              </a:p>
+            </c:txPr>
+            <c:showLegendKey val="0"/>
+            <c:showVal val="1"/>
+            <c:showCatName val="0"/>
+            <c:showSerName val="0"/>
+            <c:showPercent val="0"/>
+            <c:showBubbleSize val="0"/>
+            <c:showLeaderLines val="0"/>
+            <c:extLst>
+              <c:ext xmlns:c15="http://schemas.microsoft.com/office/drawing/2012/chart" uri="{CE6537A1-D6FC-4f65-9D91-7224C49458BB}">
+                <c15:showLeaderLines val="0"/>
+              </c:ext>
+            </c:extLst>
+          </c:dLbls>
           <c:cat>
-            <c:multiLvlStrRef>
+            <c:strRef>
               <c:f>Sheet1!$A$2:$A$3</c:f>
-              <c:multiLvlStrCache>
+              <c:strCache>
                 <c:ptCount val="2"/>
-                <c:lvl>
-                  <c:pt idx="0">
-                    <c:v>Uncalibrated</c:v>
-                  </c:pt>
-                  <c:pt idx="1">
-                    <c:v>Temperature-scaled</c:v>
-                  </c:pt>
-                </c:lvl>
-              </c:multiLvlStrCache>
-            </c:multiLvlStrRef>
+                <c:pt idx="0">
+                  <c:v>Uncalibrated</c:v>
+                </c:pt>
+                <c:pt idx="1">
+                  <c:v>Temperature-scaled</c:v>
+                </c:pt>
+              </c:strCache>
+            </c:strRef>
           </c:cat>
           <c:val>
             <c:numRef>
@@ -581,44 +729,31 @@
                 <c:formatCode>General</c:formatCode>
                 <c:ptCount val="2"/>
                 <c:pt idx="0">
-                  <c:v>0.092</c:v>
+                  <c:v>9.1999999999999998E-2</c:v>
                 </c:pt>
                 <c:pt idx="1">
-                  <c:v>0.073</c:v>
+                  <c:v>7.2999999999999995E-2</c:v>
                 </c:pt>
               </c:numCache>
             </c:numRef>
           </c:val>
+          <c:extLst>
+            <c:ext xmlns:c16="http://schemas.microsoft.com/office/drawing/2014/chart" uri="{C3380CC4-5D6E-409C-BE32-E72D297353CC}">
+              <c16:uniqueId val="{00000004-0FFF-429E-93FF-3992E6A03D0B}"/>
+            </c:ext>
+          </c:extLst>
         </c:ser>
         <c:dLbls>
-          <c:numFmt formatCode="0.000" sourceLinked="0"/>
-          <c:txPr>
-            <a:bodyPr/>
-            <a:lstStyle/>
-            <a:p>
-              <a:pPr>
-                <a:defRPr b="0" i="0" strike="noStrike" sz="1100" u="none">
-                  <a:solidFill>
-                    <a:srgbClr val="1E2A36"/>
-                  </a:solidFill>
-                  <a:latin typeface="+mn-lt"/>
-                </a:defRPr>
-              </a:pPr>
-            </a:p>
-          </c:txPr>
           <c:showLegendKey val="0"/>
           <c:showVal val="1"/>
           <c:showCatName val="0"/>
           <c:showSerName val="0"/>
           <c:showPercent val="0"/>
           <c:showBubbleSize val="0"/>
-          <c:showLeaderLines val="0"/>
         </c:dLbls>
         <c:gapWidth val="70"/>
-        <c:overlap val="0"/>
         <c:axId val="2094734554"/>
         <c:axId val="2094734552"/>
-        <c:axId val="2094734556"/>
       </c:barChart>
       <c:catAx>
         <c:axId val="2094734554"/>
@@ -657,6 +792,7 @@
         <c:crosses val="autoZero"/>
         <c:auto val="1"/>
         <c:lblAlgn val="ctr"/>
+        <c:lblOffset val="100"/>
         <c:noMultiLvlLbl val="1"/>
       </c:catAx>
       <c:valAx>
@@ -682,28 +818,6 @@
         <c:majorTickMark val="out"/>
         <c:minorTickMark val="none"/>
         <c:tickLblPos val="nextTo"/>
-        <c:spPr>
-          <a:ln w="12700" cap="flat">
-            <a:noFill/>
-            <a:prstDash val="solid"/>
-            <a:round/>
-          </a:ln>
-        </c:spPr>
-        <c:txPr>
-          <a:bodyPr/>
-          <a:lstStyle/>
-          <a:p>
-            <a:pPr>
-              <a:defRPr sz="1100" b="0" i="0" u="none" strike="noStrike">
-                <a:solidFill>
-                  <a:srgbClr val="6B7785"/>
-                </a:solidFill>
-                <a:latin typeface="+mn-lt"/>
-              </a:defRPr>
-            </a:pPr>
-            <a:endParaRPr lang="en-US"/>
-          </a:p>
-        </c:txPr>
         <c:crossAx val="2094734554"/>
         <c:crosses val="autoZero"/>
         <c:crossBetween val="between"/>
@@ -718,6 +832,7 @@
     </c:plotArea>
     <c:plotVisOnly val="1"/>
     <c:dispBlanksAs val="span"/>
+    <c:showDLblsOverMax val="1"/>
   </c:chart>
   <c:spPr>
     <a:noFill/>
@@ -733,9 +848,11 @@
 </file>
 
 <file path=ppt/charts/chart3.xml><?xml version="1.0" encoding="utf-8"?>
-<c:chartSpace xmlns:c="http://schemas.openxmlformats.org/drawingml/2006/chart" xmlns:a="http://schemas.openxmlformats.org/drawingml/2006/main" xmlns:r="http://schemas.openxmlformats.org/officeDocument/2006/relationships">
+<c:chartSpace xmlns:c="http://schemas.openxmlformats.org/drawingml/2006/chart" xmlns:a="http://schemas.openxmlformats.org/drawingml/2006/main" xmlns:r="http://schemas.openxmlformats.org/officeDocument/2006/relationships" xmlns:c16r2="http://schemas.microsoft.com/office/drawing/2015/06/chart">
   <c:date1904 val="0"/>
+  <c:lang val="en-US"/>
   <c:roundedCorners val="1"/>
+  <c:style val="2"/>
   <c:chart>
     <c:title>
       <c:tx>
@@ -763,13 +880,13 @@
           </a:p>
         </c:rich>
       </c:tx>
-      <c:layout/>
       <c:overlay val="0"/>
     </c:title>
     <c:autoTitleDeleted val="0"/>
     <c:plotArea>
       <c:layout/>
       <c:lineChart>
+        <c:grouping val="standard"/>
         <c:varyColors val="0"/>
         <c:ser>
           <c:idx val="0"/>
@@ -786,9 +903,6 @@
             </c:strRef>
           </c:tx>
           <c:spPr>
-            <a:solidFill>
-              <a:srgbClr val="C9B48A"/>
-            </a:solidFill>
             <a:ln w="31750" cap="flat">
               <a:solidFill>
                 <a:srgbClr val="C9B48A"/>
@@ -798,31 +912,6 @@
             </a:ln>
             <a:effectLst/>
           </c:spPr>
-          <c:invertIfNegative val="0"/>
-          <c:dLbls>
-            <c:numFmt formatCode="#,##0" sourceLinked="0"/>
-            <c:txPr>
-              <a:bodyPr/>
-              <a:lstStyle/>
-              <a:p>
-                <a:pPr>
-                  <a:defRPr b="0" i="0" strike="noStrike" sz="1100" u="none">
-                    <a:solidFill>
-                      <a:srgbClr val="1E2A36"/>
-                    </a:solidFill>
-                    <a:latin typeface="+mn-lt"/>
-                  </a:defRPr>
-                </a:pPr>
-              </a:p>
-            </c:txPr>
-            <c:showLegendKey val="0"/>
-            <c:showVal val="0"/>
-            <c:showCatName val="0"/>
-            <c:showSerName val="0"/>
-            <c:showPercent val="0"/>
-            <c:showBubbleSize val="0"/>
-            <c:showLeaderLines val="0"/>
-          </c:dLbls>
           <c:marker>
             <c:symbol val="circle"/>
             <c:size val="7"/>
@@ -841,35 +930,33 @@
             </c:spPr>
           </c:marker>
           <c:cat>
-            <c:multiLvlStrRef>
+            <c:strRef>
               <c:f>Sheet1!$A$2:$A$8</c:f>
-              <c:multiLvlStrCache>
+              <c:strCache>
                 <c:ptCount val="7"/>
-                <c:lvl>
-                  <c:pt idx="0">
-                    <c:v>0.3–0.4</c:v>
-                  </c:pt>
-                  <c:pt idx="1">
-                    <c:v>0.4–0.5</c:v>
-                  </c:pt>
-                  <c:pt idx="2">
-                    <c:v>0.5–0.6</c:v>
-                  </c:pt>
-                  <c:pt idx="3">
-                    <c:v>0.6–0.7</c:v>
-                  </c:pt>
-                  <c:pt idx="4">
-                    <c:v>0.7–0.8</c:v>
-                  </c:pt>
-                  <c:pt idx="5">
-                    <c:v>0.8–0.9</c:v>
-                  </c:pt>
-                  <c:pt idx="6">
-                    <c:v>0.9–1</c:v>
-                  </c:pt>
-                </c:lvl>
-              </c:multiLvlStrCache>
-            </c:multiLvlStrRef>
+                <c:pt idx="0">
+                  <c:v>0.3–0.4</c:v>
+                </c:pt>
+                <c:pt idx="1">
+                  <c:v>0.4–0.5</c:v>
+                </c:pt>
+                <c:pt idx="2">
+                  <c:v>0.5–0.6</c:v>
+                </c:pt>
+                <c:pt idx="3">
+                  <c:v>0.6–0.7</c:v>
+                </c:pt>
+                <c:pt idx="4">
+                  <c:v>0.7–0.8</c:v>
+                </c:pt>
+                <c:pt idx="5">
+                  <c:v>0.8–0.9</c:v>
+                </c:pt>
+                <c:pt idx="6">
+                  <c:v>0.9–1</c:v>
+                </c:pt>
+              </c:strCache>
+            </c:strRef>
           </c:cat>
           <c:val>
             <c:numRef>
@@ -884,7 +971,7 @@
                   <c:v>0.45</c:v>
                 </c:pt>
                 <c:pt idx="2">
-                  <c:v>0.55</c:v>
+                  <c:v>0.55000000000000004</c:v>
                 </c:pt>
                 <c:pt idx="3">
                   <c:v>0.65</c:v>
@@ -902,6 +989,11 @@
             </c:numRef>
           </c:val>
           <c:smooth val="0"/>
+          <c:extLst>
+            <c:ext xmlns:c16="http://schemas.microsoft.com/office/drawing/2014/chart" uri="{C3380CC4-5D6E-409C-BE32-E72D297353CC}">
+              <c16:uniqueId val="{00000000-AF6C-4DA1-A0E9-76958051439E}"/>
+            </c:ext>
+          </c:extLst>
         </c:ser>
         <c:ser>
           <c:idx val="1"/>
@@ -918,9 +1010,6 @@
             </c:strRef>
           </c:tx>
           <c:spPr>
-            <a:solidFill>
-              <a:srgbClr val="8FB1CC"/>
-            </a:solidFill>
             <a:ln w="31750" cap="flat">
               <a:solidFill>
                 <a:srgbClr val="8FB1CC"/>
@@ -930,31 +1019,6 @@
             </a:ln>
             <a:effectLst/>
           </c:spPr>
-          <c:invertIfNegative val="0"/>
-          <c:dLbls>
-            <c:numFmt formatCode="#,##0" sourceLinked="0"/>
-            <c:txPr>
-              <a:bodyPr/>
-              <a:lstStyle/>
-              <a:p>
-                <a:pPr>
-                  <a:defRPr b="0" i="0" strike="noStrike" sz="1100" u="none">
-                    <a:solidFill>
-                      <a:srgbClr val="1E2A36"/>
-                    </a:solidFill>
-                    <a:latin typeface="+mn-lt"/>
-                  </a:defRPr>
-                </a:pPr>
-              </a:p>
-            </c:txPr>
-            <c:showLegendKey val="0"/>
-            <c:showVal val="0"/>
-            <c:showCatName val="0"/>
-            <c:showSerName val="0"/>
-            <c:showPercent val="0"/>
-            <c:showBubbleSize val="0"/>
-            <c:showLeaderLines val="0"/>
-          </c:dLbls>
           <c:marker>
             <c:symbol val="circle"/>
             <c:size val="7"/>
@@ -973,35 +1037,33 @@
             </c:spPr>
           </c:marker>
           <c:cat>
-            <c:multiLvlStrRef>
+            <c:strRef>
               <c:f>Sheet1!$A$2:$A$8</c:f>
-              <c:multiLvlStrCache>
+              <c:strCache>
                 <c:ptCount val="7"/>
-                <c:lvl>
-                  <c:pt idx="0">
-                    <c:v>0.3–0.4</c:v>
-                  </c:pt>
-                  <c:pt idx="1">
-                    <c:v>0.4–0.5</c:v>
-                  </c:pt>
-                  <c:pt idx="2">
-                    <c:v>0.5–0.6</c:v>
-                  </c:pt>
-                  <c:pt idx="3">
-                    <c:v>0.6–0.7</c:v>
-                  </c:pt>
-                  <c:pt idx="4">
-                    <c:v>0.7–0.8</c:v>
-                  </c:pt>
-                  <c:pt idx="5">
-                    <c:v>0.8–0.9</c:v>
-                  </c:pt>
-                  <c:pt idx="6">
-                    <c:v>0.9–1</c:v>
-                  </c:pt>
-                </c:lvl>
-              </c:multiLvlStrCache>
-            </c:multiLvlStrRef>
+                <c:pt idx="0">
+                  <c:v>0.3–0.4</c:v>
+                </c:pt>
+                <c:pt idx="1">
+                  <c:v>0.4–0.5</c:v>
+                </c:pt>
+                <c:pt idx="2">
+                  <c:v>0.5–0.6</c:v>
+                </c:pt>
+                <c:pt idx="3">
+                  <c:v>0.6–0.7</c:v>
+                </c:pt>
+                <c:pt idx="4">
+                  <c:v>0.7–0.8</c:v>
+                </c:pt>
+                <c:pt idx="5">
+                  <c:v>0.8–0.9</c:v>
+                </c:pt>
+                <c:pt idx="6">
+                  <c:v>0.9–1</c:v>
+                </c:pt>
+              </c:strCache>
+            </c:strRef>
           </c:cat>
           <c:val>
             <c:numRef>
@@ -1034,6 +1096,11 @@
             </c:numRef>
           </c:val>
           <c:smooth val="0"/>
+          <c:extLst>
+            <c:ext xmlns:c16="http://schemas.microsoft.com/office/drawing/2014/chart" uri="{C3380CC4-5D6E-409C-BE32-E72D297353CC}">
+              <c16:uniqueId val="{00000001-AF6C-4DA1-A0E9-76958051439E}"/>
+            </c:ext>
+          </c:extLst>
         </c:ser>
         <c:ser>
           <c:idx val="2"/>
@@ -1050,9 +1117,6 @@
             </c:strRef>
           </c:tx>
           <c:spPr>
-            <a:solidFill>
-              <a:srgbClr val="2E6F95"/>
-            </a:solidFill>
             <a:ln w="31750" cap="flat">
               <a:solidFill>
                 <a:srgbClr val="2E6F95"/>
@@ -1062,31 +1126,6 @@
             </a:ln>
             <a:effectLst/>
           </c:spPr>
-          <c:invertIfNegative val="0"/>
-          <c:dLbls>
-            <c:numFmt formatCode="#,##0" sourceLinked="0"/>
-            <c:txPr>
-              <a:bodyPr/>
-              <a:lstStyle/>
-              <a:p>
-                <a:pPr>
-                  <a:defRPr b="0" i="0" strike="noStrike" sz="1100" u="none">
-                    <a:solidFill>
-                      <a:srgbClr val="1E2A36"/>
-                    </a:solidFill>
-                    <a:latin typeface="+mn-lt"/>
-                  </a:defRPr>
-                </a:pPr>
-              </a:p>
-            </c:txPr>
-            <c:showLegendKey val="0"/>
-            <c:showVal val="0"/>
-            <c:showCatName val="0"/>
-            <c:showSerName val="0"/>
-            <c:showPercent val="0"/>
-            <c:showBubbleSize val="0"/>
-            <c:showLeaderLines val="0"/>
-          </c:dLbls>
           <c:marker>
             <c:symbol val="circle"/>
             <c:size val="7"/>
@@ -1105,35 +1144,33 @@
             </c:spPr>
           </c:marker>
           <c:cat>
-            <c:multiLvlStrRef>
+            <c:strRef>
               <c:f>Sheet1!$A$2:$A$8</c:f>
-              <c:multiLvlStrCache>
+              <c:strCache>
                 <c:ptCount val="7"/>
-                <c:lvl>
-                  <c:pt idx="0">
-                    <c:v>0.3–0.4</c:v>
-                  </c:pt>
-                  <c:pt idx="1">
-                    <c:v>0.4–0.5</c:v>
-                  </c:pt>
-                  <c:pt idx="2">
-                    <c:v>0.5–0.6</c:v>
-                  </c:pt>
-                  <c:pt idx="3">
-                    <c:v>0.6–0.7</c:v>
-                  </c:pt>
-                  <c:pt idx="4">
-                    <c:v>0.7–0.8</c:v>
-                  </c:pt>
-                  <c:pt idx="5">
-                    <c:v>0.8–0.9</c:v>
-                  </c:pt>
-                  <c:pt idx="6">
-                    <c:v>0.9–1</c:v>
-                  </c:pt>
-                </c:lvl>
-              </c:multiLvlStrCache>
-            </c:multiLvlStrRef>
+                <c:pt idx="0">
+                  <c:v>0.3–0.4</c:v>
+                </c:pt>
+                <c:pt idx="1">
+                  <c:v>0.4–0.5</c:v>
+                </c:pt>
+                <c:pt idx="2">
+                  <c:v>0.5–0.6</c:v>
+                </c:pt>
+                <c:pt idx="3">
+                  <c:v>0.6–0.7</c:v>
+                </c:pt>
+                <c:pt idx="4">
+                  <c:v>0.7–0.8</c:v>
+                </c:pt>
+                <c:pt idx="5">
+                  <c:v>0.8–0.9</c:v>
+                </c:pt>
+                <c:pt idx="6">
+                  <c:v>0.9–1</c:v>
+                </c:pt>
+              </c:strCache>
+            </c:strRef>
           </c:cat>
           <c:val>
             <c:numRef>
@@ -1166,35 +1203,24 @@
             </c:numRef>
           </c:val>
           <c:smooth val="0"/>
+          <c:extLst>
+            <c:ext xmlns:c16="http://schemas.microsoft.com/office/drawing/2014/chart" uri="{C3380CC4-5D6E-409C-BE32-E72D297353CC}">
+              <c16:uniqueId val="{00000002-AF6C-4DA1-A0E9-76958051439E}"/>
+            </c:ext>
+          </c:extLst>
         </c:ser>
         <c:dLbls>
-          <c:numFmt formatCode="#,##0" sourceLinked="0"/>
-          <c:txPr>
-            <a:bodyPr/>
-            <a:lstStyle/>
-            <a:p>
-              <a:pPr>
-                <a:defRPr b="0" i="0" strike="noStrike" sz="1100" u="none">
-                  <a:solidFill>
-                    <a:srgbClr val="1E2A36"/>
-                  </a:solidFill>
-                  <a:latin typeface="+mn-lt"/>
-                </a:defRPr>
-              </a:pPr>
-            </a:p>
-          </c:txPr>
           <c:showLegendKey val="0"/>
           <c:showVal val="0"/>
           <c:showCatName val="0"/>
           <c:showSerName val="0"/>
           <c:showPercent val="0"/>
           <c:showBubbleSize val="0"/>
-          <c:showLeaderLines val="0"/>
         </c:dLbls>
         <c:marker val="1"/>
+        <c:smooth val="0"/>
         <c:axId val="2094734554"/>
         <c:axId val="2094734552"/>
-        <c:axId val="2094734556"/>
       </c:lineChart>
       <c:catAx>
         <c:axId val="2094734554"/>
@@ -1233,6 +1259,7 @@
         <c:crosses val="autoZero"/>
         <c:auto val="1"/>
         <c:lblAlgn val="ctr"/>
+        <c:lblOffset val="100"/>
         <c:noMultiLvlLbl val="1"/>
       </c:catAx>
       <c:valAx>
@@ -1315,6 +1342,7 @@
     </c:legend>
     <c:plotVisOnly val="1"/>
     <c:dispBlanksAs val="span"/>
+    <c:showDLblsOverMax val="1"/>
   </c:chart>
   <c:spPr>
     <a:noFill/>
@@ -1330,9 +1358,11 @@
 </file>
 
 <file path=ppt/charts/chart4.xml><?xml version="1.0" encoding="utf-8"?>
-<c:chartSpace xmlns:c="http://schemas.openxmlformats.org/drawingml/2006/chart" xmlns:a="http://schemas.openxmlformats.org/drawingml/2006/main" xmlns:r="http://schemas.openxmlformats.org/officeDocument/2006/relationships">
+<c:chartSpace xmlns:c="http://schemas.openxmlformats.org/drawingml/2006/chart" xmlns:a="http://schemas.openxmlformats.org/drawingml/2006/main" xmlns:r="http://schemas.openxmlformats.org/officeDocument/2006/relationships" xmlns:c16r2="http://schemas.microsoft.com/office/drawing/2015/06/chart">
   <c:date1904 val="0"/>
+  <c:lang val="en-US"/>
   <c:roundedCorners val="1"/>
+  <c:style val="2"/>
   <c:chart>
     <c:title>
       <c:tx>
@@ -1360,7 +1390,6 @@
           </a:p>
         </c:rich>
       </c:tx>
-      <c:layout/>
       <c:overlay val="0"/>
     </c:title>
     <c:autoTitleDeleted val="0"/>
@@ -1393,18 +1422,26 @@
           <c:invertIfNegative val="0"/>
           <c:dLbls>
             <c:numFmt formatCode="0.00" sourceLinked="0"/>
+            <c:spPr>
+              <a:noFill/>
+              <a:ln>
+                <a:noFill/>
+              </a:ln>
+              <a:effectLst/>
+            </c:spPr>
             <c:txPr>
               <a:bodyPr/>
               <a:lstStyle/>
               <a:p>
                 <a:pPr>
-                  <a:defRPr b="0" i="0" strike="noStrike" sz="1100" u="none">
+                  <a:defRPr sz="1100" b="0" i="0" u="none" strike="noStrike">
                     <a:solidFill>
                       <a:srgbClr val="1E2A36"/>
                     </a:solidFill>
                     <a:latin typeface="+mn-lt"/>
                   </a:defRPr>
                 </a:pPr>
+                <a:endParaRPr lang="en-US"/>
               </a:p>
             </c:txPr>
             <c:showLegendKey val="0"/>
@@ -1414,25 +1451,28 @@
             <c:showPercent val="0"/>
             <c:showBubbleSize val="0"/>
             <c:showLeaderLines val="0"/>
+            <c:extLst>
+              <c:ext xmlns:c15="http://schemas.microsoft.com/office/drawing/2012/chart" uri="{CE6537A1-D6FC-4f65-9D91-7224C49458BB}">
+                <c15:showLeaderLines val="0"/>
+              </c:ext>
+            </c:extLst>
           </c:dLbls>
           <c:cat>
-            <c:multiLvlStrRef>
+            <c:strRef>
               <c:f>Sheet1!$A$2:$A$4</c:f>
-              <c:multiLvlStrCache>
+              <c:strCache>
                 <c:ptCount val="3"/>
-                <c:lvl>
-                  <c:pt idx="0">
-                    <c:v>Hindi</c:v>
-                  </c:pt>
-                  <c:pt idx="1">
-                    <c:v>Tamil</c:v>
-                  </c:pt>
-                  <c:pt idx="2">
-                    <c:v>Malayalam</c:v>
-                  </c:pt>
-                </c:lvl>
-              </c:multiLvlStrCache>
-            </c:multiLvlStrRef>
+                <c:pt idx="0">
+                  <c:v>Hindi</c:v>
+                </c:pt>
+                <c:pt idx="1">
+                  <c:v>Tamil</c:v>
+                </c:pt>
+                <c:pt idx="2">
+                  <c:v>Malayalam</c:v>
+                </c:pt>
+              </c:strCache>
+            </c:strRef>
           </c:cat>
           <c:val>
             <c:numRef>
@@ -1452,6 +1492,11 @@
               </c:numCache>
             </c:numRef>
           </c:val>
+          <c:extLst>
+            <c:ext xmlns:c16="http://schemas.microsoft.com/office/drawing/2014/chart" uri="{C3380CC4-5D6E-409C-BE32-E72D297353CC}">
+              <c16:uniqueId val="{00000000-EDF3-4F63-8E08-6F6883FB15C4}"/>
+            </c:ext>
+          </c:extLst>
         </c:ser>
         <c:ser>
           <c:idx val="1"/>
@@ -1476,18 +1521,26 @@
           <c:invertIfNegative val="0"/>
           <c:dLbls>
             <c:numFmt formatCode="0.00" sourceLinked="0"/>
+            <c:spPr>
+              <a:noFill/>
+              <a:ln>
+                <a:noFill/>
+              </a:ln>
+              <a:effectLst/>
+            </c:spPr>
             <c:txPr>
               <a:bodyPr/>
               <a:lstStyle/>
               <a:p>
                 <a:pPr>
-                  <a:defRPr b="0" i="0" strike="noStrike" sz="1100" u="none">
+                  <a:defRPr sz="1100" b="0" i="0" u="none" strike="noStrike">
                     <a:solidFill>
                       <a:srgbClr val="1E2A36"/>
                     </a:solidFill>
                     <a:latin typeface="+mn-lt"/>
                   </a:defRPr>
                 </a:pPr>
+                <a:endParaRPr lang="en-US"/>
               </a:p>
             </c:txPr>
             <c:showLegendKey val="0"/>
@@ -1497,25 +1550,28 @@
             <c:showPercent val="0"/>
             <c:showBubbleSize val="0"/>
             <c:showLeaderLines val="0"/>
+            <c:extLst>
+              <c:ext xmlns:c15="http://schemas.microsoft.com/office/drawing/2012/chart" uri="{CE6537A1-D6FC-4f65-9D91-7224C49458BB}">
+                <c15:showLeaderLines val="0"/>
+              </c:ext>
+            </c:extLst>
           </c:dLbls>
           <c:cat>
-            <c:multiLvlStrRef>
+            <c:strRef>
               <c:f>Sheet1!$A$2:$A$4</c:f>
-              <c:multiLvlStrCache>
+              <c:strCache>
                 <c:ptCount val="3"/>
-                <c:lvl>
-                  <c:pt idx="0">
-                    <c:v>Hindi</c:v>
-                  </c:pt>
-                  <c:pt idx="1">
-                    <c:v>Tamil</c:v>
-                  </c:pt>
-                  <c:pt idx="2">
-                    <c:v>Malayalam</c:v>
-                  </c:pt>
-                </c:lvl>
-              </c:multiLvlStrCache>
-            </c:multiLvlStrRef>
+                <c:pt idx="0">
+                  <c:v>Hindi</c:v>
+                </c:pt>
+                <c:pt idx="1">
+                  <c:v>Tamil</c:v>
+                </c:pt>
+                <c:pt idx="2">
+                  <c:v>Malayalam</c:v>
+                </c:pt>
+              </c:strCache>
+            </c:strRef>
           </c:cat>
           <c:val>
             <c:numRef>
@@ -1524,7 +1580,7 @@
                 <c:formatCode>General</c:formatCode>
                 <c:ptCount val="3"/>
                 <c:pt idx="0">
-                  <c:v>0.28</c:v>
+                  <c:v>0.28000000000000003</c:v>
                 </c:pt>
                 <c:pt idx="1">
                   <c:v>0.37</c:v>
@@ -1535,36 +1591,23 @@
               </c:numCache>
             </c:numRef>
           </c:val>
+          <c:extLst>
+            <c:ext xmlns:c16="http://schemas.microsoft.com/office/drawing/2014/chart" uri="{C3380CC4-5D6E-409C-BE32-E72D297353CC}">
+              <c16:uniqueId val="{00000001-EDF3-4F63-8E08-6F6883FB15C4}"/>
+            </c:ext>
+          </c:extLst>
         </c:ser>
         <c:dLbls>
-          <c:numFmt formatCode="0.00" sourceLinked="0"/>
-          <c:txPr>
-            <a:bodyPr/>
-            <a:lstStyle/>
-            <a:p>
-              <a:pPr>
-                <a:defRPr b="0" i="0" strike="noStrike" sz="1100" u="none">
-                  <a:solidFill>
-                    <a:srgbClr val="1E2A36"/>
-                  </a:solidFill>
-                  <a:latin typeface="+mn-lt"/>
-                </a:defRPr>
-              </a:pPr>
-            </a:p>
-          </c:txPr>
           <c:showLegendKey val="0"/>
           <c:showVal val="1"/>
           <c:showCatName val="0"/>
           <c:showSerName val="0"/>
           <c:showPercent val="0"/>
           <c:showBubbleSize val="0"/>
-          <c:showLeaderLines val="0"/>
         </c:dLbls>
         <c:gapWidth val="60"/>
-        <c:overlap val="0"/>
         <c:axId val="2094734554"/>
         <c:axId val="2094734552"/>
-        <c:axId val="2094734556"/>
       </c:barChart>
       <c:catAx>
         <c:axId val="2094734554"/>
@@ -1603,13 +1646,14 @@
         <c:crosses val="autoZero"/>
         <c:auto val="1"/>
         <c:lblAlgn val="ctr"/>
+        <c:lblOffset val="100"/>
         <c:noMultiLvlLbl val="1"/>
       </c:catAx>
       <c:valAx>
         <c:axId val="2094734552"/>
         <c:scaling>
           <c:orientation val="minMax"/>
-          <c:max val="1.1"/>
+          <c:max val="1.1000000000000001"/>
           <c:min val="0"/>
         </c:scaling>
         <c:delete val="1"/>
@@ -1629,28 +1673,6 @@
         <c:majorTickMark val="out"/>
         <c:minorTickMark val="none"/>
         <c:tickLblPos val="nextTo"/>
-        <c:spPr>
-          <a:ln w="12700" cap="flat">
-            <a:noFill/>
-            <a:prstDash val="solid"/>
-            <a:round/>
-          </a:ln>
-        </c:spPr>
-        <c:txPr>
-          <a:bodyPr/>
-          <a:lstStyle/>
-          <a:p>
-            <a:pPr>
-              <a:defRPr sz="1100" b="0" i="0" u="none" strike="noStrike">
-                <a:solidFill>
-                  <a:srgbClr val="6B7785"/>
-                </a:solidFill>
-                <a:latin typeface="+mn-lt"/>
-              </a:defRPr>
-            </a:pPr>
-            <a:endParaRPr lang="en-US"/>
-          </a:p>
-        </c:txPr>
         <c:crossAx val="2094734554"/>
         <c:crosses val="autoZero"/>
         <c:crossBetween val="between"/>
@@ -1685,6 +1707,7 @@
     </c:legend>
     <c:plotVisOnly val="1"/>
     <c:dispBlanksAs val="span"/>
+    <c:showDLblsOverMax val="1"/>
   </c:chart>
   <c:spPr>
     <a:noFill/>
@@ -1700,9 +1723,11 @@
 </file>
 
 <file path=ppt/charts/chart5.xml><?xml version="1.0" encoding="utf-8"?>
-<c:chartSpace xmlns:c="http://schemas.openxmlformats.org/drawingml/2006/chart" xmlns:a="http://schemas.openxmlformats.org/drawingml/2006/main" xmlns:r="http://schemas.openxmlformats.org/officeDocument/2006/relationships">
+<c:chartSpace xmlns:c="http://schemas.openxmlformats.org/drawingml/2006/chart" xmlns:a="http://schemas.openxmlformats.org/drawingml/2006/main" xmlns:r="http://schemas.openxmlformats.org/officeDocument/2006/relationships" xmlns:c16r2="http://schemas.microsoft.com/office/drawing/2015/06/chart">
   <c:date1904 val="0"/>
+  <c:lang val="en-US"/>
   <c:roundedCorners val="1"/>
+  <c:style val="2"/>
   <c:chart>
     <c:title>
       <c:tx>
@@ -1730,7 +1755,6 @@
           </a:p>
         </c:rich>
       </c:tx>
-      <c:layout/>
       <c:overlay val="0"/>
     </c:title>
     <c:autoTitleDeleted val="0"/>
@@ -1763,18 +1787,26 @@
           <c:invertIfNegative val="0"/>
           <c:dLbls>
             <c:numFmt formatCode="0.00" sourceLinked="0"/>
+            <c:spPr>
+              <a:noFill/>
+              <a:ln>
+                <a:noFill/>
+              </a:ln>
+              <a:effectLst/>
+            </c:spPr>
             <c:txPr>
               <a:bodyPr/>
               <a:lstStyle/>
               <a:p>
                 <a:pPr>
-                  <a:defRPr b="0" i="0" strike="noStrike" sz="1100" u="none">
+                  <a:defRPr sz="1100" b="0" i="0" u="none" strike="noStrike">
                     <a:solidFill>
                       <a:srgbClr val="1E2A36"/>
                     </a:solidFill>
                     <a:latin typeface="+mn-lt"/>
                   </a:defRPr>
                 </a:pPr>
+                <a:endParaRPr lang="en-US"/>
               </a:p>
             </c:txPr>
             <c:showLegendKey val="0"/>
@@ -1784,28 +1816,31 @@
             <c:showPercent val="0"/>
             <c:showBubbleSize val="0"/>
             <c:showLeaderLines val="0"/>
+            <c:extLst>
+              <c:ext xmlns:c15="http://schemas.microsoft.com/office/drawing/2012/chart" uri="{CE6537A1-D6FC-4f65-9D91-7224C49458BB}">
+                <c15:showLeaderLines val="0"/>
+              </c:ext>
+            </c:extLst>
           </c:dLbls>
           <c:cat>
-            <c:multiLvlStrRef>
+            <c:strRef>
               <c:f>Sheet1!$A$2:$A$5</c:f>
-              <c:multiLvlStrCache>
+              <c:strCache>
                 <c:ptCount val="4"/>
-                <c:lvl>
-                  <c:pt idx="0">
-                    <c:v>Vessel</c:v>
-                  </c:pt>
-                  <c:pt idx="1">
-                    <c:v>Position</c:v>
-                  </c:pt>
-                  <c:pt idx="2">
-                    <c:v>Persons on board</c:v>
-                  </c:pt>
-                  <c:pt idx="3">
-                    <c:v>MMSI</c:v>
-                  </c:pt>
-                </c:lvl>
-              </c:multiLvlStrCache>
-            </c:multiLvlStrRef>
+                <c:pt idx="0">
+                  <c:v>Vessel</c:v>
+                </c:pt>
+                <c:pt idx="1">
+                  <c:v>Position</c:v>
+                </c:pt>
+                <c:pt idx="2">
+                  <c:v>Persons on board</c:v>
+                </c:pt>
+                <c:pt idx="3">
+                  <c:v>MMSI</c:v>
+                </c:pt>
+              </c:strCache>
+            </c:strRef>
           </c:cat>
           <c:val>
             <c:numRef>
@@ -1817,10 +1852,10 @@
                   <c:v>0.03</c:v>
                 </c:pt>
                 <c:pt idx="1">
-                  <c:v>0.55</c:v>
+                  <c:v>0.55000000000000004</c:v>
                 </c:pt>
                 <c:pt idx="2">
-                  <c:v>0.55</c:v>
+                  <c:v>0.55000000000000004</c:v>
                 </c:pt>
                 <c:pt idx="3">
                   <c:v>0</c:v>
@@ -1828,6 +1863,11 @@
               </c:numCache>
             </c:numRef>
           </c:val>
+          <c:extLst>
+            <c:ext xmlns:c16="http://schemas.microsoft.com/office/drawing/2014/chart" uri="{C3380CC4-5D6E-409C-BE32-E72D297353CC}">
+              <c16:uniqueId val="{00000000-DAE1-4A90-9934-46C964AD8537}"/>
+            </c:ext>
+          </c:extLst>
         </c:ser>
         <c:ser>
           <c:idx val="1"/>
@@ -1852,18 +1892,26 @@
           <c:invertIfNegative val="0"/>
           <c:dLbls>
             <c:numFmt formatCode="0.00" sourceLinked="0"/>
+            <c:spPr>
+              <a:noFill/>
+              <a:ln>
+                <a:noFill/>
+              </a:ln>
+              <a:effectLst/>
+            </c:spPr>
             <c:txPr>
               <a:bodyPr/>
               <a:lstStyle/>
               <a:p>
                 <a:pPr>
-                  <a:defRPr b="0" i="0" strike="noStrike" sz="1100" u="none">
+                  <a:defRPr sz="1100" b="0" i="0" u="none" strike="noStrike">
                     <a:solidFill>
                       <a:srgbClr val="1E2A36"/>
                     </a:solidFill>
                     <a:latin typeface="+mn-lt"/>
                   </a:defRPr>
                 </a:pPr>
+                <a:endParaRPr lang="en-US"/>
               </a:p>
             </c:txPr>
             <c:showLegendKey val="0"/>
@@ -1873,28 +1921,31 @@
             <c:showPercent val="0"/>
             <c:showBubbleSize val="0"/>
             <c:showLeaderLines val="0"/>
+            <c:extLst>
+              <c:ext xmlns:c15="http://schemas.microsoft.com/office/drawing/2012/chart" uri="{CE6537A1-D6FC-4f65-9D91-7224C49458BB}">
+                <c15:showLeaderLines val="0"/>
+              </c:ext>
+            </c:extLst>
           </c:dLbls>
           <c:cat>
-            <c:multiLvlStrRef>
+            <c:strRef>
               <c:f>Sheet1!$A$2:$A$5</c:f>
-              <c:multiLvlStrCache>
+              <c:strCache>
                 <c:ptCount val="4"/>
-                <c:lvl>
-                  <c:pt idx="0">
-                    <c:v>Vessel</c:v>
-                  </c:pt>
-                  <c:pt idx="1">
-                    <c:v>Position</c:v>
-                  </c:pt>
-                  <c:pt idx="2">
-                    <c:v>Persons on board</c:v>
-                  </c:pt>
-                  <c:pt idx="3">
-                    <c:v>MMSI</c:v>
-                  </c:pt>
-                </c:lvl>
-              </c:multiLvlStrCache>
-            </c:multiLvlStrRef>
+                <c:pt idx="0">
+                  <c:v>Vessel</c:v>
+                </c:pt>
+                <c:pt idx="1">
+                  <c:v>Position</c:v>
+                </c:pt>
+                <c:pt idx="2">
+                  <c:v>Persons on board</c:v>
+                </c:pt>
+                <c:pt idx="3">
+                  <c:v>MMSI</c:v>
+                </c:pt>
+              </c:strCache>
+            </c:strRef>
           </c:cat>
           <c:val>
             <c:numRef>
@@ -1917,36 +1968,23 @@
               </c:numCache>
             </c:numRef>
           </c:val>
+          <c:extLst>
+            <c:ext xmlns:c16="http://schemas.microsoft.com/office/drawing/2014/chart" uri="{C3380CC4-5D6E-409C-BE32-E72D297353CC}">
+              <c16:uniqueId val="{00000001-DAE1-4A90-9934-46C964AD8537}"/>
+            </c:ext>
+          </c:extLst>
         </c:ser>
         <c:dLbls>
-          <c:numFmt formatCode="0.00" sourceLinked="0"/>
-          <c:txPr>
-            <a:bodyPr/>
-            <a:lstStyle/>
-            <a:p>
-              <a:pPr>
-                <a:defRPr b="0" i="0" strike="noStrike" sz="1100" u="none">
-                  <a:solidFill>
-                    <a:srgbClr val="1E2A36"/>
-                  </a:solidFill>
-                  <a:latin typeface="+mn-lt"/>
-                </a:defRPr>
-              </a:pPr>
-            </a:p>
-          </c:txPr>
           <c:showLegendKey val="0"/>
           <c:showVal val="1"/>
           <c:showCatName val="0"/>
           <c:showSerName val="0"/>
           <c:showPercent val="0"/>
           <c:showBubbleSize val="0"/>
-          <c:showLeaderLines val="0"/>
         </c:dLbls>
         <c:gapWidth val="60"/>
-        <c:overlap val="0"/>
         <c:axId val="2094734554"/>
         <c:axId val="2094734552"/>
-        <c:axId val="2094734556"/>
       </c:barChart>
       <c:catAx>
         <c:axId val="2094734554"/>
@@ -1985,6 +2023,7 @@
         <c:crosses val="autoZero"/>
         <c:auto val="1"/>
         <c:lblAlgn val="ctr"/>
+        <c:lblOffset val="100"/>
         <c:noMultiLvlLbl val="1"/>
       </c:catAx>
       <c:valAx>
@@ -2011,28 +2050,6 @@
         <c:majorTickMark val="out"/>
         <c:minorTickMark val="none"/>
         <c:tickLblPos val="nextTo"/>
-        <c:spPr>
-          <a:ln w="12700" cap="flat">
-            <a:noFill/>
-            <a:prstDash val="solid"/>
-            <a:round/>
-          </a:ln>
-        </c:spPr>
-        <c:txPr>
-          <a:bodyPr/>
-          <a:lstStyle/>
-          <a:p>
-            <a:pPr>
-              <a:defRPr sz="1100" b="0" i="0" u="none" strike="noStrike">
-                <a:solidFill>
-                  <a:srgbClr val="6B7785"/>
-                </a:solidFill>
-                <a:latin typeface="+mn-lt"/>
-              </a:defRPr>
-            </a:pPr>
-            <a:endParaRPr lang="en-US"/>
-          </a:p>
-        </c:txPr>
         <c:crossAx val="2094734554"/>
         <c:crosses val="autoZero"/>
         <c:crossBetween val="between"/>
@@ -2067,6 +2084,7 @@
     </c:legend>
     <c:plotVisOnly val="1"/>
     <c:dispBlanksAs val="span"/>
+    <c:showDLblsOverMax val="1"/>
   </c:chart>
   <c:spPr>
     <a:noFill/>
@@ -2082,9 +2100,11 @@
 </file>
 
 <file path=ppt/charts/chart6.xml><?xml version="1.0" encoding="utf-8"?>
-<c:chartSpace xmlns:c="http://schemas.openxmlformats.org/drawingml/2006/chart" xmlns:a="http://schemas.openxmlformats.org/drawingml/2006/main" xmlns:r="http://schemas.openxmlformats.org/officeDocument/2006/relationships">
+<c:chartSpace xmlns:c="http://schemas.openxmlformats.org/drawingml/2006/chart" xmlns:a="http://schemas.openxmlformats.org/drawingml/2006/main" xmlns:r="http://schemas.openxmlformats.org/officeDocument/2006/relationships" xmlns:c16r2="http://schemas.microsoft.com/office/drawing/2015/06/chart">
   <c:date1904 val="0"/>
+  <c:lang val="en-US"/>
   <c:roundedCorners val="1"/>
+  <c:style val="2"/>
   <c:chart>
     <c:title>
       <c:tx>
@@ -2112,7 +2132,6 @@
           </a:p>
         </c:rich>
       </c:tx>
-      <c:layout/>
       <c:overlay val="0"/>
     </c:title>
     <c:autoTitleDeleted val="0"/>
@@ -2145,18 +2164,26 @@
           <c:invertIfNegative val="0"/>
           <c:dLbls>
             <c:numFmt formatCode="0.0" sourceLinked="0"/>
+            <c:spPr>
+              <a:noFill/>
+              <a:ln>
+                <a:noFill/>
+              </a:ln>
+              <a:effectLst/>
+            </c:spPr>
             <c:txPr>
               <a:bodyPr/>
               <a:lstStyle/>
               <a:p>
                 <a:pPr>
-                  <a:defRPr b="0" i="0" strike="noStrike" sz="1100" u="none">
+                  <a:defRPr sz="1100" b="0" i="0" u="none" strike="noStrike">
                     <a:solidFill>
                       <a:srgbClr val="1E2A36"/>
                     </a:solidFill>
                     <a:latin typeface="+mn-lt"/>
                   </a:defRPr>
                 </a:pPr>
+                <a:endParaRPr lang="en-US"/>
               </a:p>
             </c:txPr>
             <c:showLegendKey val="0"/>
@@ -2166,25 +2193,28 @@
             <c:showPercent val="0"/>
             <c:showBubbleSize val="0"/>
             <c:showLeaderLines val="0"/>
+            <c:extLst>
+              <c:ext xmlns:c15="http://schemas.microsoft.com/office/drawing/2012/chart" uri="{CE6537A1-D6FC-4f65-9D91-7224C49458BB}">
+                <c15:showLeaderLines val="0"/>
+              </c:ext>
+            </c:extLst>
           </c:dLbls>
           <c:cat>
-            <c:multiLvlStrRef>
+            <c:strRef>
               <c:f>Sheet1!$A$2:$A$4</c:f>
-              <c:multiLvlStrCache>
+              <c:strCache>
                 <c:ptCount val="3"/>
-                <c:lvl>
-                  <c:pt idx="0">
-                    <c:v>6 h</c:v>
-                  </c:pt>
-                  <c:pt idx="1">
-                    <c:v>12 h</c:v>
-                  </c:pt>
-                  <c:pt idx="2">
-                    <c:v>24 h</c:v>
-                  </c:pt>
-                </c:lvl>
-              </c:multiLvlStrCache>
-            </c:multiLvlStrRef>
+                <c:pt idx="0">
+                  <c:v>6 h</c:v>
+                </c:pt>
+                <c:pt idx="1">
+                  <c:v>12 h</c:v>
+                </c:pt>
+                <c:pt idx="2">
+                  <c:v>24 h</c:v>
+                </c:pt>
+              </c:strCache>
+            </c:strRef>
           </c:cat>
           <c:val>
             <c:numRef>
@@ -2204,6 +2234,11 @@
               </c:numCache>
             </c:numRef>
           </c:val>
+          <c:extLst>
+            <c:ext xmlns:c16="http://schemas.microsoft.com/office/drawing/2014/chart" uri="{C3380CC4-5D6E-409C-BE32-E72D297353CC}">
+              <c16:uniqueId val="{00000000-6A90-42CA-9D98-1DA638FD91AD}"/>
+            </c:ext>
+          </c:extLst>
         </c:ser>
         <c:ser>
           <c:idx val="1"/>
@@ -2228,18 +2263,26 @@
           <c:invertIfNegative val="0"/>
           <c:dLbls>
             <c:numFmt formatCode="0.0" sourceLinked="0"/>
+            <c:spPr>
+              <a:noFill/>
+              <a:ln>
+                <a:noFill/>
+              </a:ln>
+              <a:effectLst/>
+            </c:spPr>
             <c:txPr>
               <a:bodyPr/>
               <a:lstStyle/>
               <a:p>
                 <a:pPr>
-                  <a:defRPr b="0" i="0" strike="noStrike" sz="1100" u="none">
+                  <a:defRPr sz="1100" b="0" i="0" u="none" strike="noStrike">
                     <a:solidFill>
                       <a:srgbClr val="1E2A36"/>
                     </a:solidFill>
                     <a:latin typeface="+mn-lt"/>
                   </a:defRPr>
                 </a:pPr>
+                <a:endParaRPr lang="en-US"/>
               </a:p>
             </c:txPr>
             <c:showLegendKey val="0"/>
@@ -2249,25 +2292,28 @@
             <c:showPercent val="0"/>
             <c:showBubbleSize val="0"/>
             <c:showLeaderLines val="0"/>
+            <c:extLst>
+              <c:ext xmlns:c15="http://schemas.microsoft.com/office/drawing/2012/chart" uri="{CE6537A1-D6FC-4f65-9D91-7224C49458BB}">
+                <c15:showLeaderLines val="0"/>
+              </c:ext>
+            </c:extLst>
           </c:dLbls>
           <c:cat>
-            <c:multiLvlStrRef>
+            <c:strRef>
               <c:f>Sheet1!$A$2:$A$4</c:f>
-              <c:multiLvlStrCache>
+              <c:strCache>
                 <c:ptCount val="3"/>
-                <c:lvl>
-                  <c:pt idx="0">
-                    <c:v>6 h</c:v>
-                  </c:pt>
-                  <c:pt idx="1">
-                    <c:v>12 h</c:v>
-                  </c:pt>
-                  <c:pt idx="2">
-                    <c:v>24 h</c:v>
-                  </c:pt>
-                </c:lvl>
-              </c:multiLvlStrCache>
-            </c:multiLvlStrRef>
+                <c:pt idx="0">
+                  <c:v>6 h</c:v>
+                </c:pt>
+                <c:pt idx="1">
+                  <c:v>12 h</c:v>
+                </c:pt>
+                <c:pt idx="2">
+                  <c:v>24 h</c:v>
+                </c:pt>
+              </c:strCache>
+            </c:strRef>
           </c:cat>
           <c:val>
             <c:numRef>
@@ -2287,6 +2333,11 @@
               </c:numCache>
             </c:numRef>
           </c:val>
+          <c:extLst>
+            <c:ext xmlns:c16="http://schemas.microsoft.com/office/drawing/2014/chart" uri="{C3380CC4-5D6E-409C-BE32-E72D297353CC}">
+              <c16:uniqueId val="{00000001-6A90-42CA-9D98-1DA638FD91AD}"/>
+            </c:ext>
+          </c:extLst>
         </c:ser>
         <c:ser>
           <c:idx val="2"/>
@@ -2311,18 +2362,26 @@
           <c:invertIfNegative val="0"/>
           <c:dLbls>
             <c:numFmt formatCode="0.0" sourceLinked="0"/>
+            <c:spPr>
+              <a:noFill/>
+              <a:ln>
+                <a:noFill/>
+              </a:ln>
+              <a:effectLst/>
+            </c:spPr>
             <c:txPr>
               <a:bodyPr/>
               <a:lstStyle/>
               <a:p>
                 <a:pPr>
-                  <a:defRPr b="0" i="0" strike="noStrike" sz="1100" u="none">
+                  <a:defRPr sz="1100" b="0" i="0" u="none" strike="noStrike">
                     <a:solidFill>
                       <a:srgbClr val="1E2A36"/>
                     </a:solidFill>
                     <a:latin typeface="+mn-lt"/>
                   </a:defRPr>
                 </a:pPr>
+                <a:endParaRPr lang="en-US"/>
               </a:p>
             </c:txPr>
             <c:showLegendKey val="0"/>
@@ -2332,25 +2391,28 @@
             <c:showPercent val="0"/>
             <c:showBubbleSize val="0"/>
             <c:showLeaderLines val="0"/>
+            <c:extLst>
+              <c:ext xmlns:c15="http://schemas.microsoft.com/office/drawing/2012/chart" uri="{CE6537A1-D6FC-4f65-9D91-7224C49458BB}">
+                <c15:showLeaderLines val="0"/>
+              </c:ext>
+            </c:extLst>
           </c:dLbls>
           <c:cat>
-            <c:multiLvlStrRef>
+            <c:strRef>
               <c:f>Sheet1!$A$2:$A$4</c:f>
-              <c:multiLvlStrCache>
+              <c:strCache>
                 <c:ptCount val="3"/>
-                <c:lvl>
-                  <c:pt idx="0">
-                    <c:v>6 h</c:v>
-                  </c:pt>
-                  <c:pt idx="1">
-                    <c:v>12 h</c:v>
-                  </c:pt>
-                  <c:pt idx="2">
-                    <c:v>24 h</c:v>
-                  </c:pt>
-                </c:lvl>
-              </c:multiLvlStrCache>
-            </c:multiLvlStrRef>
+                <c:pt idx="0">
+                  <c:v>6 h</c:v>
+                </c:pt>
+                <c:pt idx="1">
+                  <c:v>12 h</c:v>
+                </c:pt>
+                <c:pt idx="2">
+                  <c:v>24 h</c:v>
+                </c:pt>
+              </c:strCache>
+            </c:strRef>
           </c:cat>
           <c:val>
             <c:numRef>
@@ -2370,36 +2432,23 @@
               </c:numCache>
             </c:numRef>
           </c:val>
+          <c:extLst>
+            <c:ext xmlns:c16="http://schemas.microsoft.com/office/drawing/2014/chart" uri="{C3380CC4-5D6E-409C-BE32-E72D297353CC}">
+              <c16:uniqueId val="{00000002-6A90-42CA-9D98-1DA638FD91AD}"/>
+            </c:ext>
+          </c:extLst>
         </c:ser>
         <c:dLbls>
-          <c:numFmt formatCode="0.0" sourceLinked="0"/>
-          <c:txPr>
-            <a:bodyPr/>
-            <a:lstStyle/>
-            <a:p>
-              <a:pPr>
-                <a:defRPr b="0" i="0" strike="noStrike" sz="1100" u="none">
-                  <a:solidFill>
-                    <a:srgbClr val="1E2A36"/>
-                  </a:solidFill>
-                  <a:latin typeface="+mn-lt"/>
-                </a:defRPr>
-              </a:pPr>
-            </a:p>
-          </c:txPr>
           <c:showLegendKey val="0"/>
           <c:showVal val="1"/>
           <c:showCatName val="0"/>
           <c:showSerName val="0"/>
           <c:showPercent val="0"/>
           <c:showBubbleSize val="0"/>
-          <c:showLeaderLines val="0"/>
         </c:dLbls>
         <c:gapWidth val="50"/>
-        <c:overlap val="0"/>
         <c:axId val="2094734554"/>
         <c:axId val="2094734552"/>
-        <c:axId val="2094734556"/>
       </c:barChart>
       <c:catAx>
         <c:axId val="2094734554"/>
@@ -2438,6 +2487,7 @@
         <c:crosses val="autoZero"/>
         <c:auto val="1"/>
         <c:lblAlgn val="ctr"/>
+        <c:lblOffset val="100"/>
         <c:noMultiLvlLbl val="1"/>
       </c:catAx>
       <c:valAx>
@@ -2463,28 +2513,6 @@
         <c:majorTickMark val="out"/>
         <c:minorTickMark val="none"/>
         <c:tickLblPos val="nextTo"/>
-        <c:spPr>
-          <a:ln w="12700" cap="flat">
-            <a:noFill/>
-            <a:prstDash val="solid"/>
-            <a:round/>
-          </a:ln>
-        </c:spPr>
-        <c:txPr>
-          <a:bodyPr/>
-          <a:lstStyle/>
-          <a:p>
-            <a:pPr>
-              <a:defRPr sz="1100" b="0" i="0" u="none" strike="noStrike">
-                <a:solidFill>
-                  <a:srgbClr val="6B7785"/>
-                </a:solidFill>
-                <a:latin typeface="+mn-lt"/>
-              </a:defRPr>
-            </a:pPr>
-            <a:endParaRPr lang="en-US"/>
-          </a:p>
-        </c:txPr>
         <c:crossAx val="2094734554"/>
         <c:crosses val="autoZero"/>
         <c:crossBetween val="between"/>
@@ -2519,6 +2547,7 @@
     </c:legend>
     <c:plotVisOnly val="1"/>
     <c:dispBlanksAs val="span"/>
+    <c:showDLblsOverMax val="1"/>
   </c:chart>
   <c:spPr>
     <a:noFill/>
@@ -2534,9 +2563,11 @@
 </file>
 
 <file path=ppt/charts/chart7.xml><?xml version="1.0" encoding="utf-8"?>
-<c:chartSpace xmlns:c="http://schemas.openxmlformats.org/drawingml/2006/chart" xmlns:a="http://schemas.openxmlformats.org/drawingml/2006/main" xmlns:r="http://schemas.openxmlformats.org/officeDocument/2006/relationships">
+<c:chartSpace xmlns:c="http://schemas.openxmlformats.org/drawingml/2006/chart" xmlns:a="http://schemas.openxmlformats.org/drawingml/2006/main" xmlns:r="http://schemas.openxmlformats.org/officeDocument/2006/relationships" xmlns:c16r2="http://schemas.microsoft.com/office/drawing/2015/06/chart">
   <c:date1904 val="0"/>
+  <c:lang val="en-US"/>
   <c:roundedCorners val="1"/>
+  <c:style val="2"/>
   <c:chart>
     <c:title>
       <c:tx>
@@ -2564,7 +2595,6 @@
           </a:p>
         </c:rich>
       </c:tx>
-      <c:layout/>
       <c:overlay val="0"/>
     </c:title>
     <c:autoTitleDeleted val="0"/>
@@ -2597,18 +2627,26 @@
           <c:invertIfNegative val="0"/>
           <c:dLbls>
             <c:numFmt formatCode="0.00" sourceLinked="0"/>
+            <c:spPr>
+              <a:noFill/>
+              <a:ln>
+                <a:noFill/>
+              </a:ln>
+              <a:effectLst/>
+            </c:spPr>
             <c:txPr>
               <a:bodyPr/>
               <a:lstStyle/>
               <a:p>
                 <a:pPr>
-                  <a:defRPr b="0" i="0" strike="noStrike" sz="1100" u="none">
+                  <a:defRPr sz="1100" b="0" i="0" u="none" strike="noStrike">
                     <a:solidFill>
                       <a:srgbClr val="1E2A36"/>
                     </a:solidFill>
                     <a:latin typeface="+mn-lt"/>
                   </a:defRPr>
                 </a:pPr>
+                <a:endParaRPr lang="en-US"/>
               </a:p>
             </c:txPr>
             <c:showLegendKey val="0"/>
@@ -2618,25 +2656,28 @@
             <c:showPercent val="0"/>
             <c:showBubbleSize val="0"/>
             <c:showLeaderLines val="0"/>
+            <c:extLst>
+              <c:ext xmlns:c15="http://schemas.microsoft.com/office/drawing/2012/chart" uri="{CE6537A1-D6FC-4f65-9D91-7224C49458BB}">
+                <c15:showLeaderLines val="0"/>
+              </c:ext>
+            </c:extLst>
           </c:dLbls>
           <c:cat>
-            <c:multiLvlStrRef>
+            <c:strRef>
               <c:f>Sheet1!$A$2:$A$4</c:f>
-              <c:multiLvlStrCache>
+              <c:strCache>
                 <c:ptCount val="3"/>
-                <c:lvl>
-                  <c:pt idx="0">
-                    <c:v>Vessel name</c:v>
-                  </c:pt>
-                  <c:pt idx="1">
-                    <c:v>MMSI</c:v>
-                  </c:pt>
-                  <c:pt idx="2">
-                    <c:v>Position ≤ 1 nm</c:v>
-                  </c:pt>
-                </c:lvl>
-              </c:multiLvlStrCache>
-            </c:multiLvlStrRef>
+                <c:pt idx="0">
+                  <c:v>Vessel name</c:v>
+                </c:pt>
+                <c:pt idx="1">
+                  <c:v>MMSI</c:v>
+                </c:pt>
+                <c:pt idx="2">
+                  <c:v>Position ≤ 1 nm</c:v>
+                </c:pt>
+              </c:strCache>
+            </c:strRef>
           </c:cat>
           <c:val>
             <c:numRef>
@@ -2656,6 +2697,11 @@
               </c:numCache>
             </c:numRef>
           </c:val>
+          <c:extLst>
+            <c:ext xmlns:c16="http://schemas.microsoft.com/office/drawing/2014/chart" uri="{C3380CC4-5D6E-409C-BE32-E72D297353CC}">
+              <c16:uniqueId val="{00000000-64C4-48C1-B375-F99B75AD7432}"/>
+            </c:ext>
+          </c:extLst>
         </c:ser>
         <c:ser>
           <c:idx val="1"/>
@@ -2680,18 +2726,26 @@
           <c:invertIfNegative val="0"/>
           <c:dLbls>
             <c:numFmt formatCode="0.00" sourceLinked="0"/>
+            <c:spPr>
+              <a:noFill/>
+              <a:ln>
+                <a:noFill/>
+              </a:ln>
+              <a:effectLst/>
+            </c:spPr>
             <c:txPr>
               <a:bodyPr/>
               <a:lstStyle/>
               <a:p>
                 <a:pPr>
-                  <a:defRPr b="0" i="0" strike="noStrike" sz="1100" u="none">
+                  <a:defRPr sz="1100" b="0" i="0" u="none" strike="noStrike">
                     <a:solidFill>
                       <a:srgbClr val="1E2A36"/>
                     </a:solidFill>
                     <a:latin typeface="+mn-lt"/>
                   </a:defRPr>
                 </a:pPr>
+                <a:endParaRPr lang="en-US"/>
               </a:p>
             </c:txPr>
             <c:showLegendKey val="0"/>
@@ -2701,25 +2755,28 @@
             <c:showPercent val="0"/>
             <c:showBubbleSize val="0"/>
             <c:showLeaderLines val="0"/>
+            <c:extLst>
+              <c:ext xmlns:c15="http://schemas.microsoft.com/office/drawing/2012/chart" uri="{CE6537A1-D6FC-4f65-9D91-7224C49458BB}">
+                <c15:showLeaderLines val="0"/>
+              </c:ext>
+            </c:extLst>
           </c:dLbls>
           <c:cat>
-            <c:multiLvlStrRef>
+            <c:strRef>
               <c:f>Sheet1!$A$2:$A$4</c:f>
-              <c:multiLvlStrCache>
+              <c:strCache>
                 <c:ptCount val="3"/>
-                <c:lvl>
-                  <c:pt idx="0">
-                    <c:v>Vessel name</c:v>
-                  </c:pt>
-                  <c:pt idx="1">
-                    <c:v>MMSI</c:v>
-                  </c:pt>
-                  <c:pt idx="2">
-                    <c:v>Position ≤ 1 nm</c:v>
-                  </c:pt>
-                </c:lvl>
-              </c:multiLvlStrCache>
-            </c:multiLvlStrRef>
+                <c:pt idx="0">
+                  <c:v>Vessel name</c:v>
+                </c:pt>
+                <c:pt idx="1">
+                  <c:v>MMSI</c:v>
+                </c:pt>
+                <c:pt idx="2">
+                  <c:v>Position ≤ 1 nm</c:v>
+                </c:pt>
+              </c:strCache>
+            </c:strRef>
           </c:cat>
           <c:val>
             <c:numRef>
@@ -2739,36 +2796,23 @@
               </c:numCache>
             </c:numRef>
           </c:val>
+          <c:extLst>
+            <c:ext xmlns:c16="http://schemas.microsoft.com/office/drawing/2014/chart" uri="{C3380CC4-5D6E-409C-BE32-E72D297353CC}">
+              <c16:uniqueId val="{00000001-64C4-48C1-B375-F99B75AD7432}"/>
+            </c:ext>
+          </c:extLst>
         </c:ser>
         <c:dLbls>
-          <c:numFmt formatCode="0.00" sourceLinked="0"/>
-          <c:txPr>
-            <a:bodyPr/>
-            <a:lstStyle/>
-            <a:p>
-              <a:pPr>
-                <a:defRPr b="0" i="0" strike="noStrike" sz="1100" u="none">
-                  <a:solidFill>
-                    <a:srgbClr val="1E2A36"/>
-                  </a:solidFill>
-                  <a:latin typeface="+mn-lt"/>
-                </a:defRPr>
-              </a:pPr>
-            </a:p>
-          </c:txPr>
           <c:showLegendKey val="0"/>
           <c:showVal val="1"/>
           <c:showCatName val="0"/>
           <c:showSerName val="0"/>
           <c:showPercent val="0"/>
           <c:showBubbleSize val="0"/>
-          <c:showLeaderLines val="0"/>
         </c:dLbls>
         <c:gapWidth val="60"/>
-        <c:overlap val="0"/>
         <c:axId val="2094734554"/>
         <c:axId val="2094734552"/>
-        <c:axId val="2094734556"/>
       </c:barChart>
       <c:catAx>
         <c:axId val="2094734554"/>
@@ -2807,13 +2851,14 @@
         <c:crosses val="autoZero"/>
         <c:auto val="1"/>
         <c:lblAlgn val="ctr"/>
+        <c:lblOffset val="100"/>
         <c:noMultiLvlLbl val="1"/>
       </c:catAx>
       <c:valAx>
         <c:axId val="2094734552"/>
         <c:scaling>
           <c:orientation val="minMax"/>
-          <c:max val="1.1"/>
+          <c:max val="1.1000000000000001"/>
           <c:min val="0"/>
         </c:scaling>
         <c:delete val="1"/>
@@ -2833,28 +2878,6 @@
         <c:majorTickMark val="out"/>
         <c:minorTickMark val="none"/>
         <c:tickLblPos val="nextTo"/>
-        <c:spPr>
-          <a:ln w="12700" cap="flat">
-            <a:noFill/>
-            <a:prstDash val="solid"/>
-            <a:round/>
-          </a:ln>
-        </c:spPr>
-        <c:txPr>
-          <a:bodyPr/>
-          <a:lstStyle/>
-          <a:p>
-            <a:pPr>
-              <a:defRPr sz="1100" b="0" i="0" u="none" strike="noStrike">
-                <a:solidFill>
-                  <a:srgbClr val="6B7785"/>
-                </a:solidFill>
-                <a:latin typeface="+mn-lt"/>
-              </a:defRPr>
-            </a:pPr>
-            <a:endParaRPr lang="en-US"/>
-          </a:p>
-        </c:txPr>
         <c:crossAx val="2094734554"/>
         <c:crosses val="autoZero"/>
         <c:crossBetween val="between"/>
@@ -2889,6 +2912,7 @@
     </c:legend>
     <c:plotVisOnly val="1"/>
     <c:dispBlanksAs val="span"/>
+    <c:showDLblsOverMax val="1"/>
   </c:chart>
   <c:spPr>
     <a:noFill/>
@@ -2925,234 +2949,10 @@
           <a:chExt cx="0" cy="0"/>
         </a:xfrm>
       </p:grpSpPr>
-      <p:sp>
-        <p:nvSpPr>
-          <p:cNvPr id="2" name="Header Placeholder 1"/>
-          <p:cNvSpPr>
-            <a:spLocks noGrp="1"/>
-          </p:cNvSpPr>
-          <p:nvPr>
-            <p:ph type="hdr" sz="quarter"/>
-          </p:nvPr>
-        </p:nvSpPr>
-        <p:spPr>
-          <a:xfrm>
-            <a:off x="0" y="0"/>
-            <a:ext cx="2971800" cy="458788"/>
-          </a:xfrm>
-          <a:prstGeom prst="rect">
-            <a:avLst/>
-          </a:prstGeom>
-        </p:spPr>
-        <p:txBody>
-          <a:bodyPr vert="horz" lIns="91440" tIns="45720" rIns="91440" bIns="45720" rtlCol="0"/>
-          <a:lstStyle>
-            <a:lvl1pPr algn="l">
-              <a:defRPr sz="1200"/>
-            </a:lvl1pPr>
-          </a:lstStyle>
-          <a:p>
-            <a:endParaRPr lang="en-US"/>
-          </a:p>
-        </p:txBody>
-      </p:sp>
-      <p:sp>
-        <p:nvSpPr>
-          <p:cNvPr id="3" name="Date Placeholder 2"/>
-          <p:cNvSpPr>
-            <a:spLocks noGrp="1"/>
-          </p:cNvSpPr>
-          <p:nvPr>
-            <p:ph type="dt" idx="1"/>
-          </p:nvPr>
-        </p:nvSpPr>
-        <p:spPr>
-          <a:xfrm>
-            <a:off x="3884613" y="0"/>
-            <a:ext cx="2971800" cy="458788"/>
-          </a:xfrm>
-          <a:prstGeom prst="rect">
-            <a:avLst/>
-          </a:prstGeom>
-        </p:spPr>
-        <p:txBody>
-          <a:bodyPr vert="horz" lIns="91440" tIns="45720" rIns="91440" bIns="45720" rtlCol="0"/>
-          <a:lstStyle>
-            <a:lvl1pPr algn="r">
-              <a:defRPr sz="1200"/>
-            </a:lvl1pPr>
-          </a:lstStyle>
-          <a:p>
-            <a:fld id="{5282F153-3F37-0F45-9E97-73ACFA13230C}" type="datetimeFigureOut">
-              <a:rPr lang="en-US"/>
-              <a:t>7/23/19</a:t>
-            </a:fld>
-            <a:endParaRPr lang="en-US"/>
-          </a:p>
-        </p:txBody>
-      </p:sp>
-      <p:sp>
-        <p:nvSpPr>
-          <p:cNvPr id="4" name="Slide Image Placeholder 3"/>
-          <p:cNvSpPr>
-            <a:spLocks noGrp="1" noRot="1" noChangeAspect="1"/>
-          </p:cNvSpPr>
-          <p:nvPr>
-            <p:ph type="sldImg" idx="2"/>
-          </p:nvPr>
-        </p:nvSpPr>
-        <p:spPr>
-          <a:xfrm>
-            <a:off x="685800" y="1143000"/>
-            <a:ext cx="5486400" cy="3086100"/>
-          </a:xfrm>
-          <a:prstGeom prst="rect">
-            <a:avLst/>
-          </a:prstGeom>
-          <a:noFill/>
-          <a:ln w="12700">
-            <a:solidFill>
-              <a:prstClr val="black"/>
-            </a:solidFill>
-          </a:ln>
-        </p:spPr>
-        <p:txBody>
-          <a:bodyPr vert="horz" lIns="91440" tIns="45720" rIns="91440" bIns="45720" rtlCol="0" anchor="ctr"/>
-          <a:lstStyle/>
-          <a:p>
-            <a:endParaRPr lang="en-US"/>
-          </a:p>
-        </p:txBody>
-      </p:sp>
-      <p:sp>
-        <p:nvSpPr>
-          <p:cNvPr id="5" name="Notes Placeholder 4"/>
-          <p:cNvSpPr>
-            <a:spLocks noGrp="1"/>
-          </p:cNvSpPr>
-          <p:nvPr>
-            <p:ph type="body" sz="quarter" idx="3"/>
-          </p:nvPr>
-        </p:nvSpPr>
-        <p:spPr>
-          <a:xfrm>
-            <a:off x="685800" y="4400550"/>
-            <a:ext cx="5486400" cy="3600450"/>
-          </a:xfrm>
-          <a:prstGeom prst="rect">
-            <a:avLst/>
-          </a:prstGeom>
-        </p:spPr>
-        <p:txBody>
-          <a:bodyPr vert="horz" lIns="91440" tIns="45720" rIns="91440" bIns="45720" rtlCol="0"/>
-          <a:lstStyle/>
-          <a:p>
-            <a:pPr lvl="0"/>
-            <a:r>
-              <a:rPr lang="en-US"/>
-              <a:t>Click to edit Master text styles</a:t>
-            </a:r>
-          </a:p>
-          <a:p>
-            <a:pPr lvl="1"/>
-            <a:r>
-              <a:rPr lang="en-US"/>
-              <a:t>Second level</a:t>
-            </a:r>
-          </a:p>
-          <a:p>
-            <a:pPr lvl="2"/>
-            <a:r>
-              <a:rPr lang="en-US"/>
-              <a:t>Third level</a:t>
-            </a:r>
-          </a:p>
-          <a:p>
-            <a:pPr lvl="3"/>
-            <a:r>
-              <a:rPr lang="en-US"/>
-              <a:t>Fourth level</a:t>
-            </a:r>
-          </a:p>
-          <a:p>
-            <a:pPr lvl="4"/>
-            <a:r>
-              <a:rPr lang="en-US"/>
-              <a:t>Fifth level</a:t>
-            </a:r>
-          </a:p>
-        </p:txBody>
-      </p:sp>
-      <p:sp>
-        <p:nvSpPr>
-          <p:cNvPr id="6" name="Footer Placeholder 5"/>
-          <p:cNvSpPr>
-            <a:spLocks noGrp="1"/>
-          </p:cNvSpPr>
-          <p:nvPr>
-            <p:ph type="ftr" sz="quarter" idx="4"/>
-          </p:nvPr>
-        </p:nvSpPr>
-        <p:spPr>
-          <a:xfrm>
-            <a:off x="0" y="8685213"/>
-            <a:ext cx="2971800" cy="458787"/>
-          </a:xfrm>
-          <a:prstGeom prst="rect">
-            <a:avLst/>
-          </a:prstGeom>
-        </p:spPr>
-        <p:txBody>
-          <a:bodyPr vert="horz" lIns="91440" tIns="45720" rIns="91440" bIns="45720" rtlCol="0" anchor="b"/>
-          <a:lstStyle>
-            <a:lvl1pPr algn="l">
-              <a:defRPr sz="1200"/>
-            </a:lvl1pPr>
-          </a:lstStyle>
-          <a:p>
-            <a:endParaRPr lang="en-US"/>
-          </a:p>
-        </p:txBody>
-      </p:sp>
-      <p:sp>
-        <p:nvSpPr>
-          <p:cNvPr id="7" name="Slide Number Placeholder 6"/>
-          <p:cNvSpPr>
-            <a:spLocks noGrp="1"/>
-          </p:cNvSpPr>
-          <p:nvPr>
-            <p:ph type="sldNum" sz="quarter" idx="5"/>
-          </p:nvPr>
-        </p:nvSpPr>
-        <p:spPr>
-          <a:xfrm>
-            <a:off x="3884613" y="8685213"/>
-            <a:ext cx="2971800" cy="458787"/>
-          </a:xfrm>
-          <a:prstGeom prst="rect">
-            <a:avLst/>
-          </a:prstGeom>
-        </p:spPr>
-        <p:txBody>
-          <a:bodyPr vert="horz" lIns="91440" tIns="45720" rIns="91440" bIns="45720" rtlCol="0" anchor="b"/>
-          <a:lstStyle>
-            <a:lvl1pPr algn="r">
-              <a:defRPr sz="1200"/>
-            </a:lvl1pPr>
-          </a:lstStyle>
-          <a:p>
-            <a:fld id="{CE5E9CC1-C706-0F49-92D6-E571CC5EEA8F}" type="slidenum">
-              <a:rPr lang="en-US"/>
-              <a:t>‹#›</a:t>
-            </a:fld>
-            <a:endParaRPr lang="en-US"/>
-          </a:p>
-        </p:txBody>
-      </p:sp>
     </p:spTree>
     <p:extLst>
       <p:ext uri="{BB962C8B-B14F-4D97-AF65-F5344CB8AC3E}">
-        <p14:creationId xmlns:p14="http://schemas.microsoft.com/office/powerpoint/2010/main" val="1024086991"/>
+        <p14:creationId xmlns:p14="http://schemas.microsoft.com/office/powerpoint/2010/main" val="2316919402"/>
       </p:ext>
     </p:extLst>
   </p:cSld>
@@ -3300,7 +3100,6 @@
               <a:rPr lang="en-US" dirty="0"/>
               <a:t>Open with the one-line promise: a distress call comes in on channel 16, possibly in Hindi, Tamil or Malayalam, over a noisy radio. The system turns it into a structured, explained incident and a search plan in seconds, and the operator verifies everything.</a:t>
             </a:r>
-            <a:endParaRPr lang="en-US" dirty="0"/>
           </a:p>
         </p:txBody>
       </p:sp>
@@ -3384,10 +3183,6 @@
           <a:bodyPr/>
           <a:lstStyle/>
           <a:p>
-            <a:r>
-              <a:rPr lang="en-US" dirty="0"/>
-              <a:t/>
-            </a:r>
             <a:endParaRPr lang="en-US" dirty="0"/>
           </a:p>
         </p:txBody>
@@ -3472,10 +3267,6 @@
           <a:bodyPr/>
           <a:lstStyle/>
           <a:p>
-            <a:r>
-              <a:rPr lang="en-US" dirty="0"/>
-              <a:t/>
-            </a:r>
             <a:endParaRPr lang="en-US" dirty="0"/>
           </a:p>
         </p:txBody>
@@ -3560,10 +3351,6 @@
           <a:bodyPr/>
           <a:lstStyle/>
           <a:p>
-            <a:r>
-              <a:rPr lang="en-US" dirty="0"/>
-              <a:t/>
-            </a:r>
             <a:endParaRPr lang="en-US" dirty="0"/>
           </a:p>
         </p:txBody>
@@ -3648,10 +3435,6 @@
           <a:bodyPr/>
           <a:lstStyle/>
           <a:p>
-            <a:r>
-              <a:rPr lang="en-US" dirty="0"/>
-              <a:t/>
-            </a:r>
             <a:endParaRPr lang="en-US" dirty="0"/>
           </a:p>
         </p:txBody>
@@ -3736,10 +3519,6 @@
           <a:bodyPr/>
           <a:lstStyle/>
           <a:p>
-            <a:r>
-              <a:rPr lang="en-US" dirty="0"/>
-              <a:t/>
-            </a:r>
             <a:endParaRPr lang="en-US" dirty="0"/>
           </a:p>
         </p:txBody>
@@ -3824,10 +3603,6 @@
           <a:bodyPr/>
           <a:lstStyle/>
           <a:p>
-            <a:r>
-              <a:rPr lang="en-US" dirty="0"/>
-              <a:t/>
-            </a:r>
             <a:endParaRPr lang="en-US" dirty="0"/>
           </a:p>
         </p:txBody>
@@ -3916,7 +3691,6 @@
               <a:rPr lang="en-US" dirty="0"/>
               <a:t>There is no public labelled corpus for this, which is why the project generates its own labelled data and validates on external datasets.</a:t>
             </a:r>
-            <a:endParaRPr lang="en-US" dirty="0"/>
           </a:p>
         </p:txBody>
       </p:sp>
@@ -4000,10 +3774,6 @@
           <a:bodyPr/>
           <a:lstStyle/>
           <a:p>
-            <a:r>
-              <a:rPr lang="en-US" dirty="0"/>
-              <a:t/>
-            </a:r>
             <a:endParaRPr lang="en-US" dirty="0"/>
           </a:p>
         </p:txBody>
@@ -4088,10 +3858,6 @@
           <a:bodyPr/>
           <a:lstStyle/>
           <a:p>
-            <a:r>
-              <a:rPr lang="en-US" dirty="0"/>
-              <a:t/>
-            </a:r>
             <a:endParaRPr lang="en-US" dirty="0"/>
           </a:p>
         </p:txBody>
@@ -4180,7 +3946,6 @@
               <a:rPr lang="en-US" dirty="0"/>
               <a:t>20 distinct methods. Stress that each has a baseline and a held-out evaluation, not just an implementation.</a:t>
             </a:r>
-            <a:endParaRPr lang="en-US" dirty="0"/>
           </a:p>
         </p:txBody>
       </p:sp>
@@ -4264,10 +4029,6 @@
           <a:bodyPr/>
           <a:lstStyle/>
           <a:p>
-            <a:r>
-              <a:rPr lang="en-US" dirty="0"/>
-              <a:t/>
-            </a:r>
             <a:endParaRPr lang="en-US" dirty="0"/>
           </a:p>
         </p:txBody>
@@ -4352,10 +4113,6 @@
           <a:bodyPr/>
           <a:lstStyle/>
           <a:p>
-            <a:r>
-              <a:rPr lang="en-US" dirty="0"/>
-              <a:t/>
-            </a:r>
             <a:endParaRPr lang="en-US" dirty="0"/>
           </a:p>
         </p:txBody>
@@ -4440,10 +4197,6 @@
           <a:bodyPr/>
           <a:lstStyle/>
           <a:p>
-            <a:r>
-              <a:rPr lang="en-US" dirty="0"/>
-              <a:t/>
-            </a:r>
             <a:endParaRPr lang="en-US" dirty="0"/>
           </a:p>
         </p:txBody>
@@ -4528,10 +4281,6 @@
           <a:bodyPr/>
           <a:lstStyle/>
           <a:p>
-            <a:r>
-              <a:rPr lang="en-US" dirty="0"/>
-              <a:t/>
-            </a:r>
             <a:endParaRPr lang="en-US" dirty="0"/>
           </a:p>
         </p:txBody>
@@ -4610,6 +4359,7 @@
         <a:solidFill>
           <a:srgbClr val="1B3A5C"/>
         </a:solidFill>
+        <a:effectLst/>
       </p:bgPr>
     </p:bg>
     <p:spTree>
@@ -4629,9 +4379,11 @@
       <p:sp>
         <p:nvSpPr>
           <p:cNvPr id="2" name="Text 0"/>
-          <p:cNvSpPr/>
+          <p:cNvSpPr>
+            <a:spLocks noGrp="1"/>
+          </p:cNvSpPr>
           <p:nvPr>
-            <p:ph idx="100" type="title" hasCustomPrompt="1"/>
+            <p:ph type="title" idx="100" hasCustomPrompt="1"/>
           </p:nvPr>
         </p:nvSpPr>
         <p:spPr>
@@ -4648,7 +4400,7 @@
         <p:txBody>
           <a:bodyPr wrap="square" rtlCol="0"/>
           <a:lstStyle>
-            <a:lvl1pPr algn="l" indent="0" marL="0">
+            <a:lvl1pPr marL="0" indent="0" algn="l">
               <a:buNone/>
               <a:defRPr lang="en-US" sz="4400" dirty="0">
                 <a:solidFill>
@@ -4661,7 +4413,7 @@
             </a:lvl1pPr>
           </a:lstStyle>
           <a:p>
-            <a:pPr algn="l" indent="0" marL="0">
+            <a:pPr marL="0" indent="0" algn="l">
               <a:buNone/>
             </a:pPr>
             <a:endParaRPr lang="en-US" sz="4400" dirty="0"/>
@@ -4671,9 +4423,11 @@
       <p:sp>
         <p:nvSpPr>
           <p:cNvPr id="3" name="Text 0"/>
-          <p:cNvSpPr/>
+          <p:cNvSpPr>
+            <a:spLocks noGrp="1"/>
+          </p:cNvSpPr>
           <p:nvPr>
-            <p:ph idx="101" type="body" hasCustomPrompt="1"/>
+            <p:ph type="body" idx="101" hasCustomPrompt="1"/>
           </p:nvPr>
         </p:nvSpPr>
         <p:spPr>
@@ -4690,7 +4444,7 @@
         <p:txBody>
           <a:bodyPr wrap="square" rtlCol="0"/>
           <a:lstStyle>
-            <a:lvl1pPr indent="0" marL="0">
+            <a:lvl1pPr marL="0" indent="0">
               <a:buNone/>
               <a:defRPr lang="en-US" sz="1800" dirty="0">
                 <a:solidFill>
@@ -4700,7 +4454,7 @@
             </a:lvl1pPr>
           </a:lstStyle>
           <a:p>
-            <a:pPr indent="0" marL="0">
+            <a:pPr marL="0" indent="0">
               <a:buNone/>
             </a:pPr>
             <a:endParaRPr lang="en-US" sz="1800" dirty="0"/>
@@ -4723,6 +4477,7 @@
         <a:solidFill>
           <a:srgbClr val="FAF7F0"/>
         </a:solidFill>
+        <a:effectLst/>
       </p:bgPr>
     </p:bg>
     <p:spTree>
@@ -4742,9 +4497,11 @@
       <p:sp>
         <p:nvSpPr>
           <p:cNvPr id="2" name="Text 0"/>
-          <p:cNvSpPr/>
+          <p:cNvSpPr>
+            <a:spLocks noGrp="1"/>
+          </p:cNvSpPr>
           <p:nvPr>
-            <p:ph idx="100" type="body" hasCustomPrompt="1"/>
+            <p:ph type="body" idx="100" hasCustomPrompt="1"/>
           </p:nvPr>
         </p:nvSpPr>
         <p:spPr>
@@ -4761,9 +4518,9 @@
         <p:txBody>
           <a:bodyPr wrap="square" rtlCol="0"/>
           <a:lstStyle>
-            <a:lvl1pPr indent="0" marL="0">
-              <a:buNone/>
-              <a:defRPr lang="en-US" sz="1200" b="1" spc="200" kern="0" dirty="0">
+            <a:lvl1pPr marL="0" indent="0">
+              <a:buNone/>
+              <a:defRPr lang="en-US" sz="1200" b="1" kern="0" spc="200" dirty="0">
                 <a:solidFill>
                   <a:schemeClr val="accent2"/>
                 </a:solidFill>
@@ -4771,7 +4528,7 @@
             </a:lvl1pPr>
           </a:lstStyle>
           <a:p>
-            <a:pPr indent="0" marL="0">
+            <a:pPr marL="0" indent="0">
               <a:buNone/>
             </a:pPr>
             <a:endParaRPr lang="en-US" sz="1200" dirty="0"/>
@@ -4781,9 +4538,11 @@
       <p:sp>
         <p:nvSpPr>
           <p:cNvPr id="3" name="Text 0"/>
-          <p:cNvSpPr/>
+          <p:cNvSpPr>
+            <a:spLocks noGrp="1"/>
+          </p:cNvSpPr>
           <p:nvPr>
-            <p:ph idx="101" type="title" hasCustomPrompt="1"/>
+            <p:ph type="title" idx="101" hasCustomPrompt="1"/>
           </p:nvPr>
         </p:nvSpPr>
         <p:spPr>
@@ -4800,7 +4559,7 @@
         <p:txBody>
           <a:bodyPr wrap="square" rtlCol="0"/>
           <a:lstStyle>
-            <a:lvl1pPr algn="l" indent="0" marL="0">
+            <a:lvl1pPr marL="0" indent="0" algn="l">
               <a:buNone/>
               <a:defRPr lang="en-US" sz="3400" dirty="0">
                 <a:solidFill>
@@ -4813,7 +4572,7 @@
             </a:lvl1pPr>
           </a:lstStyle>
           <a:p>
-            <a:pPr algn="l" indent="0" marL="0">
+            <a:pPr marL="0" indent="0" algn="l">
               <a:buNone/>
             </a:pPr>
             <a:endParaRPr lang="en-US" sz="3400" dirty="0"/>
@@ -4841,7 +4600,7 @@
           <a:bodyPr wrap="square" lIns="0" tIns="0" rIns="0" bIns="0" rtlCol="0" anchor="ctr"/>
           <a:lstStyle/>
           <a:p>
-            <a:pPr indent="0" marL="0">
+            <a:pPr marL="0" indent="0">
               <a:buNone/>
             </a:pPr>
             <a:r>
@@ -4876,7 +4635,7 @@
           </a:prstGeom>
           <a:extLst>
             <a:ext uri="{C572A759-6A51-4108-AA02-DFA0A04FC94B}">
-              <ma14:wrappingTextBoxFlag xmlns:ma14="http://schemas.microsoft.com/office/mac/drawingml/2011/main" val="0"/>
+              <ma14:wrappingTextBoxFlag xmlns:ma14="http://schemas.microsoft.com/office/mac/drawingml/2011/main" xmlns="" val="0"/>
             </a:ext>
           </a:extLst>
         </p:spPr>
@@ -4894,8 +4653,8 @@
           <a:p>
             <a:pPr algn="r"/>
             <a:fld id="{F7021451-1387-4CA6-816F-3879F97B5CBC}" type="slidenum">
-              <a:rPr b="0" lang="en-US"/>
-              <a:t>1003</a:t>
+              <a:rPr lang="en-US" b="0"/>
+              <a:t>‹#›</a:t>
             </a:fld>
             <a:endParaRPr lang="en-US"/>
           </a:p>
@@ -4912,6 +4671,11 @@
 <file path=ppt/slideMasters/slideMaster1.xml><?xml version="1.0" encoding="utf-8"?>
 <p:sldMaster xmlns:a="http://schemas.openxmlformats.org/drawingml/2006/main" xmlns:r="http://schemas.openxmlformats.org/officeDocument/2006/relationships" xmlns:p="http://schemas.openxmlformats.org/presentationml/2006/main">
   <p:cSld>
+    <p:bg>
+      <p:bgRef idx="1001">
+        <a:schemeClr val="bg1"/>
+      </p:bgRef>
+    </p:bg>
     <p:spTree>
       <p:nvGrpSpPr>
         <p:cNvPr id="1" name=""/>
@@ -4946,7 +4710,7 @@
           </a:prstGeom>
           <a:extLst>
             <a:ext uri="{C572A759-6A51-4108-AA02-DFA0A04FC94B}">
-              <ma14:wrappingTextBoxFlag xmlns:ma14="http://schemas.microsoft.com/office/mac/drawingml/2011/main" val="0"/>
+              <ma14:wrappingTextBoxFlag xmlns:ma14="http://schemas.microsoft.com/office/mac/drawingml/2011/main" xmlns="" val="0"/>
             </a:ext>
           </a:extLst>
         </p:spPr>
@@ -4964,8 +4728,8 @@
           <a:p>
             <a:pPr algn="r"/>
             <a:fld id="{F7021451-1387-4CA6-816F-3879F97B5CBC}" type="slidenum">
-              <a:rPr b="0" lang="en-US"/>
-              <a:t>null</a:t>
+              <a:rPr lang="en-US" b="0"/>
+              <a:t>‹#›</a:t>
             </a:fld>
             <a:endParaRPr lang="en-US"/>
           </a:p>
@@ -5423,9 +5187,11 @@
       <p:sp>
         <p:nvSpPr>
           <p:cNvPr id="8" name="Text 0"/>
-          <p:cNvSpPr/>
+          <p:cNvSpPr>
+            <a:spLocks noGrp="1"/>
+          </p:cNvSpPr>
           <p:nvPr>
-            <p:ph idx="100" type="title" hasCustomPrompt="1"/>
+            <p:ph type="title" idx="100" hasCustomPrompt="1"/>
           </p:nvPr>
         </p:nvSpPr>
         <p:spPr>
@@ -5443,7 +5209,7 @@
           <a:bodyPr wrap="square" lIns="0" tIns="0" rIns="0" bIns="0" rtlCol="0" anchor="b"/>
           <a:lstStyle/>
           <a:p>
-            <a:pPr algn="l" indent="0" marL="0">
+            <a:pPr marL="0" indent="0" algn="l">
               <a:buNone/>
             </a:pPr>
             <a:r>
@@ -5464,9 +5230,11 @@
       <p:sp>
         <p:nvSpPr>
           <p:cNvPr id="9" name="Text 0"/>
-          <p:cNvSpPr/>
+          <p:cNvSpPr>
+            <a:spLocks noGrp="1"/>
+          </p:cNvSpPr>
           <p:nvPr>
-            <p:ph idx="101" type="body" hasCustomPrompt="1"/>
+            <p:ph type="body" idx="101" hasCustomPrompt="1"/>
           </p:nvPr>
         </p:nvSpPr>
         <p:spPr>
@@ -5484,7 +5252,7 @@
           <a:bodyPr wrap="square" lIns="0" tIns="0" rIns="0" bIns="0" rtlCol="0" anchor="t"/>
           <a:lstStyle/>
           <a:p>
-            <a:pPr indent="0" marL="0">
+            <a:pPr marL="0" indent="0">
               <a:buNone/>
             </a:pPr>
             <a:r>
@@ -5520,7 +5288,7 @@
           <a:bodyPr wrap="square" lIns="0" tIns="0" rIns="0" bIns="0" rtlCol="0" anchor="ctr"/>
           <a:lstStyle/>
           <a:p>
-            <a:pPr indent="0" marL="0">
+            <a:pPr marL="0" indent="0">
               <a:buNone/>
             </a:pPr>
             <a:r>
@@ -5529,7 +5297,7 @@
                   <a:schemeClr val="accent3"/>
                 </a:solidFill>
               </a:rPr>
-              <a:t>Data Science course project  ·  ML-driven decision support for coast guard operators</a:t>
+              <a:t>Data Science course project </a:t>
             </a:r>
             <a:endParaRPr lang="en-US" sz="1300" dirty="0"/>
           </a:p>
@@ -5563,9 +5331,11 @@
       <p:sp>
         <p:nvSpPr>
           <p:cNvPr id="2" name="Text 0"/>
-          <p:cNvSpPr/>
+          <p:cNvSpPr>
+            <a:spLocks noGrp="1"/>
+          </p:cNvSpPr>
           <p:nvPr>
-            <p:ph idx="100" type="body" hasCustomPrompt="1"/>
+            <p:ph type="body" idx="100" hasCustomPrompt="1"/>
           </p:nvPr>
         </p:nvSpPr>
         <p:spPr>
@@ -5583,11 +5353,11 @@
           <a:bodyPr wrap="square" lIns="0" tIns="0" rIns="0" bIns="0" rtlCol="0"/>
           <a:lstStyle/>
           <a:p>
-            <a:pPr indent="0" marL="0">
-              <a:buNone/>
-            </a:pPr>
-            <a:r>
-              <a:rPr lang="en-US" sz="1200" b="1" spc="200" kern="0" dirty="0">
+            <a:pPr marL="0" indent="0">
+              <a:buNone/>
+            </a:pPr>
+            <a:r>
+              <a:rPr lang="en-US" sz="1200" b="1" kern="0" spc="200" dirty="0">
                 <a:solidFill>
                   <a:schemeClr val="accent2"/>
                 </a:solidFill>
@@ -5601,9 +5371,11 @@
       <p:sp>
         <p:nvSpPr>
           <p:cNvPr id="3" name="Text 0"/>
-          <p:cNvSpPr/>
+          <p:cNvSpPr>
+            <a:spLocks noGrp="1"/>
+          </p:cNvSpPr>
           <p:nvPr>
-            <p:ph idx="101" type="title" hasCustomPrompt="1"/>
+            <p:ph type="title" idx="101" hasCustomPrompt="1"/>
           </p:nvPr>
         </p:nvSpPr>
         <p:spPr>
@@ -5621,7 +5393,7 @@
           <a:bodyPr wrap="square" lIns="0" tIns="0" rIns="0" bIns="0" rtlCol="0" anchor="t"/>
           <a:lstStyle/>
           <a:p>
-            <a:pPr algn="l" indent="0" marL="0">
+            <a:pPr marL="0" indent="0" algn="l">
               <a:buNone/>
             </a:pPr>
             <a:r>
@@ -5641,7 +5413,7 @@
       </p:sp>
       <p:graphicFrame>
         <p:nvGraphicFramePr>
-          <p:cNvPr id="4" name="kathbath chart" descr=""/>
+          <p:cNvPr id="4" name="kathbath chart"/>
           <p:cNvGraphicFramePr/>
           <p:nvPr/>
         </p:nvGraphicFramePr>
@@ -5649,9 +5421,9 @@
           <a:off x="640080" y="1645920"/>
           <a:ext cx="6949440" cy="4297680"/>
         </p:xfrm>
-        <a:graphic xmlns:a="http://schemas.openxmlformats.org/drawingml/2006/main">
+        <a:graphic>
           <a:graphicData uri="http://schemas.openxmlformats.org/drawingml/2006/chart">
-            <c:chart xmlns:c="http://schemas.openxmlformats.org/drawingml/2006/chart" r:id="rId1"/>
+            <c:chart xmlns:c="http://schemas.openxmlformats.org/drawingml/2006/chart" xmlns:r="http://schemas.openxmlformats.org/officeDocument/2006/relationships" r:id="rId3"/>
           </a:graphicData>
         </a:graphic>
       </p:graphicFrame>
@@ -5676,7 +5448,7 @@
           <a:bodyPr wrap="square" lIns="0" tIns="0" rIns="0" bIns="0" rtlCol="0" anchor="ctr"/>
           <a:lstStyle/>
           <a:p>
-            <a:pPr indent="0" marL="0">
+            <a:pPr marL="0" indent="0">
               <a:buNone/>
             </a:pPr>
             <a:r>
@@ -5715,7 +5487,7 @@
           <a:bodyPr wrap="square" lIns="0" tIns="0" rIns="0" bIns="0" rtlCol="0" anchor="ctr"/>
           <a:lstStyle/>
           <a:p>
-            <a:pPr indent="0" marL="0">
+            <a:pPr marL="0" indent="0">
               <a:buNone/>
             </a:pPr>
             <a:r>
@@ -5751,7 +5523,7 @@
           <a:bodyPr wrap="square" lIns="0" tIns="0" rIns="0" bIns="0" rtlCol="0" anchor="ctr"/>
           <a:lstStyle/>
           <a:p>
-            <a:pPr indent="0" marL="0">
+            <a:pPr marL="0" indent="0">
               <a:buNone/>
             </a:pPr>
             <a:r>
@@ -5790,7 +5562,7 @@
           <a:bodyPr wrap="square" lIns="0" tIns="0" rIns="0" bIns="0" rtlCol="0" anchor="ctr"/>
           <a:lstStyle/>
           <a:p>
-            <a:pPr indent="0" marL="0">
+            <a:pPr marL="0" indent="0">
               <a:buNone/>
             </a:pPr>
             <a:r>
@@ -5826,7 +5598,7 @@
           <a:bodyPr wrap="square" lIns="0" tIns="0" rIns="0" bIns="0" rtlCol="0" anchor="ctr"/>
           <a:lstStyle/>
           <a:p>
-            <a:pPr indent="0" marL="0">
+            <a:pPr marL="0" indent="0">
               <a:buNone/>
             </a:pPr>
             <a:r>
@@ -5861,7 +5633,7 @@
           </a:prstGeom>
           <a:extLst>
             <a:ext uri="{C572A759-6A51-4108-AA02-DFA0A04FC94B}">
-              <ma14:wrappingTextBoxFlag xmlns:ma14="http://schemas.microsoft.com/office/mac/drawingml/2011/main" val="0"/>
+              <ma14:wrappingTextBoxFlag xmlns:ma14="http://schemas.microsoft.com/office/mac/drawingml/2011/main" xmlns="" val="0"/>
             </a:ext>
           </a:extLst>
         </p:spPr>
@@ -5879,7 +5651,7 @@
           <a:p>
             <a:pPr algn="r"/>
             <a:fld id="{F7021451-1387-4CA6-816F-3879F97B5CBC}" type="slidenum">
-              <a:rPr b="0" lang="en-US"/>
+              <a:rPr lang="en-US" b="0"/>
               <a:t>10</a:t>
             </a:fld>
             <a:endParaRPr lang="en-US"/>
@@ -5914,9 +5686,11 @@
       <p:sp>
         <p:nvSpPr>
           <p:cNvPr id="2" name="Text 0"/>
-          <p:cNvSpPr/>
+          <p:cNvSpPr>
+            <a:spLocks noGrp="1"/>
+          </p:cNvSpPr>
           <p:nvPr>
-            <p:ph idx="100" type="body" hasCustomPrompt="1"/>
+            <p:ph type="body" idx="100" hasCustomPrompt="1"/>
           </p:nvPr>
         </p:nvSpPr>
         <p:spPr>
@@ -5934,11 +5708,11 @@
           <a:bodyPr wrap="square" lIns="0" tIns="0" rIns="0" bIns="0" rtlCol="0"/>
           <a:lstStyle/>
           <a:p>
-            <a:pPr indent="0" marL="0">
-              <a:buNone/>
-            </a:pPr>
-            <a:r>
-              <a:rPr lang="en-US" sz="1200" b="1" spc="200" kern="0" dirty="0">
+            <a:pPr marL="0" indent="0">
+              <a:buNone/>
+            </a:pPr>
+            <a:r>
+              <a:rPr lang="en-US" sz="1200" b="1" kern="0" spc="200" dirty="0">
                 <a:solidFill>
                   <a:schemeClr val="accent2"/>
                 </a:solidFill>
@@ -5952,9 +5726,11 @@
       <p:sp>
         <p:nvSpPr>
           <p:cNvPr id="3" name="Text 0"/>
-          <p:cNvSpPr/>
+          <p:cNvSpPr>
+            <a:spLocks noGrp="1"/>
+          </p:cNvSpPr>
           <p:nvPr>
-            <p:ph idx="101" type="title" hasCustomPrompt="1"/>
+            <p:ph type="title" idx="101" hasCustomPrompt="1"/>
           </p:nvPr>
         </p:nvSpPr>
         <p:spPr>
@@ -5972,7 +5748,7 @@
           <a:bodyPr wrap="square" lIns="0" tIns="0" rIns="0" bIns="0" rtlCol="0" anchor="t"/>
           <a:lstStyle/>
           <a:p>
-            <a:pPr algn="l" indent="0" marL="0">
+            <a:pPr marL="0" indent="0" algn="l">
               <a:buNone/>
             </a:pPr>
             <a:r>
@@ -5992,7 +5768,7 @@
       </p:sp>
       <p:graphicFrame>
         <p:nvGraphicFramePr>
-          <p:cNvPr id="4" name="llm chart" descr=""/>
+          <p:cNvPr id="4" name="llm chart"/>
           <p:cNvGraphicFramePr/>
           <p:nvPr/>
         </p:nvGraphicFramePr>
@@ -6000,9 +5776,9 @@
           <a:off x="640080" y="1645920"/>
           <a:ext cx="6949440" cy="4297680"/>
         </p:xfrm>
-        <a:graphic xmlns:a="http://schemas.openxmlformats.org/drawingml/2006/main">
+        <a:graphic>
           <a:graphicData uri="http://schemas.openxmlformats.org/drawingml/2006/chart">
-            <c:chart xmlns:c="http://schemas.openxmlformats.org/drawingml/2006/chart" r:id="rId1"/>
+            <c:chart xmlns:c="http://schemas.openxmlformats.org/drawingml/2006/chart" xmlns:r="http://schemas.openxmlformats.org/officeDocument/2006/relationships" r:id="rId3"/>
           </a:graphicData>
         </a:graphic>
       </p:graphicFrame>
@@ -6027,7 +5803,7 @@
           <a:bodyPr wrap="square" lIns="0" tIns="0" rIns="0" bIns="0" rtlCol="0" anchor="ctr"/>
           <a:lstStyle/>
           <a:p>
-            <a:pPr indent="0" marL="0">
+            <a:pPr marL="0" indent="0">
               <a:buNone/>
             </a:pPr>
             <a:r>
@@ -6066,7 +5842,7 @@
           <a:bodyPr wrap="square" lIns="0" tIns="0" rIns="0" bIns="0" rtlCol="0" anchor="ctr"/>
           <a:lstStyle/>
           <a:p>
-            <a:pPr indent="0" marL="0">
+            <a:pPr marL="0" indent="0">
               <a:buNone/>
             </a:pPr>
             <a:r>
@@ -6102,7 +5878,7 @@
           <a:bodyPr wrap="square" lIns="0" tIns="0" rIns="0" bIns="0" rtlCol="0" anchor="ctr"/>
           <a:lstStyle/>
           <a:p>
-            <a:pPr indent="0" marL="0">
+            <a:pPr marL="0" indent="0">
               <a:buNone/>
             </a:pPr>
             <a:r>
@@ -6141,7 +5917,7 @@
           <a:bodyPr wrap="square" lIns="0" tIns="0" rIns="0" bIns="0" rtlCol="0" anchor="ctr"/>
           <a:lstStyle/>
           <a:p>
-            <a:pPr indent="0" marL="0">
+            <a:pPr marL="0" indent="0">
               <a:buNone/>
             </a:pPr>
             <a:r>
@@ -6177,7 +5953,7 @@
           <a:bodyPr wrap="square" lIns="0" tIns="0" rIns="0" bIns="0" rtlCol="0" anchor="ctr"/>
           <a:lstStyle/>
           <a:p>
-            <a:pPr indent="0" marL="0">
+            <a:pPr marL="0" indent="0">
               <a:buNone/>
             </a:pPr>
             <a:r>
@@ -6212,7 +5988,7 @@
           </a:prstGeom>
           <a:extLst>
             <a:ext uri="{C572A759-6A51-4108-AA02-DFA0A04FC94B}">
-              <ma14:wrappingTextBoxFlag xmlns:ma14="http://schemas.microsoft.com/office/mac/drawingml/2011/main" val="0"/>
+              <ma14:wrappingTextBoxFlag xmlns:ma14="http://schemas.microsoft.com/office/mac/drawingml/2011/main" xmlns="" val="0"/>
             </a:ext>
           </a:extLst>
         </p:spPr>
@@ -6230,7 +6006,7 @@
           <a:p>
             <a:pPr algn="r"/>
             <a:fld id="{F7021451-1387-4CA6-816F-3879F97B5CBC}" type="slidenum">
-              <a:rPr b="0" lang="en-US"/>
+              <a:rPr lang="en-US" b="0"/>
               <a:t>11</a:t>
             </a:fld>
             <a:endParaRPr lang="en-US"/>
@@ -6265,9 +6041,11 @@
       <p:sp>
         <p:nvSpPr>
           <p:cNvPr id="2" name="Text 0"/>
-          <p:cNvSpPr/>
+          <p:cNvSpPr>
+            <a:spLocks noGrp="1"/>
+          </p:cNvSpPr>
           <p:nvPr>
-            <p:ph idx="100" type="body" hasCustomPrompt="1"/>
+            <p:ph type="body" idx="100" hasCustomPrompt="1"/>
           </p:nvPr>
         </p:nvSpPr>
         <p:spPr>
@@ -6285,11 +6063,11 @@
           <a:bodyPr wrap="square" lIns="0" tIns="0" rIns="0" bIns="0" rtlCol="0"/>
           <a:lstStyle/>
           <a:p>
-            <a:pPr indent="0" marL="0">
-              <a:buNone/>
-            </a:pPr>
-            <a:r>
-              <a:rPr lang="en-US" sz="1200" b="1" spc="200" kern="0" dirty="0">
+            <a:pPr marL="0" indent="0">
+              <a:buNone/>
+            </a:pPr>
+            <a:r>
+              <a:rPr lang="en-US" sz="1200" b="1" kern="0" spc="200" dirty="0">
                 <a:solidFill>
                   <a:schemeClr val="accent2"/>
                 </a:solidFill>
@@ -6303,9 +6081,11 @@
       <p:sp>
         <p:nvSpPr>
           <p:cNvPr id="3" name="Text 0"/>
-          <p:cNvSpPr/>
+          <p:cNvSpPr>
+            <a:spLocks noGrp="1"/>
+          </p:cNvSpPr>
           <p:nvPr>
-            <p:ph idx="101" type="title" hasCustomPrompt="1"/>
+            <p:ph type="title" idx="101" hasCustomPrompt="1"/>
           </p:nvPr>
         </p:nvSpPr>
         <p:spPr>
@@ -6323,7 +6103,7 @@
           <a:bodyPr wrap="square" lIns="0" tIns="0" rIns="0" bIns="0" rtlCol="0" anchor="t"/>
           <a:lstStyle/>
           <a:p>
-            <a:pPr algn="l" indent="0" marL="0">
+            <a:pPr marL="0" indent="0" algn="l">
               <a:buNone/>
             </a:pPr>
             <a:r>
@@ -6343,7 +6123,7 @@
       </p:sp>
       <p:graphicFrame>
         <p:nvGraphicFramePr>
-          <p:cNvPr id="4" name="drift chart" descr=""/>
+          <p:cNvPr id="4" name="drift chart"/>
           <p:cNvGraphicFramePr/>
           <p:nvPr/>
         </p:nvGraphicFramePr>
@@ -6351,9 +6131,9 @@
           <a:off x="640080" y="1645920"/>
           <a:ext cx="6949440" cy="4297680"/>
         </p:xfrm>
-        <a:graphic xmlns:a="http://schemas.openxmlformats.org/drawingml/2006/main">
+        <a:graphic>
           <a:graphicData uri="http://schemas.openxmlformats.org/drawingml/2006/chart">
-            <c:chart xmlns:c="http://schemas.openxmlformats.org/drawingml/2006/chart" r:id="rId1"/>
+            <c:chart xmlns:c="http://schemas.openxmlformats.org/drawingml/2006/chart" xmlns:r="http://schemas.openxmlformats.org/officeDocument/2006/relationships" r:id="rId3"/>
           </a:graphicData>
         </a:graphic>
       </p:graphicFrame>
@@ -6378,7 +6158,7 @@
           <a:bodyPr wrap="square" lIns="0" tIns="0" rIns="0" bIns="0" rtlCol="0" anchor="ctr"/>
           <a:lstStyle/>
           <a:p>
-            <a:pPr indent="0" marL="0">
+            <a:pPr marL="0" indent="0">
               <a:buNone/>
             </a:pPr>
             <a:r>
@@ -6417,7 +6197,7 @@
           <a:bodyPr wrap="square" lIns="0" tIns="0" rIns="0" bIns="0" rtlCol="0" anchor="ctr"/>
           <a:lstStyle/>
           <a:p>
-            <a:pPr indent="0" marL="0">
+            <a:pPr marL="0" indent="0">
               <a:buNone/>
             </a:pPr>
             <a:r>
@@ -6453,7 +6233,7 @@
           <a:bodyPr wrap="square" lIns="0" tIns="0" rIns="0" bIns="0" rtlCol="0" anchor="ctr"/>
           <a:lstStyle/>
           <a:p>
-            <a:pPr indent="0" marL="0">
+            <a:pPr marL="0" indent="0">
               <a:buNone/>
             </a:pPr>
             <a:r>
@@ -6492,7 +6272,7 @@
           <a:bodyPr wrap="square" lIns="0" tIns="0" rIns="0" bIns="0" rtlCol="0" anchor="ctr"/>
           <a:lstStyle/>
           <a:p>
-            <a:pPr indent="0" marL="0">
+            <a:pPr marL="0" indent="0">
               <a:buNone/>
             </a:pPr>
             <a:r>
@@ -6506,7 +6286,7 @@
             <a:endParaRPr lang="en-US" sz="1400" dirty="0"/>
           </a:p>
           <a:p>
-            <a:pPr indent="0" marL="0">
+            <a:pPr marL="0" indent="0">
               <a:buNone/>
             </a:pPr>
             <a:r>
@@ -6542,7 +6322,7 @@
           <a:bodyPr wrap="square" lIns="0" tIns="0" rIns="0" bIns="0" rtlCol="0" anchor="ctr"/>
           <a:lstStyle/>
           <a:p>
-            <a:pPr indent="0" marL="0">
+            <a:pPr marL="0" indent="0">
               <a:buNone/>
             </a:pPr>
             <a:r>
@@ -6577,7 +6357,7 @@
           </a:prstGeom>
           <a:extLst>
             <a:ext uri="{C572A759-6A51-4108-AA02-DFA0A04FC94B}">
-              <ma14:wrappingTextBoxFlag xmlns:ma14="http://schemas.microsoft.com/office/mac/drawingml/2011/main" val="0"/>
+              <ma14:wrappingTextBoxFlag xmlns:ma14="http://schemas.microsoft.com/office/mac/drawingml/2011/main" xmlns="" val="0"/>
             </a:ext>
           </a:extLst>
         </p:spPr>
@@ -6595,7 +6375,7 @@
           <a:p>
             <a:pPr algn="r"/>
             <a:fld id="{F7021451-1387-4CA6-816F-3879F97B5CBC}" type="slidenum">
-              <a:rPr b="0" lang="en-US"/>
+              <a:rPr lang="en-US" b="0"/>
               <a:t>12</a:t>
             </a:fld>
             <a:endParaRPr lang="en-US"/>
@@ -6630,9 +6410,11 @@
       <p:sp>
         <p:nvSpPr>
           <p:cNvPr id="2" name="Text 0"/>
-          <p:cNvSpPr/>
+          <p:cNvSpPr>
+            <a:spLocks noGrp="1"/>
+          </p:cNvSpPr>
           <p:nvPr>
-            <p:ph idx="100" type="body" hasCustomPrompt="1"/>
+            <p:ph type="body" idx="100" hasCustomPrompt="1"/>
           </p:nvPr>
         </p:nvSpPr>
         <p:spPr>
@@ -6650,11 +6432,11 @@
           <a:bodyPr wrap="square" lIns="0" tIns="0" rIns="0" bIns="0" rtlCol="0"/>
           <a:lstStyle/>
           <a:p>
-            <a:pPr indent="0" marL="0">
-              <a:buNone/>
-            </a:pPr>
-            <a:r>
-              <a:rPr lang="en-US" sz="1200" b="1" spc="200" kern="0" dirty="0">
+            <a:pPr marL="0" indent="0">
+              <a:buNone/>
+            </a:pPr>
+            <a:r>
+              <a:rPr lang="en-US" sz="1200" b="1" kern="0" spc="200" dirty="0">
                 <a:solidFill>
                   <a:schemeClr val="accent2"/>
                 </a:solidFill>
@@ -6668,9 +6450,11 @@
       <p:sp>
         <p:nvSpPr>
           <p:cNvPr id="3" name="Text 0"/>
-          <p:cNvSpPr/>
+          <p:cNvSpPr>
+            <a:spLocks noGrp="1"/>
+          </p:cNvSpPr>
           <p:nvPr>
-            <p:ph idx="101" type="title" hasCustomPrompt="1"/>
+            <p:ph type="title" idx="101" hasCustomPrompt="1"/>
           </p:nvPr>
         </p:nvSpPr>
         <p:spPr>
@@ -6688,7 +6472,7 @@
           <a:bodyPr wrap="square" lIns="0" tIns="0" rIns="0" bIns="0" rtlCol="0" anchor="t"/>
           <a:lstStyle/>
           <a:p>
-            <a:pPr algn="l" indent="0" marL="0">
+            <a:pPr marL="0" indent="0" algn="l">
               <a:buNone/>
             </a:pPr>
             <a:r>
@@ -6708,7 +6492,7 @@
       </p:sp>
       <p:graphicFrame>
         <p:nvGraphicFramePr>
-          <p:cNvPr id="4" name="martts chart" descr=""/>
+          <p:cNvPr id="4" name="martts chart"/>
           <p:cNvGraphicFramePr/>
           <p:nvPr/>
         </p:nvGraphicFramePr>
@@ -6716,9 +6500,9 @@
           <a:off x="640080" y="1645920"/>
           <a:ext cx="6949440" cy="4297680"/>
         </p:xfrm>
-        <a:graphic xmlns:a="http://schemas.openxmlformats.org/drawingml/2006/main">
+        <a:graphic>
           <a:graphicData uri="http://schemas.openxmlformats.org/drawingml/2006/chart">
-            <c:chart xmlns:c="http://schemas.openxmlformats.org/drawingml/2006/chart" r:id="rId1"/>
+            <c:chart xmlns:c="http://schemas.openxmlformats.org/drawingml/2006/chart" xmlns:r="http://schemas.openxmlformats.org/officeDocument/2006/relationships" r:id="rId3"/>
           </a:graphicData>
         </a:graphic>
       </p:graphicFrame>
@@ -6743,7 +6527,7 @@
           <a:bodyPr wrap="square" lIns="0" tIns="0" rIns="0" bIns="0" rtlCol="0" anchor="ctr"/>
           <a:lstStyle/>
           <a:p>
-            <a:pPr indent="0" marL="0">
+            <a:pPr marL="0" indent="0">
               <a:buNone/>
             </a:pPr>
             <a:r>
@@ -6782,7 +6566,7 @@
           <a:bodyPr wrap="square" lIns="0" tIns="0" rIns="0" bIns="0" rtlCol="0" anchor="ctr"/>
           <a:lstStyle/>
           <a:p>
-            <a:pPr indent="0" marL="0">
+            <a:pPr marL="0" indent="0">
               <a:buNone/>
             </a:pPr>
             <a:r>
@@ -6818,7 +6602,7 @@
           <a:bodyPr wrap="square" lIns="0" tIns="0" rIns="0" bIns="0" rtlCol="0" anchor="ctr"/>
           <a:lstStyle/>
           <a:p>
-            <a:pPr indent="0" marL="0">
+            <a:pPr marL="0" indent="0">
               <a:buNone/>
             </a:pPr>
             <a:r>
@@ -6857,7 +6641,7 @@
           <a:bodyPr wrap="square" lIns="0" tIns="0" rIns="0" bIns="0" rtlCol="0" anchor="ctr"/>
           <a:lstStyle/>
           <a:p>
-            <a:pPr indent="0" marL="0">
+            <a:pPr marL="0" indent="0">
               <a:buNone/>
             </a:pPr>
             <a:r>
@@ -6893,7 +6677,7 @@
           <a:bodyPr wrap="square" lIns="0" tIns="0" rIns="0" bIns="0" rtlCol="0" anchor="ctr"/>
           <a:lstStyle/>
           <a:p>
-            <a:pPr indent="0" marL="0">
+            <a:pPr marL="0" indent="0">
               <a:buNone/>
             </a:pPr>
             <a:r>
@@ -6928,7 +6712,7 @@
           </a:prstGeom>
           <a:extLst>
             <a:ext uri="{C572A759-6A51-4108-AA02-DFA0A04FC94B}">
-              <ma14:wrappingTextBoxFlag xmlns:ma14="http://schemas.microsoft.com/office/mac/drawingml/2011/main" val="0"/>
+              <ma14:wrappingTextBoxFlag xmlns:ma14="http://schemas.microsoft.com/office/mac/drawingml/2011/main" xmlns="" val="0"/>
             </a:ext>
           </a:extLst>
         </p:spPr>
@@ -6946,7 +6730,7 @@
           <a:p>
             <a:pPr algn="r"/>
             <a:fld id="{F7021451-1387-4CA6-816F-3879F97B5CBC}" type="slidenum">
-              <a:rPr b="0" lang="en-US"/>
+              <a:rPr lang="en-US" b="0"/>
               <a:t>13</a:t>
             </a:fld>
             <a:endParaRPr lang="en-US"/>
@@ -6981,9 +6765,11 @@
       <p:sp>
         <p:nvSpPr>
           <p:cNvPr id="2" name="Text 0"/>
-          <p:cNvSpPr/>
+          <p:cNvSpPr>
+            <a:spLocks noGrp="1"/>
+          </p:cNvSpPr>
           <p:nvPr>
-            <p:ph idx="100" type="body" hasCustomPrompt="1"/>
+            <p:ph type="body" idx="100" hasCustomPrompt="1"/>
           </p:nvPr>
         </p:nvSpPr>
         <p:spPr>
@@ -7001,11 +6787,11 @@
           <a:bodyPr wrap="square" lIns="0" tIns="0" rIns="0" bIns="0" rtlCol="0"/>
           <a:lstStyle/>
           <a:p>
-            <a:pPr indent="0" marL="0">
-              <a:buNone/>
-            </a:pPr>
-            <a:r>
-              <a:rPr lang="en-US" sz="1200" b="1" spc="200" kern="0" dirty="0">
+            <a:pPr marL="0" indent="0">
+              <a:buNone/>
+            </a:pPr>
+            <a:r>
+              <a:rPr lang="en-US" sz="1200" b="1" kern="0" spc="200" dirty="0">
                 <a:solidFill>
                   <a:schemeClr val="accent2"/>
                 </a:solidFill>
@@ -7019,9 +6805,11 @@
       <p:sp>
         <p:nvSpPr>
           <p:cNvPr id="3" name="Text 0"/>
-          <p:cNvSpPr/>
+          <p:cNvSpPr>
+            <a:spLocks noGrp="1"/>
+          </p:cNvSpPr>
           <p:nvPr>
-            <p:ph idx="101" type="title" hasCustomPrompt="1"/>
+            <p:ph type="title" idx="101" hasCustomPrompt="1"/>
           </p:nvPr>
         </p:nvSpPr>
         <p:spPr>
@@ -7039,7 +6827,7 @@
           <a:bodyPr wrap="square" lIns="0" tIns="0" rIns="0" bIns="0" rtlCol="0" anchor="t"/>
           <a:lstStyle/>
           <a:p>
-            <a:pPr algn="l" indent="0" marL="0">
+            <a:pPr marL="0" indent="0" algn="l">
               <a:buNone/>
             </a:pPr>
             <a:r>
@@ -7105,7 +6893,7 @@
           <a:bodyPr wrap="square" lIns="0" tIns="0" rIns="0" bIns="0" rtlCol="0" anchor="ctr"/>
           <a:lstStyle/>
           <a:p>
-            <a:pPr indent="0" marL="0">
+            <a:pPr marL="0" indent="0">
               <a:buNone/>
             </a:pPr>
             <a:r>
@@ -7166,7 +6954,7 @@
           <a:bodyPr wrap="square" lIns="0" tIns="0" rIns="0" bIns="0" rtlCol="0" anchor="t"/>
           <a:lstStyle/>
           <a:p>
-            <a:pPr indent="0" marL="0">
+            <a:pPr marL="0" indent="0">
               <a:buNone/>
             </a:pPr>
             <a:r>
@@ -7227,7 +7015,7 @@
           <a:bodyPr wrap="square" lIns="0" tIns="0" rIns="0" bIns="0" rtlCol="0" anchor="t"/>
           <a:lstStyle/>
           <a:p>
-            <a:pPr indent="0" marL="0">
+            <a:pPr marL="0" indent="0">
               <a:buNone/>
             </a:pPr>
             <a:r>
@@ -7288,7 +7076,7 @@
           <a:bodyPr wrap="square" lIns="0" tIns="0" rIns="0" bIns="0" rtlCol="0" anchor="t"/>
           <a:lstStyle/>
           <a:p>
-            <a:pPr indent="0" marL="0">
+            <a:pPr marL="0" indent="0">
               <a:buNone/>
             </a:pPr>
             <a:r>
@@ -7349,7 +7137,7 @@
           <a:bodyPr wrap="square" lIns="0" tIns="0" rIns="0" bIns="0" rtlCol="0" anchor="t"/>
           <a:lstStyle/>
           <a:p>
-            <a:pPr indent="0" marL="0">
+            <a:pPr marL="0" indent="0">
               <a:buNone/>
             </a:pPr>
             <a:r>
@@ -7412,7 +7200,7 @@
           <a:bodyPr wrap="square" lIns="0" tIns="0" rIns="0" bIns="0" rtlCol="0" anchor="ctr"/>
           <a:lstStyle/>
           <a:p>
-            <a:pPr indent="0" marL="0">
+            <a:pPr marL="0" indent="0">
               <a:buNone/>
             </a:pPr>
             <a:r>
@@ -7473,7 +7261,7 @@
           <a:bodyPr wrap="square" lIns="0" tIns="0" rIns="0" bIns="0" rtlCol="0" anchor="t"/>
           <a:lstStyle/>
           <a:p>
-            <a:pPr indent="0" marL="0">
+            <a:pPr marL="0" indent="0">
               <a:buNone/>
             </a:pPr>
             <a:r>
@@ -7534,7 +7322,7 @@
           <a:bodyPr wrap="square" lIns="0" tIns="0" rIns="0" bIns="0" rtlCol="0" anchor="t"/>
           <a:lstStyle/>
           <a:p>
-            <a:pPr indent="0" marL="0">
+            <a:pPr marL="0" indent="0">
               <a:buNone/>
             </a:pPr>
             <a:r>
@@ -7595,7 +7383,7 @@
           <a:bodyPr wrap="square" lIns="0" tIns="0" rIns="0" bIns="0" rtlCol="0" anchor="t"/>
           <a:lstStyle/>
           <a:p>
-            <a:pPr indent="0" marL="0">
+            <a:pPr marL="0" indent="0">
               <a:buNone/>
             </a:pPr>
             <a:r>
@@ -7656,7 +7444,7 @@
           <a:bodyPr wrap="square" lIns="0" tIns="0" rIns="0" bIns="0" rtlCol="0" anchor="t"/>
           <a:lstStyle/>
           <a:p>
-            <a:pPr indent="0" marL="0">
+            <a:pPr marL="0" indent="0">
               <a:buNone/>
             </a:pPr>
             <a:r>
@@ -7691,7 +7479,7 @@
           </a:prstGeom>
           <a:extLst>
             <a:ext uri="{C572A759-6A51-4108-AA02-DFA0A04FC94B}">
-              <ma14:wrappingTextBoxFlag xmlns:ma14="http://schemas.microsoft.com/office/mac/drawingml/2011/main" val="0"/>
+              <ma14:wrappingTextBoxFlag xmlns:ma14="http://schemas.microsoft.com/office/mac/drawingml/2011/main" xmlns="" val="0"/>
             </a:ext>
           </a:extLst>
         </p:spPr>
@@ -7709,7 +7497,7 @@
           <a:p>
             <a:pPr algn="r"/>
             <a:fld id="{F7021451-1387-4CA6-816F-3879F97B5CBC}" type="slidenum">
-              <a:rPr b="0" lang="en-US"/>
+              <a:rPr lang="en-US" b="0"/>
               <a:t>14</a:t>
             </a:fld>
             <a:endParaRPr lang="en-US"/>
@@ -7914,9 +7702,11 @@
       <p:sp>
         <p:nvSpPr>
           <p:cNvPr id="8" name="Text 0"/>
-          <p:cNvSpPr/>
+          <p:cNvSpPr>
+            <a:spLocks noGrp="1"/>
+          </p:cNvSpPr>
           <p:nvPr>
-            <p:ph idx="100" type="title" hasCustomPrompt="1"/>
+            <p:ph type="title" idx="100" hasCustomPrompt="1"/>
           </p:nvPr>
         </p:nvSpPr>
         <p:spPr>
@@ -7934,7 +7724,7 @@
           <a:bodyPr wrap="square" lIns="0" tIns="0" rIns="0" bIns="0" rtlCol="0" anchor="b"/>
           <a:lstStyle/>
           <a:p>
-            <a:pPr algn="l" indent="0" marL="0">
+            <a:pPr marL="0" indent="0" algn="l">
               <a:buNone/>
             </a:pPr>
             <a:r>
@@ -7955,9 +7745,11 @@
       <p:sp>
         <p:nvSpPr>
           <p:cNvPr id="9" name="Text 0"/>
-          <p:cNvSpPr/>
+          <p:cNvSpPr>
+            <a:spLocks noGrp="1"/>
+          </p:cNvSpPr>
           <p:nvPr>
-            <p:ph idx="101" type="body" hasCustomPrompt="1"/>
+            <p:ph type="body" idx="101" hasCustomPrompt="1"/>
           </p:nvPr>
         </p:nvSpPr>
         <p:spPr>
@@ -7975,7 +7767,7 @@
           <a:bodyPr wrap="square" lIns="0" tIns="0" rIns="0" bIns="0" rtlCol="0" anchor="t"/>
           <a:lstStyle/>
           <a:p>
-            <a:pPr indent="0" marL="0">
+            <a:pPr marL="0" indent="0">
               <a:buNone/>
             </a:pPr>
             <a:r>
@@ -8011,7 +7803,7 @@
           <a:bodyPr wrap="square" lIns="0" tIns="0" rIns="0" bIns="0" rtlCol="0" anchor="ctr"/>
           <a:lstStyle/>
           <a:p>
-            <a:pPr indent="0" marL="0">
+            <a:pPr marL="0" indent="0">
               <a:buNone/>
             </a:pPr>
             <a:r>
@@ -8054,9 +7846,11 @@
       <p:sp>
         <p:nvSpPr>
           <p:cNvPr id="2" name="Text 0"/>
-          <p:cNvSpPr/>
+          <p:cNvSpPr>
+            <a:spLocks noGrp="1"/>
+          </p:cNvSpPr>
           <p:nvPr>
-            <p:ph idx="100" type="body" hasCustomPrompt="1"/>
+            <p:ph type="body" idx="100" hasCustomPrompt="1"/>
           </p:nvPr>
         </p:nvSpPr>
         <p:spPr>
@@ -8074,59 +7868,18 @@
           <a:bodyPr wrap="square" lIns="0" tIns="0" rIns="0" bIns="0" rtlCol="0"/>
           <a:lstStyle/>
           <a:p>
-            <a:pPr indent="0" marL="0">
-              <a:buNone/>
-            </a:pPr>
-            <a:r>
-              <a:rPr lang="en-US" sz="1200" b="1" spc="200" kern="0" dirty="0">
+            <a:pPr marL="0" indent="0">
+              <a:buNone/>
+            </a:pPr>
+            <a:r>
+              <a:rPr lang="en-US" sz="5400" b="1" kern="0" spc="200" dirty="0">
                 <a:solidFill>
                   <a:schemeClr val="accent2"/>
                 </a:solidFill>
               </a:rPr>
               <a:t>THE PROBLEM</a:t>
             </a:r>
-            <a:endParaRPr lang="en-US" sz="1200" dirty="0"/>
-          </a:p>
-        </p:txBody>
-      </p:sp>
-      <p:sp>
-        <p:nvSpPr>
-          <p:cNvPr id="3" name="Text 0"/>
-          <p:cNvSpPr/>
-          <p:nvPr>
-            <p:ph idx="101" type="title" hasCustomPrompt="1"/>
-          </p:nvPr>
-        </p:nvSpPr>
-        <p:spPr>
-          <a:xfrm>
-            <a:off x="640080" y="658368"/>
-            <a:ext cx="10881360" cy="731520"/>
-          </a:xfrm>
-          <a:prstGeom prst="rect">
-            <a:avLst/>
-          </a:prstGeom>
-          <a:noFill/>
-          <a:ln/>
-        </p:spPr>
-        <p:txBody>
-          <a:bodyPr wrap="square" lIns="0" tIns="0" rIns="0" bIns="0" rtlCol="0" anchor="t"/>
-          <a:lstStyle/>
-          <a:p>
-            <a:pPr algn="l" indent="0" marL="0">
-              <a:buNone/>
-            </a:pPr>
-            <a:r>
-              <a:rPr lang="en-US" sz="3400" dirty="0">
-                <a:solidFill>
-                  <a:schemeClr val="tx2"/>
-                </a:solidFill>
-                <a:latin typeface="Cambria" pitchFamily="34" charset="0"/>
-                <a:ea typeface="Cambria" pitchFamily="34" charset="-122"/>
-                <a:cs typeface="Cambria" pitchFamily="34" charset="-120"/>
-              </a:rPr>
-              <a:t>Distress calls are noisy, multilingual and urgent</a:t>
-            </a:r>
-            <a:endParaRPr lang="en-US" sz="3400" dirty="0"/>
+            <a:endParaRPr lang="en-US" sz="5400" dirty="0"/>
           </a:p>
         </p:txBody>
       </p:sp>
@@ -8178,7 +7931,7 @@
           <a:bodyPr wrap="square" lIns="0" tIns="0" rIns="0" bIns="0" rtlCol="0" anchor="ctr"/>
           <a:lstStyle/>
           <a:p>
-            <a:pPr indent="0" marL="0">
+            <a:pPr marL="0" indent="0">
               <a:buNone/>
             </a:pPr>
             <a:r>
@@ -8217,7 +7970,7 @@
           <a:bodyPr wrap="square" lIns="0" tIns="0" rIns="0" bIns="0" rtlCol="0" anchor="t"/>
           <a:lstStyle/>
           <a:p>
-            <a:pPr indent="0" marL="0">
+            <a:pPr marL="0" indent="0">
               <a:buNone/>
             </a:pPr>
             <a:r>
@@ -8280,7 +8033,7 @@
           <a:bodyPr wrap="square" lIns="0" tIns="0" rIns="0" bIns="0" rtlCol="0" anchor="ctr"/>
           <a:lstStyle/>
           <a:p>
-            <a:pPr indent="0" marL="0">
+            <a:pPr marL="0" indent="0">
               <a:buNone/>
             </a:pPr>
             <a:r>
@@ -8319,7 +8072,7 @@
           <a:bodyPr wrap="square" lIns="0" tIns="0" rIns="0" bIns="0" rtlCol="0" anchor="t"/>
           <a:lstStyle/>
           <a:p>
-            <a:pPr indent="0" marL="0">
+            <a:pPr marL="0" indent="0">
               <a:buNone/>
             </a:pPr>
             <a:r>
@@ -8382,7 +8135,7 @@
           <a:bodyPr wrap="square" lIns="0" tIns="0" rIns="0" bIns="0" rtlCol="0" anchor="ctr"/>
           <a:lstStyle/>
           <a:p>
-            <a:pPr indent="0" marL="0">
+            <a:pPr marL="0" indent="0">
               <a:buNone/>
             </a:pPr>
             <a:r>
@@ -8421,7 +8174,7 @@
           <a:bodyPr wrap="square" lIns="0" tIns="0" rIns="0" bIns="0" rtlCol="0" anchor="t"/>
           <a:lstStyle/>
           <a:p>
-            <a:pPr indent="0" marL="0">
+            <a:pPr marL="0" indent="0">
               <a:buNone/>
             </a:pPr>
             <a:r>
@@ -8457,7 +8210,7 @@
           <a:bodyPr wrap="square" lIns="0" tIns="0" rIns="0" bIns="0" rtlCol="0" anchor="ctr"/>
           <a:lstStyle/>
           <a:p>
-            <a:pPr indent="0" marL="0">
+            <a:pPr marL="0" indent="0">
               <a:buNone/>
             </a:pPr>
             <a:r>
@@ -8492,7 +8245,7 @@
           </a:prstGeom>
           <a:extLst>
             <a:ext uri="{C572A759-6A51-4108-AA02-DFA0A04FC94B}">
-              <ma14:wrappingTextBoxFlag xmlns:ma14="http://schemas.microsoft.com/office/mac/drawingml/2011/main" val="0"/>
+              <ma14:wrappingTextBoxFlag xmlns:ma14="http://schemas.microsoft.com/office/mac/drawingml/2011/main" xmlns="" val="0"/>
             </a:ext>
           </a:extLst>
         </p:spPr>
@@ -8510,7 +8263,7 @@
           <a:p>
             <a:pPr algn="r"/>
             <a:fld id="{F7021451-1387-4CA6-816F-3879F97B5CBC}" type="slidenum">
-              <a:rPr b="0" lang="en-US"/>
+              <a:rPr lang="en-US" b="0"/>
               <a:t>2</a:t>
             </a:fld>
             <a:endParaRPr lang="en-US"/>
@@ -8545,9 +8298,11 @@
       <p:sp>
         <p:nvSpPr>
           <p:cNvPr id="2" name="Text 0"/>
-          <p:cNvSpPr/>
+          <p:cNvSpPr>
+            <a:spLocks noGrp="1"/>
+          </p:cNvSpPr>
           <p:nvPr>
-            <p:ph idx="100" type="body" hasCustomPrompt="1"/>
+            <p:ph type="body" idx="100" hasCustomPrompt="1"/>
           </p:nvPr>
         </p:nvSpPr>
         <p:spPr>
@@ -8565,72 +8320,31 @@
           <a:bodyPr wrap="square" lIns="0" tIns="0" rIns="0" bIns="0" rtlCol="0"/>
           <a:lstStyle/>
           <a:p>
-            <a:pPr indent="0" marL="0">
-              <a:buNone/>
-            </a:pPr>
-            <a:r>
-              <a:rPr lang="en-US" sz="1200" b="1" spc="200" kern="0" dirty="0">
+            <a:pPr marL="0" indent="0">
+              <a:buNone/>
+            </a:pPr>
+            <a:r>
+              <a:rPr lang="en-US" sz="5400" b="1" kern="0" spc="200" dirty="0">
                 <a:solidFill>
                   <a:schemeClr val="accent2"/>
                 </a:solidFill>
               </a:rPr>
               <a:t>THE PRODUCT</a:t>
             </a:r>
-            <a:endParaRPr lang="en-US" sz="1200" dirty="0"/>
-          </a:p>
-        </p:txBody>
-      </p:sp>
-      <p:sp>
-        <p:nvSpPr>
-          <p:cNvPr id="3" name="Text 0"/>
-          <p:cNvSpPr/>
-          <p:nvPr>
-            <p:ph idx="101" type="title" hasCustomPrompt="1"/>
-          </p:nvPr>
-        </p:nvSpPr>
-        <p:spPr>
-          <a:xfrm>
-            <a:off x="640080" y="658368"/>
-            <a:ext cx="10881360" cy="731520"/>
-          </a:xfrm>
-          <a:prstGeom prst="rect">
-            <a:avLst/>
-          </a:prstGeom>
-          <a:noFill/>
-          <a:ln/>
-        </p:spPr>
-        <p:txBody>
-          <a:bodyPr wrap="square" lIns="0" tIns="0" rIns="0" bIns="0" rtlCol="0" anchor="t"/>
-          <a:lstStyle/>
-          <a:p>
-            <a:pPr algn="l" indent="0" marL="0">
-              <a:buNone/>
-            </a:pPr>
-            <a:r>
-              <a:rPr lang="en-US" sz="3400" dirty="0">
-                <a:solidFill>
-                  <a:schemeClr val="tx2"/>
-                </a:solidFill>
-                <a:latin typeface="Cambria" pitchFamily="34" charset="0"/>
-                <a:ea typeface="Cambria" pitchFamily="34" charset="-122"/>
-                <a:cs typeface="Cambria" pitchFamily="34" charset="-120"/>
-              </a:rPr>
-              <a:t>An operator console that listens, extracts and plans</a:t>
-            </a:r>
-            <a:endParaRPr lang="en-US" sz="3400" dirty="0"/>
+            <a:endParaRPr lang="en-US" sz="5400" dirty="0"/>
           </a:p>
         </p:txBody>
       </p:sp>
       <p:pic>
         <p:nvPicPr>
-          <p:cNvPr id="4" name="console screenshot" descr="C:\Users\Lenovo\OneDrive\Desktop\Projects\Maritime_project\presentation\assets\console_ops.png">    </p:cNvPr>
+          <p:cNvPr id="4" name="console screenshot" descr="C:\Users\Lenovo\OneDrive\Desktop\Projects\Maritime_project\presentation\assets\console_ops.png"/>
           <p:cNvPicPr>
             <a:picLocks noChangeAspect="1"/>
           </p:cNvPicPr>
           <p:nvPr/>
         </p:nvPicPr>
         <p:blipFill>
-          <a:blip r:embed="rId1"/>
+          <a:blip r:embed="rId3"/>
           <a:stretch>
             <a:fillRect/>
           </a:stretch>
@@ -8691,7 +8405,7 @@
           <a:bodyPr wrap="square" lIns="0" tIns="0" rIns="0" bIns="0" rtlCol="0" anchor="ctr"/>
           <a:lstStyle/>
           <a:p>
-            <a:pPr algn="ctr" indent="0" marL="0">
+            <a:pPr marL="0" indent="0" algn="ctr">
               <a:buNone/>
             </a:pPr>
             <a:r>
@@ -8727,7 +8441,7 @@
           <a:bodyPr wrap="square" lIns="0" tIns="0" rIns="0" bIns="0" rtlCol="0" anchor="ctr"/>
           <a:lstStyle/>
           <a:p>
-            <a:pPr indent="0" marL="0">
+            <a:pPr marL="0" indent="0">
               <a:buNone/>
             </a:pPr>
             <a:r>
@@ -8763,7 +8477,7 @@
           <a:bodyPr wrap="square" lIns="0" tIns="0" rIns="0" bIns="0" rtlCol="0" anchor="t"/>
           <a:lstStyle/>
           <a:p>
-            <a:pPr indent="0" marL="0">
+            <a:pPr marL="0" indent="0">
               <a:buNone/>
             </a:pPr>
             <a:r>
@@ -8824,7 +8538,7 @@
           <a:bodyPr wrap="square" lIns="0" tIns="0" rIns="0" bIns="0" rtlCol="0" anchor="ctr"/>
           <a:lstStyle/>
           <a:p>
-            <a:pPr algn="ctr" indent="0" marL="0">
+            <a:pPr marL="0" indent="0" algn="ctr">
               <a:buNone/>
             </a:pPr>
             <a:r>
@@ -8860,7 +8574,7 @@
           <a:bodyPr wrap="square" lIns="0" tIns="0" rIns="0" bIns="0" rtlCol="0" anchor="ctr"/>
           <a:lstStyle/>
           <a:p>
-            <a:pPr indent="0" marL="0">
+            <a:pPr marL="0" indent="0">
               <a:buNone/>
             </a:pPr>
             <a:r>
@@ -8896,7 +8610,7 @@
           <a:bodyPr wrap="square" lIns="0" tIns="0" rIns="0" bIns="0" rtlCol="0" anchor="t"/>
           <a:lstStyle/>
           <a:p>
-            <a:pPr indent="0" marL="0">
+            <a:pPr marL="0" indent="0">
               <a:buNone/>
             </a:pPr>
             <a:r>
@@ -8957,7 +8671,7 @@
           <a:bodyPr wrap="square" lIns="0" tIns="0" rIns="0" bIns="0" rtlCol="0" anchor="ctr"/>
           <a:lstStyle/>
           <a:p>
-            <a:pPr algn="ctr" indent="0" marL="0">
+            <a:pPr marL="0" indent="0" algn="ctr">
               <a:buNone/>
             </a:pPr>
             <a:r>
@@ -8993,7 +8707,7 @@
           <a:bodyPr wrap="square" lIns="0" tIns="0" rIns="0" bIns="0" rtlCol="0" anchor="ctr"/>
           <a:lstStyle/>
           <a:p>
-            <a:pPr indent="0" marL="0">
+            <a:pPr marL="0" indent="0">
               <a:buNone/>
             </a:pPr>
             <a:r>
@@ -9029,7 +8743,7 @@
           <a:bodyPr wrap="square" lIns="0" tIns="0" rIns="0" bIns="0" rtlCol="0" anchor="t"/>
           <a:lstStyle/>
           <a:p>
-            <a:pPr indent="0" marL="0">
+            <a:pPr marL="0" indent="0">
               <a:buNone/>
             </a:pPr>
             <a:r>
@@ -9090,7 +8804,7 @@
           <a:bodyPr wrap="square" lIns="0" tIns="0" rIns="0" bIns="0" rtlCol="0" anchor="ctr"/>
           <a:lstStyle/>
           <a:p>
-            <a:pPr algn="ctr" indent="0" marL="0">
+            <a:pPr marL="0" indent="0" algn="ctr">
               <a:buNone/>
             </a:pPr>
             <a:r>
@@ -9126,7 +8840,7 @@
           <a:bodyPr wrap="square" lIns="0" tIns="0" rIns="0" bIns="0" rtlCol="0" anchor="ctr"/>
           <a:lstStyle/>
           <a:p>
-            <a:pPr indent="0" marL="0">
+            <a:pPr marL="0" indent="0">
               <a:buNone/>
             </a:pPr>
             <a:r>
@@ -9162,7 +8876,7 @@
           <a:bodyPr wrap="square" lIns="0" tIns="0" rIns="0" bIns="0" rtlCol="0" anchor="t"/>
           <a:lstStyle/>
           <a:p>
-            <a:pPr indent="0" marL="0">
+            <a:pPr marL="0" indent="0">
               <a:buNone/>
             </a:pPr>
             <a:r>
@@ -9198,7 +8912,7 @@
           <a:bodyPr wrap="square" lIns="0" tIns="0" rIns="0" bIns="0" rtlCol="0" anchor="ctr"/>
           <a:lstStyle/>
           <a:p>
-            <a:pPr indent="0" marL="0">
+            <a:pPr marL="0" indent="0">
               <a:buNone/>
             </a:pPr>
             <a:r>
@@ -9233,7 +8947,7 @@
           </a:prstGeom>
           <a:extLst>
             <a:ext uri="{C572A759-6A51-4108-AA02-DFA0A04FC94B}">
-              <ma14:wrappingTextBoxFlag xmlns:ma14="http://schemas.microsoft.com/office/mac/drawingml/2011/main" val="0"/>
+              <ma14:wrappingTextBoxFlag xmlns:ma14="http://schemas.microsoft.com/office/mac/drawingml/2011/main" xmlns="" val="0"/>
             </a:ext>
           </a:extLst>
         </p:spPr>
@@ -9251,7 +8965,7 @@
           <a:p>
             <a:pPr algn="r"/>
             <a:fld id="{F7021451-1387-4CA6-816F-3879F97B5CBC}" type="slidenum">
-              <a:rPr b="0" lang="en-US"/>
+              <a:rPr lang="en-US" b="0"/>
               <a:t>3</a:t>
             </a:fld>
             <a:endParaRPr lang="en-US"/>
@@ -9286,9 +9000,11 @@
       <p:sp>
         <p:nvSpPr>
           <p:cNvPr id="2" name="Text 0"/>
-          <p:cNvSpPr/>
+          <p:cNvSpPr>
+            <a:spLocks noGrp="1"/>
+          </p:cNvSpPr>
           <p:nvPr>
-            <p:ph idx="100" type="body" hasCustomPrompt="1"/>
+            <p:ph type="body" idx="100" hasCustomPrompt="1"/>
           </p:nvPr>
         </p:nvSpPr>
         <p:spPr>
@@ -9306,59 +9022,18 @@
           <a:bodyPr wrap="square" lIns="0" tIns="0" rIns="0" bIns="0" rtlCol="0"/>
           <a:lstStyle/>
           <a:p>
-            <a:pPr indent="0" marL="0">
-              <a:buNone/>
-            </a:pPr>
-            <a:r>
-              <a:rPr lang="en-US" sz="1200" b="1" spc="200" kern="0" dirty="0">
+            <a:pPr marL="0" indent="0">
+              <a:buNone/>
+            </a:pPr>
+            <a:r>
+              <a:rPr lang="en-US" sz="5400" b="1" kern="0" spc="200" dirty="0">
                 <a:solidFill>
                   <a:schemeClr val="accent2"/>
                 </a:solidFill>
               </a:rPr>
               <a:t>HOW IT WORKS</a:t>
             </a:r>
-            <a:endParaRPr lang="en-US" sz="1200" dirty="0"/>
-          </a:p>
-        </p:txBody>
-      </p:sp>
-      <p:sp>
-        <p:nvSpPr>
-          <p:cNvPr id="3" name="Text 0"/>
-          <p:cNvSpPr/>
-          <p:nvPr>
-            <p:ph idx="101" type="title" hasCustomPrompt="1"/>
-          </p:nvPr>
-        </p:nvSpPr>
-        <p:spPr>
-          <a:xfrm>
-            <a:off x="640080" y="658368"/>
-            <a:ext cx="10881360" cy="731520"/>
-          </a:xfrm>
-          <a:prstGeom prst="rect">
-            <a:avLst/>
-          </a:prstGeom>
-          <a:noFill/>
-          <a:ln/>
-        </p:spPr>
-        <p:txBody>
-          <a:bodyPr wrap="square" lIns="0" tIns="0" rIns="0" bIns="0" rtlCol="0" anchor="t"/>
-          <a:lstStyle/>
-          <a:p>
-            <a:pPr algn="l" indent="0" marL="0">
-              <a:buNone/>
-            </a:pPr>
-            <a:r>
-              <a:rPr lang="en-US" sz="3400" dirty="0">
-                <a:solidFill>
-                  <a:schemeClr val="tx2"/>
-                </a:solidFill>
-                <a:latin typeface="Cambria" pitchFamily="34" charset="0"/>
-                <a:ea typeface="Cambria" pitchFamily="34" charset="-122"/>
-                <a:cs typeface="Cambria" pitchFamily="34" charset="-120"/>
-              </a:rPr>
-              <a:t>Seven stages, each one a model you can measure</a:t>
-            </a:r>
-            <a:endParaRPr lang="en-US" sz="3400" dirty="0"/>
+            <a:endParaRPr lang="en-US" sz="5400" dirty="0"/>
           </a:p>
         </p:txBody>
       </p:sp>
@@ -9410,7 +9085,7 @@
           <a:bodyPr wrap="square" lIns="0" tIns="0" rIns="0" bIns="0" rtlCol="0" anchor="ctr"/>
           <a:lstStyle/>
           <a:p>
-            <a:pPr algn="ctr" indent="0" marL="0">
+            <a:pPr marL="0" indent="0" algn="ctr">
               <a:buNone/>
             </a:pPr>
             <a:r>
@@ -9446,7 +9121,7 @@
           <a:bodyPr wrap="square" lIns="0" tIns="0" rIns="0" bIns="0" rtlCol="0" anchor="t"/>
           <a:lstStyle/>
           <a:p>
-            <a:pPr algn="ctr" indent="0" marL="0">
+            <a:pPr marL="0" indent="0" algn="ctr">
               <a:buNone/>
             </a:pPr>
             <a:r>
@@ -9460,7 +9135,7 @@
             <a:endParaRPr lang="en-US" sz="1250" dirty="0"/>
           </a:p>
           <a:p>
-            <a:pPr algn="ctr" indent="0" marL="0">
+            <a:pPr marL="0" indent="0" algn="ctr">
               <a:buNone/>
             </a:pPr>
             <a:r>
@@ -9548,7 +9223,7 @@
           <a:bodyPr wrap="square" lIns="0" tIns="0" rIns="0" bIns="0" rtlCol="0" anchor="ctr"/>
           <a:lstStyle/>
           <a:p>
-            <a:pPr algn="ctr" indent="0" marL="0">
+            <a:pPr marL="0" indent="0" algn="ctr">
               <a:buNone/>
             </a:pPr>
             <a:r>
@@ -9584,7 +9259,7 @@
           <a:bodyPr wrap="square" lIns="0" tIns="0" rIns="0" bIns="0" rtlCol="0" anchor="t"/>
           <a:lstStyle/>
           <a:p>
-            <a:pPr algn="ctr" indent="0" marL="0">
+            <a:pPr marL="0" indent="0" algn="ctr">
               <a:buNone/>
             </a:pPr>
             <a:r>
@@ -9598,7 +9273,7 @@
             <a:endParaRPr lang="en-US" sz="1250" dirty="0"/>
           </a:p>
           <a:p>
-            <a:pPr algn="ctr" indent="0" marL="0">
+            <a:pPr marL="0" indent="0" algn="ctr">
               <a:buNone/>
             </a:pPr>
             <a:r>
@@ -9686,7 +9361,7 @@
           <a:bodyPr wrap="square" lIns="0" tIns="0" rIns="0" bIns="0" rtlCol="0" anchor="ctr"/>
           <a:lstStyle/>
           <a:p>
-            <a:pPr algn="ctr" indent="0" marL="0">
+            <a:pPr marL="0" indent="0" algn="ctr">
               <a:buNone/>
             </a:pPr>
             <a:r>
@@ -9722,7 +9397,7 @@
           <a:bodyPr wrap="square" lIns="0" tIns="0" rIns="0" bIns="0" rtlCol="0" anchor="t"/>
           <a:lstStyle/>
           <a:p>
-            <a:pPr algn="ctr" indent="0" marL="0">
+            <a:pPr marL="0" indent="0" algn="ctr">
               <a:buNone/>
             </a:pPr>
             <a:r>
@@ -9736,7 +9411,7 @@
             <a:endParaRPr lang="en-US" sz="1250" dirty="0"/>
           </a:p>
           <a:p>
-            <a:pPr algn="ctr" indent="0" marL="0">
+            <a:pPr marL="0" indent="0" algn="ctr">
               <a:buNone/>
             </a:pPr>
             <a:r>
@@ -9824,7 +9499,7 @@
           <a:bodyPr wrap="square" lIns="0" tIns="0" rIns="0" bIns="0" rtlCol="0" anchor="ctr"/>
           <a:lstStyle/>
           <a:p>
-            <a:pPr algn="ctr" indent="0" marL="0">
+            <a:pPr marL="0" indent="0" algn="ctr">
               <a:buNone/>
             </a:pPr>
             <a:r>
@@ -9860,7 +9535,7 @@
           <a:bodyPr wrap="square" lIns="0" tIns="0" rIns="0" bIns="0" rtlCol="0" anchor="t"/>
           <a:lstStyle/>
           <a:p>
-            <a:pPr algn="ctr" indent="0" marL="0">
+            <a:pPr marL="0" indent="0" algn="ctr">
               <a:buNone/>
             </a:pPr>
             <a:r>
@@ -9874,7 +9549,7 @@
             <a:endParaRPr lang="en-US" sz="1250" dirty="0"/>
           </a:p>
           <a:p>
-            <a:pPr algn="ctr" indent="0" marL="0">
+            <a:pPr marL="0" indent="0" algn="ctr">
               <a:buNone/>
             </a:pPr>
             <a:r>
@@ -9962,7 +9637,7 @@
           <a:bodyPr wrap="square" lIns="0" tIns="0" rIns="0" bIns="0" rtlCol="0" anchor="ctr"/>
           <a:lstStyle/>
           <a:p>
-            <a:pPr algn="ctr" indent="0" marL="0">
+            <a:pPr marL="0" indent="0" algn="ctr">
               <a:buNone/>
             </a:pPr>
             <a:r>
@@ -9998,7 +9673,7 @@
           <a:bodyPr wrap="square" lIns="0" tIns="0" rIns="0" bIns="0" rtlCol="0" anchor="t"/>
           <a:lstStyle/>
           <a:p>
-            <a:pPr algn="ctr" indent="0" marL="0">
+            <a:pPr marL="0" indent="0" algn="ctr">
               <a:buNone/>
             </a:pPr>
             <a:r>
@@ -10012,7 +9687,7 @@
             <a:endParaRPr lang="en-US" sz="1250" dirty="0"/>
           </a:p>
           <a:p>
-            <a:pPr algn="ctr" indent="0" marL="0">
+            <a:pPr marL="0" indent="0" algn="ctr">
               <a:buNone/>
             </a:pPr>
             <a:r>
@@ -10100,7 +9775,7 @@
           <a:bodyPr wrap="square" lIns="0" tIns="0" rIns="0" bIns="0" rtlCol="0" anchor="ctr"/>
           <a:lstStyle/>
           <a:p>
-            <a:pPr algn="ctr" indent="0" marL="0">
+            <a:pPr marL="0" indent="0" algn="ctr">
               <a:buNone/>
             </a:pPr>
             <a:r>
@@ -10136,7 +9811,7 @@
           <a:bodyPr wrap="square" lIns="0" tIns="0" rIns="0" bIns="0" rtlCol="0" anchor="t"/>
           <a:lstStyle/>
           <a:p>
-            <a:pPr algn="ctr" indent="0" marL="0">
+            <a:pPr marL="0" indent="0" algn="ctr">
               <a:buNone/>
             </a:pPr>
             <a:r>
@@ -10150,7 +9825,7 @@
             <a:endParaRPr lang="en-US" sz="1250" dirty="0"/>
           </a:p>
           <a:p>
-            <a:pPr algn="ctr" indent="0" marL="0">
+            <a:pPr marL="0" indent="0" algn="ctr">
               <a:buNone/>
             </a:pPr>
             <a:r>
@@ -10238,7 +9913,7 @@
           <a:bodyPr wrap="square" lIns="0" tIns="0" rIns="0" bIns="0" rtlCol="0" anchor="ctr"/>
           <a:lstStyle/>
           <a:p>
-            <a:pPr algn="ctr" indent="0" marL="0">
+            <a:pPr marL="0" indent="0" algn="ctr">
               <a:buNone/>
             </a:pPr>
             <a:r>
@@ -10274,7 +9949,7 @@
           <a:bodyPr wrap="square" lIns="0" tIns="0" rIns="0" bIns="0" rtlCol="0" anchor="t"/>
           <a:lstStyle/>
           <a:p>
-            <a:pPr algn="ctr" indent="0" marL="0">
+            <a:pPr marL="0" indent="0" algn="ctr">
               <a:buNone/>
             </a:pPr>
             <a:r>
@@ -10288,7 +9963,7 @@
             <a:endParaRPr lang="en-US" sz="1250" dirty="0"/>
           </a:p>
           <a:p>
-            <a:pPr algn="ctr" indent="0" marL="0">
+            <a:pPr marL="0" indent="0" algn="ctr">
               <a:buNone/>
             </a:pPr>
             <a:r>
@@ -10351,7 +10026,7 @@
           <a:bodyPr wrap="square" lIns="0" tIns="0" rIns="0" bIns="0" rtlCol="0" anchor="ctr"/>
           <a:lstStyle/>
           <a:p>
-            <a:pPr indent="0" marL="0">
+            <a:pPr marL="0" indent="0">
               <a:buNone/>
             </a:pPr>
             <a:r>
@@ -10362,9 +10037,6 @@
               </a:rPr>
               <a:t>Optional LLM layer  </a:t>
             </a:r>
-            <a:pPr indent="0" marL="0">
-              <a:buNone/>
-            </a:pPr>
             <a:r>
               <a:rPr lang="en-US" sz="1500" dirty="0">
                 <a:solidFill>
@@ -10379,7 +10051,7 @@
       </p:sp>
       <p:sp>
         <p:nvSpPr>
-          <p:cNvPr id="25" name="Slide Number Placeholder 0"/>
+          <p:cNvPr id="33" name="Slide Number Placeholder 0"/>
           <p:cNvSpPr>
             <a:spLocks noGrp="1"/>
           </p:cNvSpPr>
@@ -10397,7 +10069,7 @@
           </a:prstGeom>
           <a:extLst>
             <a:ext uri="{C572A759-6A51-4108-AA02-DFA0A04FC94B}">
-              <ma14:wrappingTextBoxFlag xmlns:ma14="http://schemas.microsoft.com/office/mac/drawingml/2011/main" val="0"/>
+              <ma14:wrappingTextBoxFlag xmlns:ma14="http://schemas.microsoft.com/office/mac/drawingml/2011/main" xmlns="" val="0"/>
             </a:ext>
           </a:extLst>
         </p:spPr>
@@ -10415,7 +10087,7 @@
           <a:p>
             <a:pPr algn="r"/>
             <a:fld id="{F7021451-1387-4CA6-816F-3879F97B5CBC}" type="slidenum">
-              <a:rPr b="0" lang="en-US"/>
+              <a:rPr lang="en-US" b="0"/>
               <a:t>4</a:t>
             </a:fld>
             <a:endParaRPr lang="en-US"/>
@@ -10450,9 +10122,11 @@
       <p:sp>
         <p:nvSpPr>
           <p:cNvPr id="2" name="Text 0"/>
-          <p:cNvSpPr/>
+          <p:cNvSpPr>
+            <a:spLocks noGrp="1"/>
+          </p:cNvSpPr>
           <p:nvPr>
-            <p:ph idx="100" type="body" hasCustomPrompt="1"/>
+            <p:ph type="body" idx="100" hasCustomPrompt="1"/>
           </p:nvPr>
         </p:nvSpPr>
         <p:spPr>
@@ -10470,59 +10144,18 @@
           <a:bodyPr wrap="square" lIns="0" tIns="0" rIns="0" bIns="0" rtlCol="0"/>
           <a:lstStyle/>
           <a:p>
-            <a:pPr indent="0" marL="0">
-              <a:buNone/>
-            </a:pPr>
-            <a:r>
-              <a:rPr lang="en-US" sz="1200" b="1" spc="200" kern="0" dirty="0">
+            <a:pPr marL="0" indent="0">
+              <a:buNone/>
+            </a:pPr>
+            <a:r>
+              <a:rPr lang="en-US" sz="5400" b="1" kern="0" spc="200" dirty="0">
                 <a:solidFill>
                   <a:schemeClr val="accent2"/>
                 </a:solidFill>
               </a:rPr>
               <a:t>DATA SCIENCE DEPTH</a:t>
             </a:r>
-            <a:endParaRPr lang="en-US" sz="1200" dirty="0"/>
-          </a:p>
-        </p:txBody>
-      </p:sp>
-      <p:sp>
-        <p:nvSpPr>
-          <p:cNvPr id="3" name="Text 0"/>
-          <p:cNvSpPr/>
-          <p:nvPr>
-            <p:ph idx="101" type="title" hasCustomPrompt="1"/>
-          </p:nvPr>
-        </p:nvSpPr>
-        <p:spPr>
-          <a:xfrm>
-            <a:off x="640080" y="658368"/>
-            <a:ext cx="10881360" cy="731520"/>
-          </a:xfrm>
-          <a:prstGeom prst="rect">
-            <a:avLst/>
-          </a:prstGeom>
-          <a:noFill/>
-          <a:ln/>
-        </p:spPr>
-        <p:txBody>
-          <a:bodyPr wrap="square" lIns="0" tIns="0" rIns="0" bIns="0" rtlCol="0" anchor="t"/>
-          <a:lstStyle/>
-          <a:p>
-            <a:pPr algn="l" indent="0" marL="0">
-              <a:buNone/>
-            </a:pPr>
-            <a:r>
-              <a:rPr lang="en-US" sz="3400" dirty="0">
-                <a:solidFill>
-                  <a:schemeClr val="tx2"/>
-                </a:solidFill>
-                <a:latin typeface="Cambria" pitchFamily="34" charset="0"/>
-                <a:ea typeface="Cambria" pitchFamily="34" charset="-122"/>
-                <a:cs typeface="Cambria" pitchFamily="34" charset="-120"/>
-              </a:rPr>
-              <a:t>20 data science and ML techniques in one product</a:t>
-            </a:r>
-            <a:endParaRPr lang="en-US" sz="3400" dirty="0"/>
+            <a:endParaRPr lang="en-US" sz="5400" dirty="0"/>
           </a:p>
         </p:txBody>
       </p:sp>
@@ -10574,7 +10207,7 @@
           <a:bodyPr wrap="square" lIns="0" tIns="0" rIns="0" bIns="0" rtlCol="0" anchor="ctr"/>
           <a:lstStyle/>
           <a:p>
-            <a:pPr indent="0" marL="0">
+            <a:pPr marL="0" indent="0">
               <a:buNone/>
             </a:pPr>
             <a:r>
@@ -10637,7 +10270,7 @@
           <a:bodyPr wrap="square" lIns="0" tIns="0" rIns="0" bIns="0" rtlCol="0" anchor="ctr"/>
           <a:lstStyle/>
           <a:p>
-            <a:pPr indent="0" marL="0">
+            <a:pPr marL="0" indent="0">
               <a:buNone/>
             </a:pPr>
             <a:r>
@@ -10700,7 +10333,7 @@
           <a:bodyPr wrap="square" lIns="0" tIns="0" rIns="0" bIns="0" rtlCol="0" anchor="ctr"/>
           <a:lstStyle/>
           <a:p>
-            <a:pPr indent="0" marL="0">
+            <a:pPr marL="0" indent="0">
               <a:buNone/>
             </a:pPr>
             <a:r>
@@ -10763,7 +10396,7 @@
           <a:bodyPr wrap="square" lIns="0" tIns="0" rIns="0" bIns="0" rtlCol="0" anchor="ctr"/>
           <a:lstStyle/>
           <a:p>
-            <a:pPr indent="0" marL="0">
+            <a:pPr marL="0" indent="0">
               <a:buNone/>
             </a:pPr>
             <a:r>
@@ -10826,7 +10459,7 @@
           <a:bodyPr wrap="square" lIns="0" tIns="0" rIns="0" bIns="0" rtlCol="0" anchor="ctr"/>
           <a:lstStyle/>
           <a:p>
-            <a:pPr indent="0" marL="0">
+            <a:pPr marL="0" indent="0">
               <a:buNone/>
             </a:pPr>
             <a:r>
@@ -10889,7 +10522,7 @@
           <a:bodyPr wrap="square" lIns="0" tIns="0" rIns="0" bIns="0" rtlCol="0" anchor="ctr"/>
           <a:lstStyle/>
           <a:p>
-            <a:pPr indent="0" marL="0">
+            <a:pPr marL="0" indent="0">
               <a:buNone/>
             </a:pPr>
             <a:r>
@@ -10952,7 +10585,7 @@
           <a:bodyPr wrap="square" lIns="0" tIns="0" rIns="0" bIns="0" rtlCol="0" anchor="ctr"/>
           <a:lstStyle/>
           <a:p>
-            <a:pPr indent="0" marL="0">
+            <a:pPr marL="0" indent="0">
               <a:buNone/>
             </a:pPr>
             <a:r>
@@ -11015,7 +10648,7 @@
           <a:bodyPr wrap="square" lIns="0" tIns="0" rIns="0" bIns="0" rtlCol="0" anchor="ctr"/>
           <a:lstStyle/>
           <a:p>
-            <a:pPr indent="0" marL="0">
+            <a:pPr marL="0" indent="0">
               <a:buNone/>
             </a:pPr>
             <a:r>
@@ -11078,7 +10711,7 @@
           <a:bodyPr wrap="square" lIns="0" tIns="0" rIns="0" bIns="0" rtlCol="0" anchor="ctr"/>
           <a:lstStyle/>
           <a:p>
-            <a:pPr indent="0" marL="0">
+            <a:pPr marL="0" indent="0">
               <a:buNone/>
             </a:pPr>
             <a:r>
@@ -11141,7 +10774,7 @@
           <a:bodyPr wrap="square" lIns="0" tIns="0" rIns="0" bIns="0" rtlCol="0" anchor="ctr"/>
           <a:lstStyle/>
           <a:p>
-            <a:pPr indent="0" marL="0">
+            <a:pPr marL="0" indent="0">
               <a:buNone/>
             </a:pPr>
             <a:r>
@@ -11204,7 +10837,7 @@
           <a:bodyPr wrap="square" lIns="0" tIns="0" rIns="0" bIns="0" rtlCol="0" anchor="ctr"/>
           <a:lstStyle/>
           <a:p>
-            <a:pPr indent="0" marL="0">
+            <a:pPr marL="0" indent="0">
               <a:buNone/>
             </a:pPr>
             <a:r>
@@ -11267,7 +10900,7 @@
           <a:bodyPr wrap="square" lIns="0" tIns="0" rIns="0" bIns="0" rtlCol="0" anchor="ctr"/>
           <a:lstStyle/>
           <a:p>
-            <a:pPr indent="0" marL="0">
+            <a:pPr marL="0" indent="0">
               <a:buNone/>
             </a:pPr>
             <a:r>
@@ -11330,7 +10963,7 @@
           <a:bodyPr wrap="square" lIns="0" tIns="0" rIns="0" bIns="0" rtlCol="0" anchor="ctr"/>
           <a:lstStyle/>
           <a:p>
-            <a:pPr indent="0" marL="0">
+            <a:pPr marL="0" indent="0">
               <a:buNone/>
             </a:pPr>
             <a:r>
@@ -11393,7 +11026,7 @@
           <a:bodyPr wrap="square" lIns="0" tIns="0" rIns="0" bIns="0" rtlCol="0" anchor="ctr"/>
           <a:lstStyle/>
           <a:p>
-            <a:pPr indent="0" marL="0">
+            <a:pPr marL="0" indent="0">
               <a:buNone/>
             </a:pPr>
             <a:r>
@@ -11456,7 +11089,7 @@
           <a:bodyPr wrap="square" lIns="0" tIns="0" rIns="0" bIns="0" rtlCol="0" anchor="ctr"/>
           <a:lstStyle/>
           <a:p>
-            <a:pPr indent="0" marL="0">
+            <a:pPr marL="0" indent="0">
               <a:buNone/>
             </a:pPr>
             <a:r>
@@ -11519,7 +11152,7 @@
           <a:bodyPr wrap="square" lIns="0" tIns="0" rIns="0" bIns="0" rtlCol="0" anchor="ctr"/>
           <a:lstStyle/>
           <a:p>
-            <a:pPr indent="0" marL="0">
+            <a:pPr marL="0" indent="0">
               <a:buNone/>
             </a:pPr>
             <a:r>
@@ -11582,7 +11215,7 @@
           <a:bodyPr wrap="square" lIns="0" tIns="0" rIns="0" bIns="0" rtlCol="0" anchor="ctr"/>
           <a:lstStyle/>
           <a:p>
-            <a:pPr indent="0" marL="0">
+            <a:pPr marL="0" indent="0">
               <a:buNone/>
             </a:pPr>
             <a:r>
@@ -11645,7 +11278,7 @@
           <a:bodyPr wrap="square" lIns="0" tIns="0" rIns="0" bIns="0" rtlCol="0" anchor="ctr"/>
           <a:lstStyle/>
           <a:p>
-            <a:pPr indent="0" marL="0">
+            <a:pPr marL="0" indent="0">
               <a:buNone/>
             </a:pPr>
             <a:r>
@@ -11708,7 +11341,7 @@
           <a:bodyPr wrap="square" lIns="0" tIns="0" rIns="0" bIns="0" rtlCol="0" anchor="ctr"/>
           <a:lstStyle/>
           <a:p>
-            <a:pPr indent="0" marL="0">
+            <a:pPr marL="0" indent="0">
               <a:buNone/>
             </a:pPr>
             <a:r>
@@ -11771,7 +11404,7 @@
           <a:bodyPr wrap="square" lIns="0" tIns="0" rIns="0" bIns="0" rtlCol="0" anchor="ctr"/>
           <a:lstStyle/>
           <a:p>
-            <a:pPr indent="0" marL="0">
+            <a:pPr marL="0" indent="0">
               <a:buNone/>
             </a:pPr>
             <a:r>
@@ -11834,7 +11467,7 @@
           <a:bodyPr wrap="square" lIns="0" tIns="0" rIns="0" bIns="0" rtlCol="0" anchor="ctr"/>
           <a:lstStyle/>
           <a:p>
-            <a:pPr indent="0" marL="0">
+            <a:pPr marL="0" indent="0">
               <a:buNone/>
             </a:pPr>
             <a:r>
@@ -11897,7 +11530,7 @@
           <a:bodyPr wrap="square" lIns="0" tIns="0" rIns="0" bIns="0" rtlCol="0" anchor="ctr"/>
           <a:lstStyle/>
           <a:p>
-            <a:pPr indent="0" marL="0">
+            <a:pPr marL="0" indent="0">
               <a:buNone/>
             </a:pPr>
             <a:r>
@@ -11960,7 +11593,7 @@
           <a:bodyPr wrap="square" lIns="0" tIns="0" rIns="0" bIns="0" rtlCol="0" anchor="ctr"/>
           <a:lstStyle/>
           <a:p>
-            <a:pPr indent="0" marL="0">
+            <a:pPr marL="0" indent="0">
               <a:buNone/>
             </a:pPr>
             <a:r>
@@ -12023,7 +11656,7 @@
           <a:bodyPr wrap="square" lIns="0" tIns="0" rIns="0" bIns="0" rtlCol="0" anchor="ctr"/>
           <a:lstStyle/>
           <a:p>
-            <a:pPr indent="0" marL="0">
+            <a:pPr marL="0" indent="0">
               <a:buNone/>
             </a:pPr>
             <a:r>
@@ -12059,7 +11692,7 @@
           <a:bodyPr wrap="square" lIns="0" tIns="0" rIns="0" bIns="0" rtlCol="0" anchor="ctr"/>
           <a:lstStyle/>
           <a:p>
-            <a:pPr indent="0" marL="0">
+            <a:pPr marL="0" indent="0">
               <a:buNone/>
             </a:pPr>
             <a:r>
@@ -12076,7 +11709,7 @@
       </p:sp>
       <p:sp>
         <p:nvSpPr>
-          <p:cNvPr id="25" name="Slide Number Placeholder 0"/>
+          <p:cNvPr id="53" name="Slide Number Placeholder 0"/>
           <p:cNvSpPr>
             <a:spLocks noGrp="1"/>
           </p:cNvSpPr>
@@ -12094,7 +11727,7 @@
           </a:prstGeom>
           <a:extLst>
             <a:ext uri="{C572A759-6A51-4108-AA02-DFA0A04FC94B}">
-              <ma14:wrappingTextBoxFlag xmlns:ma14="http://schemas.microsoft.com/office/mac/drawingml/2011/main" val="0"/>
+              <ma14:wrappingTextBoxFlag xmlns:ma14="http://schemas.microsoft.com/office/mac/drawingml/2011/main" xmlns="" val="0"/>
             </a:ext>
           </a:extLst>
         </p:spPr>
@@ -12112,7 +11745,7 @@
           <a:p>
             <a:pPr algn="r"/>
             <a:fld id="{F7021451-1387-4CA6-816F-3879F97B5CBC}" type="slidenum">
-              <a:rPr b="0" lang="en-US"/>
+              <a:rPr lang="en-US" b="0"/>
               <a:t>5</a:t>
             </a:fld>
             <a:endParaRPr lang="en-US"/>
@@ -12147,9 +11780,11 @@
       <p:sp>
         <p:nvSpPr>
           <p:cNvPr id="2" name="Text 0"/>
-          <p:cNvSpPr/>
+          <p:cNvSpPr>
+            <a:spLocks noGrp="1"/>
+          </p:cNvSpPr>
           <p:nvPr>
-            <p:ph idx="100" type="body" hasCustomPrompt="1"/>
+            <p:ph type="body" idx="100" hasCustomPrompt="1"/>
           </p:nvPr>
         </p:nvSpPr>
         <p:spPr>
@@ -12167,11 +11802,11 @@
           <a:bodyPr wrap="square" lIns="0" tIns="0" rIns="0" bIns="0" rtlCol="0"/>
           <a:lstStyle/>
           <a:p>
-            <a:pPr indent="0" marL="0">
-              <a:buNone/>
-            </a:pPr>
-            <a:r>
-              <a:rPr lang="en-US" sz="1200" b="1" spc="200" kern="0" dirty="0">
+            <a:pPr marL="0" indent="0">
+              <a:buNone/>
+            </a:pPr>
+            <a:r>
+              <a:rPr lang="en-US" sz="1200" b="1" kern="0" spc="200" dirty="0">
                 <a:solidFill>
                   <a:schemeClr val="accent2"/>
                 </a:solidFill>
@@ -12185,9 +11820,11 @@
       <p:sp>
         <p:nvSpPr>
           <p:cNvPr id="3" name="Text 0"/>
-          <p:cNvSpPr/>
+          <p:cNvSpPr>
+            <a:spLocks noGrp="1"/>
+          </p:cNvSpPr>
           <p:nvPr>
-            <p:ph idx="101" type="title" hasCustomPrompt="1"/>
+            <p:ph type="title" idx="101" hasCustomPrompt="1"/>
           </p:nvPr>
         </p:nvSpPr>
         <p:spPr>
@@ -12205,7 +11842,7 @@
           <a:bodyPr wrap="square" lIns="0" tIns="0" rIns="0" bIns="0" rtlCol="0" anchor="t"/>
           <a:lstStyle/>
           <a:p>
-            <a:pPr algn="l" indent="0" marL="0">
+            <a:pPr marL="0" indent="0" algn="l">
               <a:buNone/>
             </a:pPr>
             <a:r>
@@ -12271,7 +11908,7 @@
           <a:bodyPr wrap="square" lIns="0" tIns="0" rIns="0" bIns="0" rtlCol="0" anchor="ctr"/>
           <a:lstStyle/>
           <a:p>
-            <a:pPr indent="0" marL="0">
+            <a:pPr marL="0" indent="0">
               <a:buNone/>
             </a:pPr>
             <a:r>
@@ -12310,7 +11947,7 @@
           <a:bodyPr wrap="square" lIns="0" tIns="0" rIns="0" bIns="0" rtlCol="0" anchor="ctr"/>
           <a:lstStyle/>
           <a:p>
-            <a:pPr indent="0" marL="0">
+            <a:pPr marL="0" indent="0">
               <a:buNone/>
             </a:pPr>
             <a:r>
@@ -12449,7 +12086,7 @@
           <a:bodyPr wrap="square" lIns="0" tIns="0" rIns="0" bIns="0" rtlCol="0" anchor="ctr"/>
           <a:lstStyle/>
           <a:p>
-            <a:pPr indent="0" marL="0">
+            <a:pPr marL="0" indent="0">
               <a:buNone/>
             </a:pPr>
             <a:r>
@@ -12485,7 +12122,7 @@
           <a:bodyPr wrap="square" lIns="0" tIns="0" rIns="0" bIns="0" rtlCol="0" anchor="ctr"/>
           <a:lstStyle/>
           <a:p>
-            <a:pPr indent="0" marL="0">
+            <a:pPr marL="0" indent="0">
               <a:buNone/>
             </a:pPr>
             <a:r>
@@ -12521,7 +12158,7 @@
           <a:bodyPr wrap="square" lIns="0" tIns="0" rIns="0" bIns="0" rtlCol="0" anchor="ctr"/>
           <a:lstStyle/>
           <a:p>
-            <a:pPr algn="r" indent="0" marL="0">
+            <a:pPr marL="0" indent="0" algn="r">
               <a:buNone/>
             </a:pPr>
             <a:r>
@@ -12584,7 +12221,7 @@
           <a:bodyPr wrap="square" lIns="0" tIns="0" rIns="0" bIns="0" rtlCol="0" anchor="ctr"/>
           <a:lstStyle/>
           <a:p>
-            <a:pPr indent="0" marL="0">
+            <a:pPr marL="0" indent="0">
               <a:buNone/>
             </a:pPr>
             <a:r>
@@ -12620,7 +12257,7 @@
           <a:bodyPr wrap="square" lIns="0" tIns="0" rIns="0" bIns="0" rtlCol="0" anchor="ctr"/>
           <a:lstStyle/>
           <a:p>
-            <a:pPr indent="0" marL="0">
+            <a:pPr marL="0" indent="0">
               <a:buNone/>
             </a:pPr>
             <a:r>
@@ -12656,7 +12293,7 @@
           <a:bodyPr wrap="square" lIns="0" tIns="0" rIns="0" bIns="0" rtlCol="0" anchor="ctr"/>
           <a:lstStyle/>
           <a:p>
-            <a:pPr algn="r" indent="0" marL="0">
+            <a:pPr marL="0" indent="0" algn="r">
               <a:buNone/>
             </a:pPr>
             <a:r>
@@ -12719,7 +12356,7 @@
           <a:bodyPr wrap="square" lIns="0" tIns="0" rIns="0" bIns="0" rtlCol="0" anchor="ctr"/>
           <a:lstStyle/>
           <a:p>
-            <a:pPr indent="0" marL="0">
+            <a:pPr marL="0" indent="0">
               <a:buNone/>
             </a:pPr>
             <a:r>
@@ -12755,7 +12392,7 @@
           <a:bodyPr wrap="square" lIns="0" tIns="0" rIns="0" bIns="0" rtlCol="0" anchor="ctr"/>
           <a:lstStyle/>
           <a:p>
-            <a:pPr indent="0" marL="0">
+            <a:pPr marL="0" indent="0">
               <a:buNone/>
             </a:pPr>
             <a:r>
@@ -12791,7 +12428,7 @@
           <a:bodyPr wrap="square" lIns="0" tIns="0" rIns="0" bIns="0" rtlCol="0" anchor="ctr"/>
           <a:lstStyle/>
           <a:p>
-            <a:pPr algn="r" indent="0" marL="0">
+            <a:pPr marL="0" indent="0" algn="r">
               <a:buNone/>
             </a:pPr>
             <a:r>
@@ -12854,7 +12491,7 @@
           <a:bodyPr wrap="square" lIns="0" tIns="0" rIns="0" bIns="0" rtlCol="0" anchor="ctr"/>
           <a:lstStyle/>
           <a:p>
-            <a:pPr indent="0" marL="0">
+            <a:pPr marL="0" indent="0">
               <a:buNone/>
             </a:pPr>
             <a:r>
@@ -12890,7 +12527,7 @@
           <a:bodyPr wrap="square" lIns="0" tIns="0" rIns="0" bIns="0" rtlCol="0" anchor="ctr"/>
           <a:lstStyle/>
           <a:p>
-            <a:pPr indent="0" marL="0">
+            <a:pPr marL="0" indent="0">
               <a:buNone/>
             </a:pPr>
             <a:r>
@@ -12926,7 +12563,7 @@
           <a:bodyPr wrap="square" lIns="0" tIns="0" rIns="0" bIns="0" rtlCol="0" anchor="ctr"/>
           <a:lstStyle/>
           <a:p>
-            <a:pPr algn="r" indent="0" marL="0">
+            <a:pPr marL="0" indent="0" algn="r">
               <a:buNone/>
             </a:pPr>
             <a:r>
@@ -12989,7 +12626,7 @@
           <a:bodyPr wrap="square" lIns="0" tIns="0" rIns="0" bIns="0" rtlCol="0" anchor="ctr"/>
           <a:lstStyle/>
           <a:p>
-            <a:pPr indent="0" marL="0">
+            <a:pPr marL="0" indent="0">
               <a:buNone/>
             </a:pPr>
             <a:r>
@@ -13025,7 +12662,7 @@
           <a:bodyPr wrap="square" lIns="0" tIns="0" rIns="0" bIns="0" rtlCol="0" anchor="ctr"/>
           <a:lstStyle/>
           <a:p>
-            <a:pPr indent="0" marL="0">
+            <a:pPr marL="0" indent="0">
               <a:buNone/>
             </a:pPr>
             <a:r>
@@ -13061,7 +12698,7 @@
           <a:bodyPr wrap="square" lIns="0" tIns="0" rIns="0" bIns="0" rtlCol="0" anchor="ctr"/>
           <a:lstStyle/>
           <a:p>
-            <a:pPr algn="r" indent="0" marL="0">
+            <a:pPr marL="0" indent="0" algn="r">
               <a:buNone/>
             </a:pPr>
             <a:r>
@@ -13124,7 +12761,7 @@
           <a:bodyPr wrap="square" lIns="0" tIns="0" rIns="0" bIns="0" rtlCol="0" anchor="ctr"/>
           <a:lstStyle/>
           <a:p>
-            <a:pPr indent="0" marL="0">
+            <a:pPr marL="0" indent="0">
               <a:buNone/>
             </a:pPr>
             <a:r>
@@ -13160,7 +12797,7 @@
           <a:bodyPr wrap="square" lIns="0" tIns="0" rIns="0" bIns="0" rtlCol="0" anchor="ctr"/>
           <a:lstStyle/>
           <a:p>
-            <a:pPr indent="0" marL="0">
+            <a:pPr marL="0" indent="0">
               <a:buNone/>
             </a:pPr>
             <a:r>
@@ -13196,7 +12833,7 @@
           <a:bodyPr wrap="square" lIns="0" tIns="0" rIns="0" bIns="0" rtlCol="0" anchor="ctr"/>
           <a:lstStyle/>
           <a:p>
-            <a:pPr algn="r" indent="0" marL="0">
+            <a:pPr marL="0" indent="0" algn="r">
               <a:buNone/>
             </a:pPr>
             <a:r>
@@ -13259,7 +12896,7 @@
           <a:bodyPr wrap="square" lIns="0" tIns="0" rIns="0" bIns="0" rtlCol="0" anchor="ctr"/>
           <a:lstStyle/>
           <a:p>
-            <a:pPr indent="0" marL="0">
+            <a:pPr marL="0" indent="0">
               <a:buNone/>
             </a:pPr>
             <a:r>
@@ -13295,7 +12932,7 @@
           <a:bodyPr wrap="square" lIns="0" tIns="0" rIns="0" bIns="0" rtlCol="0" anchor="ctr"/>
           <a:lstStyle/>
           <a:p>
-            <a:pPr indent="0" marL="0">
+            <a:pPr marL="0" indent="0">
               <a:buNone/>
             </a:pPr>
             <a:r>
@@ -13331,7 +12968,7 @@
           <a:bodyPr wrap="square" lIns="0" tIns="0" rIns="0" bIns="0" rtlCol="0" anchor="ctr"/>
           <a:lstStyle/>
           <a:p>
-            <a:pPr algn="r" indent="0" marL="0">
+            <a:pPr marL="0" indent="0" algn="r">
               <a:buNone/>
             </a:pPr>
             <a:r>
@@ -13394,7 +13031,7 @@
           <a:bodyPr wrap="square" lIns="0" tIns="0" rIns="0" bIns="0" rtlCol="0" anchor="ctr"/>
           <a:lstStyle/>
           <a:p>
-            <a:pPr indent="0" marL="0">
+            <a:pPr marL="0" indent="0">
               <a:buNone/>
             </a:pPr>
             <a:r>
@@ -13430,7 +13067,7 @@
           <a:bodyPr wrap="square" lIns="0" tIns="0" rIns="0" bIns="0" rtlCol="0" anchor="ctr"/>
           <a:lstStyle/>
           <a:p>
-            <a:pPr indent="0" marL="0">
+            <a:pPr marL="0" indent="0">
               <a:buNone/>
             </a:pPr>
             <a:r>
@@ -13466,7 +13103,7 @@
           <a:bodyPr wrap="square" lIns="0" tIns="0" rIns="0" bIns="0" rtlCol="0" anchor="ctr"/>
           <a:lstStyle/>
           <a:p>
-            <a:pPr algn="r" indent="0" marL="0">
+            <a:pPr marL="0" indent="0" algn="r">
               <a:buNone/>
             </a:pPr>
             <a:r>
@@ -13483,7 +13120,7 @@
       </p:sp>
       <p:sp>
         <p:nvSpPr>
-          <p:cNvPr id="25" name="Slide Number Placeholder 0"/>
+          <p:cNvPr id="40" name="Slide Number Placeholder 0"/>
           <p:cNvSpPr>
             <a:spLocks noGrp="1"/>
           </p:cNvSpPr>
@@ -13501,7 +13138,7 @@
           </a:prstGeom>
           <a:extLst>
             <a:ext uri="{C572A759-6A51-4108-AA02-DFA0A04FC94B}">
-              <ma14:wrappingTextBoxFlag xmlns:ma14="http://schemas.microsoft.com/office/mac/drawingml/2011/main" val="0"/>
+              <ma14:wrappingTextBoxFlag xmlns:ma14="http://schemas.microsoft.com/office/mac/drawingml/2011/main" xmlns="" val="0"/>
             </a:ext>
           </a:extLst>
         </p:spPr>
@@ -13519,7 +13156,7 @@
           <a:p>
             <a:pPr algn="r"/>
             <a:fld id="{F7021451-1387-4CA6-816F-3879F97B5CBC}" type="slidenum">
-              <a:rPr b="0" lang="en-US"/>
+              <a:rPr lang="en-US" b="0"/>
               <a:t>6</a:t>
             </a:fld>
             <a:endParaRPr lang="en-US"/>
@@ -13554,9 +13191,11 @@
       <p:sp>
         <p:nvSpPr>
           <p:cNvPr id="2" name="Text 0"/>
-          <p:cNvSpPr/>
+          <p:cNvSpPr>
+            <a:spLocks noGrp="1"/>
+          </p:cNvSpPr>
           <p:nvPr>
-            <p:ph idx="100" type="body" hasCustomPrompt="1"/>
+            <p:ph type="body" idx="100" hasCustomPrompt="1"/>
           </p:nvPr>
         </p:nvSpPr>
         <p:spPr>
@@ -13574,11 +13213,11 @@
           <a:bodyPr wrap="square" lIns="0" tIns="0" rIns="0" bIns="0" rtlCol="0"/>
           <a:lstStyle/>
           <a:p>
-            <a:pPr indent="0" marL="0">
-              <a:buNone/>
-            </a:pPr>
-            <a:r>
-              <a:rPr lang="en-US" sz="1200" b="1" spc="200" kern="0" dirty="0">
+            <a:pPr marL="0" indent="0">
+              <a:buNone/>
+            </a:pPr>
+            <a:r>
+              <a:rPr lang="en-US" sz="1200" b="1" kern="0" spc="200" dirty="0">
                 <a:solidFill>
                   <a:schemeClr val="accent2"/>
                 </a:solidFill>
@@ -13592,9 +13231,11 @@
       <p:sp>
         <p:nvSpPr>
           <p:cNvPr id="3" name="Text 0"/>
-          <p:cNvSpPr/>
+          <p:cNvSpPr>
+            <a:spLocks noGrp="1"/>
+          </p:cNvSpPr>
           <p:nvPr>
-            <p:ph idx="101" type="title" hasCustomPrompt="1"/>
+            <p:ph type="title" idx="101" hasCustomPrompt="1"/>
           </p:nvPr>
         </p:nvSpPr>
         <p:spPr>
@@ -13612,7 +13253,7 @@
           <a:bodyPr wrap="square" lIns="0" tIns="0" rIns="0" bIns="0" rtlCol="0" anchor="t"/>
           <a:lstStyle/>
           <a:p>
-            <a:pPr algn="l" indent="0" marL="0">
+            <a:pPr marL="0" indent="0" algn="l">
               <a:buNone/>
             </a:pPr>
             <a:r>
@@ -13632,7 +13273,7 @@
       </p:sp>
       <p:graphicFrame>
         <p:nvGraphicFramePr>
-          <p:cNvPr id="4" name="ner f1 chart" descr=""/>
+          <p:cNvPr id="4" name="ner f1 chart"/>
           <p:cNvGraphicFramePr/>
           <p:nvPr/>
         </p:nvGraphicFramePr>
@@ -13640,9 +13281,9 @@
           <a:off x="640080" y="1645920"/>
           <a:ext cx="6766560" cy="4297680"/>
         </p:xfrm>
-        <a:graphic xmlns:a="http://schemas.openxmlformats.org/drawingml/2006/main">
+        <a:graphic>
           <a:graphicData uri="http://schemas.openxmlformats.org/drawingml/2006/chart">
-            <c:chart xmlns:c="http://schemas.openxmlformats.org/drawingml/2006/chart" r:id="rId1"/>
+            <c:chart xmlns:c="http://schemas.openxmlformats.org/drawingml/2006/chart" xmlns:r="http://schemas.openxmlformats.org/officeDocument/2006/relationships" r:id="rId3"/>
           </a:graphicData>
         </a:graphic>
       </p:graphicFrame>
@@ -13667,7 +13308,7 @@
           <a:bodyPr wrap="square" lIns="0" tIns="0" rIns="0" bIns="0" rtlCol="0" anchor="ctr"/>
           <a:lstStyle/>
           <a:p>
-            <a:pPr indent="0" marL="0">
+            <a:pPr marL="0" indent="0">
               <a:buNone/>
             </a:pPr>
             <a:r>
@@ -13706,7 +13347,7 @@
           <a:bodyPr wrap="square" lIns="0" tIns="0" rIns="0" bIns="0" rtlCol="0" anchor="ctr"/>
           <a:lstStyle/>
           <a:p>
-            <a:pPr indent="0" marL="0">
+            <a:pPr marL="0" indent="0">
               <a:buNone/>
             </a:pPr>
             <a:r>
@@ -13742,7 +13383,7 @@
           <a:bodyPr wrap="square" lIns="0" tIns="0" rIns="0" bIns="0" rtlCol="0" anchor="ctr"/>
           <a:lstStyle/>
           <a:p>
-            <a:pPr indent="0" marL="0">
+            <a:pPr marL="0" indent="0">
               <a:buNone/>
             </a:pPr>
             <a:r>
@@ -13781,7 +13422,7 @@
           <a:bodyPr wrap="square" lIns="0" tIns="0" rIns="0" bIns="0" rtlCol="0" anchor="ctr"/>
           <a:lstStyle/>
           <a:p>
-            <a:pPr indent="0" marL="0">
+            <a:pPr marL="0" indent="0">
               <a:buNone/>
             </a:pPr>
             <a:r>
@@ -13817,7 +13458,7 @@
           <a:bodyPr wrap="square" lIns="0" tIns="0" rIns="0" bIns="0" rtlCol="0" anchor="ctr"/>
           <a:lstStyle/>
           <a:p>
-            <a:pPr indent="0" marL="0">
+            <a:pPr marL="0" indent="0">
               <a:buNone/>
             </a:pPr>
             <a:r>
@@ -13852,7 +13493,7 @@
           </a:prstGeom>
           <a:extLst>
             <a:ext uri="{C572A759-6A51-4108-AA02-DFA0A04FC94B}">
-              <ma14:wrappingTextBoxFlag xmlns:ma14="http://schemas.microsoft.com/office/mac/drawingml/2011/main" val="0"/>
+              <ma14:wrappingTextBoxFlag xmlns:ma14="http://schemas.microsoft.com/office/mac/drawingml/2011/main" xmlns="" val="0"/>
             </a:ext>
           </a:extLst>
         </p:spPr>
@@ -13870,7 +13511,7 @@
           <a:p>
             <a:pPr algn="r"/>
             <a:fld id="{F7021451-1387-4CA6-816F-3879F97B5CBC}" type="slidenum">
-              <a:rPr b="0" lang="en-US"/>
+              <a:rPr lang="en-US" b="0"/>
               <a:t>7</a:t>
             </a:fld>
             <a:endParaRPr lang="en-US"/>
@@ -13905,9 +13546,11 @@
       <p:sp>
         <p:nvSpPr>
           <p:cNvPr id="2" name="Text 0"/>
-          <p:cNvSpPr/>
+          <p:cNvSpPr>
+            <a:spLocks noGrp="1"/>
+          </p:cNvSpPr>
           <p:nvPr>
-            <p:ph idx="100" type="body" hasCustomPrompt="1"/>
+            <p:ph type="body" idx="100" hasCustomPrompt="1"/>
           </p:nvPr>
         </p:nvSpPr>
         <p:spPr>
@@ -13925,11 +13568,11 @@
           <a:bodyPr wrap="square" lIns="0" tIns="0" rIns="0" bIns="0" rtlCol="0"/>
           <a:lstStyle/>
           <a:p>
-            <a:pPr indent="0" marL="0">
-              <a:buNone/>
-            </a:pPr>
-            <a:r>
-              <a:rPr lang="en-US" sz="1200" b="1" spc="200" kern="0" dirty="0">
+            <a:pPr marL="0" indent="0">
+              <a:buNone/>
+            </a:pPr>
+            <a:r>
+              <a:rPr lang="en-US" sz="1200" b="1" kern="0" spc="200" dirty="0">
                 <a:solidFill>
                   <a:schemeClr val="accent2"/>
                 </a:solidFill>
@@ -13943,9 +13586,11 @@
       <p:sp>
         <p:nvSpPr>
           <p:cNvPr id="3" name="Text 0"/>
-          <p:cNvSpPr/>
+          <p:cNvSpPr>
+            <a:spLocks noGrp="1"/>
+          </p:cNvSpPr>
           <p:nvPr>
-            <p:ph idx="101" type="title" hasCustomPrompt="1"/>
+            <p:ph type="title" idx="101" hasCustomPrompt="1"/>
           </p:nvPr>
         </p:nvSpPr>
         <p:spPr>
@@ -13963,7 +13608,7 @@
           <a:bodyPr wrap="square" lIns="0" tIns="0" rIns="0" bIns="0" rtlCol="0" anchor="t"/>
           <a:lstStyle/>
           <a:p>
-            <a:pPr algn="l" indent="0" marL="0">
+            <a:pPr marL="0" indent="0" algn="l">
               <a:buNone/>
             </a:pPr>
             <a:r>
@@ -14002,7 +13647,7 @@
           <a:bodyPr wrap="square" lIns="0" tIns="0" rIns="0" bIns="0" rtlCol="0" anchor="ctr"/>
           <a:lstStyle/>
           <a:p>
-            <a:pPr indent="0" marL="0">
+            <a:pPr marL="0" indent="0">
               <a:buNone/>
             </a:pPr>
             <a:r>
@@ -14041,7 +13686,7 @@
           <a:bodyPr wrap="square" lIns="0" tIns="0" rIns="0" bIns="0" rtlCol="0" anchor="ctr"/>
           <a:lstStyle/>
           <a:p>
-            <a:pPr indent="0" marL="0">
+            <a:pPr marL="0" indent="0">
               <a:buNone/>
             </a:pPr>
             <a:r>
@@ -14077,7 +13722,7 @@
           <a:bodyPr wrap="square" lIns="0" tIns="0" rIns="0" bIns="0" rtlCol="0" anchor="ctr"/>
           <a:lstStyle/>
           <a:p>
-            <a:pPr indent="0" marL="0">
+            <a:pPr marL="0" indent="0">
               <a:buNone/>
             </a:pPr>
             <a:r>
@@ -14116,7 +13761,7 @@
           <a:bodyPr wrap="square" lIns="0" tIns="0" rIns="0" bIns="0" rtlCol="0" anchor="ctr"/>
           <a:lstStyle/>
           <a:p>
-            <a:pPr indent="0" marL="0">
+            <a:pPr marL="0" indent="0">
               <a:buNone/>
             </a:pPr>
             <a:r>
@@ -14133,7 +13778,7 @@
       </p:sp>
       <p:graphicFrame>
         <p:nvGraphicFramePr>
-          <p:cNvPr id="8" name="ece chart" descr=""/>
+          <p:cNvPr id="8" name="ece chart"/>
           <p:cNvGraphicFramePr/>
           <p:nvPr/>
         </p:nvGraphicFramePr>
@@ -14141,9 +13786,9 @@
           <a:off x="4389120" y="1645920"/>
           <a:ext cx="3657600" cy="4114800"/>
         </p:xfrm>
-        <a:graphic xmlns:a="http://schemas.openxmlformats.org/drawingml/2006/main">
+        <a:graphic>
           <a:graphicData uri="http://schemas.openxmlformats.org/drawingml/2006/chart">
-            <c:chart xmlns:c="http://schemas.openxmlformats.org/drawingml/2006/chart" r:id="rId1"/>
+            <c:chart xmlns:c="http://schemas.openxmlformats.org/drawingml/2006/chart" xmlns:r="http://schemas.openxmlformats.org/officeDocument/2006/relationships" r:id="rId3"/>
           </a:graphicData>
         </a:graphic>
       </p:graphicFrame>
@@ -14195,7 +13840,7 @@
           <a:bodyPr wrap="square" lIns="0" tIns="0" rIns="0" bIns="0" rtlCol="0" anchor="ctr"/>
           <a:lstStyle/>
           <a:p>
-            <a:pPr indent="0" marL="0">
+            <a:pPr marL="0" indent="0">
               <a:buNone/>
             </a:pPr>
             <a:r>
@@ -14231,7 +13876,7 @@
           <a:bodyPr wrap="square" lIns="0" tIns="0" rIns="0" bIns="0" rtlCol="0" anchor="ctr"/>
           <a:lstStyle/>
           <a:p>
-            <a:pPr indent="0" marL="0">
+            <a:pPr marL="0" indent="0">
               <a:buNone/>
             </a:pPr>
             <a:r>
@@ -14292,7 +13937,7 @@
           <a:bodyPr wrap="square" lIns="0" tIns="0" rIns="0" bIns="0" rtlCol="0" anchor="ctr"/>
           <a:lstStyle/>
           <a:p>
-            <a:pPr indent="0" marL="0">
+            <a:pPr marL="0" indent="0">
               <a:buNone/>
             </a:pPr>
             <a:r>
@@ -14353,7 +13998,7 @@
           <a:bodyPr wrap="square" lIns="0" tIns="0" rIns="0" bIns="0" rtlCol="0" anchor="ctr"/>
           <a:lstStyle/>
           <a:p>
-            <a:pPr indent="0" marL="0">
+            <a:pPr marL="0" indent="0">
               <a:buNone/>
             </a:pPr>
             <a:r>
@@ -14414,7 +14059,7 @@
           <a:bodyPr wrap="square" lIns="0" tIns="0" rIns="0" bIns="0" rtlCol="0" anchor="ctr"/>
           <a:lstStyle/>
           <a:p>
-            <a:pPr indent="0" marL="0">
+            <a:pPr marL="0" indent="0">
               <a:buNone/>
             </a:pPr>
             <a:r>
@@ -14475,7 +14120,7 @@
           <a:bodyPr wrap="square" lIns="0" tIns="0" rIns="0" bIns="0" rtlCol="0" anchor="ctr"/>
           <a:lstStyle/>
           <a:p>
-            <a:pPr indent="0" marL="0">
+            <a:pPr marL="0" indent="0">
               <a:buNone/>
             </a:pPr>
             <a:r>
@@ -14536,7 +14181,7 @@
           <a:bodyPr wrap="square" lIns="0" tIns="0" rIns="0" bIns="0" rtlCol="0" anchor="ctr"/>
           <a:lstStyle/>
           <a:p>
-            <a:pPr indent="0" marL="0">
+            <a:pPr marL="0" indent="0">
               <a:buNone/>
             </a:pPr>
             <a:r>
@@ -14571,7 +14216,7 @@
           </a:prstGeom>
           <a:extLst>
             <a:ext uri="{C572A759-6A51-4108-AA02-DFA0A04FC94B}">
-              <ma14:wrappingTextBoxFlag xmlns:ma14="http://schemas.microsoft.com/office/mac/drawingml/2011/main" val="0"/>
+              <ma14:wrappingTextBoxFlag xmlns:ma14="http://schemas.microsoft.com/office/mac/drawingml/2011/main" xmlns="" val="0"/>
             </a:ext>
           </a:extLst>
         </p:spPr>
@@ -14589,7 +14234,7 @@
           <a:p>
             <a:pPr algn="r"/>
             <a:fld id="{F7021451-1387-4CA6-816F-3879F97B5CBC}" type="slidenum">
-              <a:rPr b="0" lang="en-US"/>
+              <a:rPr lang="en-US" b="0"/>
               <a:t>8</a:t>
             </a:fld>
             <a:endParaRPr lang="en-US"/>
@@ -14624,9 +14269,11 @@
       <p:sp>
         <p:nvSpPr>
           <p:cNvPr id="2" name="Text 0"/>
-          <p:cNvSpPr/>
+          <p:cNvSpPr>
+            <a:spLocks noGrp="1"/>
+          </p:cNvSpPr>
           <p:nvPr>
-            <p:ph idx="100" type="body" hasCustomPrompt="1"/>
+            <p:ph type="body" idx="100" hasCustomPrompt="1"/>
           </p:nvPr>
         </p:nvSpPr>
         <p:spPr>
@@ -14644,11 +14291,11 @@
           <a:bodyPr wrap="square" lIns="0" tIns="0" rIns="0" bIns="0" rtlCol="0"/>
           <a:lstStyle/>
           <a:p>
-            <a:pPr indent="0" marL="0">
-              <a:buNone/>
-            </a:pPr>
-            <a:r>
-              <a:rPr lang="en-US" sz="1200" b="1" spc="200" kern="0" dirty="0">
+            <a:pPr marL="0" indent="0">
+              <a:buNone/>
+            </a:pPr>
+            <a:r>
+              <a:rPr lang="en-US" sz="1200" b="1" kern="0" spc="200" dirty="0">
                 <a:solidFill>
                   <a:schemeClr val="accent2"/>
                 </a:solidFill>
@@ -14662,9 +14309,11 @@
       <p:sp>
         <p:nvSpPr>
           <p:cNvPr id="3" name="Text 0"/>
-          <p:cNvSpPr/>
+          <p:cNvSpPr>
+            <a:spLocks noGrp="1"/>
+          </p:cNvSpPr>
           <p:nvPr>
-            <p:ph idx="101" type="title" hasCustomPrompt="1"/>
+            <p:ph type="title" idx="101" hasCustomPrompt="1"/>
           </p:nvPr>
         </p:nvSpPr>
         <p:spPr>
@@ -14682,7 +14331,7 @@
           <a:bodyPr wrap="square" lIns="0" tIns="0" rIns="0" bIns="0" rtlCol="0" anchor="t"/>
           <a:lstStyle/>
           <a:p>
-            <a:pPr algn="l" indent="0" marL="0">
+            <a:pPr marL="0" indent="0" algn="l">
               <a:buNone/>
             </a:pPr>
             <a:r>
@@ -14721,7 +14370,7 @@
           <a:bodyPr wrap="square" lIns="0" tIns="0" rIns="0" bIns="0" rtlCol="0" anchor="ctr"/>
           <a:lstStyle/>
           <a:p>
-            <a:pPr algn="ctr" indent="0" marL="0">
+            <a:pPr marL="0" indent="0" algn="ctr">
               <a:buNone/>
             </a:pPr>
             <a:r>
@@ -14757,7 +14406,7 @@
           <a:bodyPr wrap="square" lIns="0" tIns="0" rIns="0" bIns="0" rtlCol="0" anchor="ctr"/>
           <a:lstStyle/>
           <a:p>
-            <a:pPr indent="0" marL="0">
+            <a:pPr marL="0" indent="0">
               <a:buNone/>
             </a:pPr>
             <a:r>
@@ -14793,7 +14442,7 @@
           <a:bodyPr wrap="square" lIns="0" tIns="0" rIns="0" bIns="0" rtlCol="0" anchor="ctr"/>
           <a:lstStyle/>
           <a:p>
-            <a:pPr algn="ctr" indent="0" marL="0">
+            <a:pPr marL="0" indent="0" algn="ctr">
               <a:buNone/>
             </a:pPr>
             <a:r>
@@ -14829,7 +14478,7 @@
           <a:bodyPr wrap="square" lIns="0" tIns="0" rIns="0" bIns="0" rtlCol="0" anchor="ctr"/>
           <a:lstStyle/>
           <a:p>
-            <a:pPr algn="ctr" indent="0" marL="0">
+            <a:pPr marL="0" indent="0" algn="ctr">
               <a:buNone/>
             </a:pPr>
             <a:r>
@@ -14865,7 +14514,7 @@
           <a:bodyPr wrap="square" lIns="0" tIns="0" rIns="0" bIns="0" rtlCol="0" anchor="ctr"/>
           <a:lstStyle/>
           <a:p>
-            <a:pPr algn="ctr" indent="0" marL="0">
+            <a:pPr marL="0" indent="0" algn="ctr">
               <a:buNone/>
             </a:pPr>
             <a:r>
@@ -14901,7 +14550,7 @@
           <a:bodyPr wrap="square" lIns="0" tIns="0" rIns="0" bIns="0" rtlCol="0" anchor="ctr"/>
           <a:lstStyle/>
           <a:p>
-            <a:pPr algn="ctr" indent="0" marL="0">
+            <a:pPr marL="0" indent="0" algn="ctr">
               <a:buNone/>
             </a:pPr>
             <a:r>
@@ -14937,7 +14586,7 @@
           <a:bodyPr wrap="square" lIns="0" tIns="0" rIns="0" bIns="0" rtlCol="0" anchor="ctr"/>
           <a:lstStyle/>
           <a:p>
-            <a:pPr algn="r" indent="0" marL="0">
+            <a:pPr marL="0" indent="0" algn="r">
               <a:buNone/>
             </a:pPr>
             <a:r>
@@ -15000,7 +14649,7 @@
           <a:bodyPr wrap="square" lIns="0" tIns="0" rIns="0" bIns="0" rtlCol="0" anchor="ctr"/>
           <a:lstStyle/>
           <a:p>
-            <a:pPr algn="ctr" indent="0" marL="0">
+            <a:pPr marL="0" indent="0" algn="ctr">
               <a:buNone/>
             </a:pPr>
             <a:r>
@@ -15014,7 +14663,7 @@
             <a:endParaRPr lang="en-US" sz="1300" dirty="0"/>
           </a:p>
           <a:p>
-            <a:pPr algn="ctr" indent="0" marL="0">
+            <a:pPr marL="0" indent="0" algn="ctr">
               <a:buNone/>
             </a:pPr>
             <a:r>
@@ -15077,7 +14726,7 @@
           <a:bodyPr wrap="square" lIns="0" tIns="0" rIns="0" bIns="0" rtlCol="0" anchor="ctr"/>
           <a:lstStyle/>
           <a:p>
-            <a:pPr algn="ctr" indent="0" marL="0">
+            <a:pPr marL="0" indent="0" algn="ctr">
               <a:buNone/>
             </a:pPr>
             <a:r>
@@ -15091,7 +14740,7 @@
             <a:endParaRPr lang="en-US" sz="1300" dirty="0"/>
           </a:p>
           <a:p>
-            <a:pPr algn="ctr" indent="0" marL="0">
+            <a:pPr marL="0" indent="0" algn="ctr">
               <a:buNone/>
             </a:pPr>
             <a:r>
@@ -15154,7 +14803,7 @@
           <a:bodyPr wrap="square" lIns="0" tIns="0" rIns="0" bIns="0" rtlCol="0" anchor="ctr"/>
           <a:lstStyle/>
           <a:p>
-            <a:pPr algn="ctr" indent="0" marL="0">
+            <a:pPr marL="0" indent="0" algn="ctr">
               <a:buNone/>
             </a:pPr>
             <a:r>
@@ -15168,7 +14817,7 @@
             <a:endParaRPr lang="en-US" sz="1300" dirty="0"/>
           </a:p>
           <a:p>
-            <a:pPr algn="ctr" indent="0" marL="0">
+            <a:pPr marL="0" indent="0" algn="ctr">
               <a:buNone/>
             </a:pPr>
             <a:r>
@@ -15231,7 +14880,7 @@
           <a:bodyPr wrap="square" lIns="0" tIns="0" rIns="0" bIns="0" rtlCol="0" anchor="ctr"/>
           <a:lstStyle/>
           <a:p>
-            <a:pPr algn="ctr" indent="0" marL="0">
+            <a:pPr marL="0" indent="0" algn="ctr">
               <a:buNone/>
             </a:pPr>
             <a:r>
@@ -15245,7 +14894,7 @@
             <a:endParaRPr lang="en-US" sz="1300" dirty="0"/>
           </a:p>
           <a:p>
-            <a:pPr algn="ctr" indent="0" marL="0">
+            <a:pPr marL="0" indent="0" algn="ctr">
               <a:buNone/>
             </a:pPr>
             <a:r>
@@ -15281,7 +14930,7 @@
           <a:bodyPr wrap="square" lIns="0" tIns="0" rIns="0" bIns="0" rtlCol="0" anchor="ctr"/>
           <a:lstStyle/>
           <a:p>
-            <a:pPr algn="r" indent="0" marL="0">
+            <a:pPr marL="0" indent="0" algn="r">
               <a:buNone/>
             </a:pPr>
             <a:r>
@@ -15344,7 +14993,7 @@
           <a:bodyPr wrap="square" lIns="0" tIns="0" rIns="0" bIns="0" rtlCol="0" anchor="ctr"/>
           <a:lstStyle/>
           <a:p>
-            <a:pPr algn="ctr" indent="0" marL="0">
+            <a:pPr marL="0" indent="0" algn="ctr">
               <a:buNone/>
             </a:pPr>
             <a:r>
@@ -15358,7 +15007,7 @@
             <a:endParaRPr lang="en-US" sz="1300" dirty="0"/>
           </a:p>
           <a:p>
-            <a:pPr algn="ctr" indent="0" marL="0">
+            <a:pPr marL="0" indent="0" algn="ctr">
               <a:buNone/>
             </a:pPr>
             <a:r>
@@ -15421,7 +15070,7 @@
           <a:bodyPr wrap="square" lIns="0" tIns="0" rIns="0" bIns="0" rtlCol="0" anchor="ctr"/>
           <a:lstStyle/>
           <a:p>
-            <a:pPr algn="ctr" indent="0" marL="0">
+            <a:pPr marL="0" indent="0" algn="ctr">
               <a:buNone/>
             </a:pPr>
             <a:r>
@@ -15435,7 +15084,7 @@
             <a:endParaRPr lang="en-US" sz="1300" dirty="0"/>
           </a:p>
           <a:p>
-            <a:pPr algn="ctr" indent="0" marL="0">
+            <a:pPr marL="0" indent="0" algn="ctr">
               <a:buNone/>
             </a:pPr>
             <a:r>
@@ -15498,7 +15147,7 @@
           <a:bodyPr wrap="square" lIns="0" tIns="0" rIns="0" bIns="0" rtlCol="0" anchor="ctr"/>
           <a:lstStyle/>
           <a:p>
-            <a:pPr algn="ctr" indent="0" marL="0">
+            <a:pPr marL="0" indent="0" algn="ctr">
               <a:buNone/>
             </a:pPr>
             <a:r>
@@ -15512,7 +15161,7 @@
             <a:endParaRPr lang="en-US" sz="1300" dirty="0"/>
           </a:p>
           <a:p>
-            <a:pPr algn="ctr" indent="0" marL="0">
+            <a:pPr marL="0" indent="0" algn="ctr">
               <a:buNone/>
             </a:pPr>
             <a:r>
@@ -15575,7 +15224,7 @@
           <a:bodyPr wrap="square" lIns="0" tIns="0" rIns="0" bIns="0" rtlCol="0" anchor="ctr"/>
           <a:lstStyle/>
           <a:p>
-            <a:pPr algn="ctr" indent="0" marL="0">
+            <a:pPr marL="0" indent="0" algn="ctr">
               <a:buNone/>
             </a:pPr>
             <a:r>
@@ -15589,7 +15238,7 @@
             <a:endParaRPr lang="en-US" sz="1300" dirty="0"/>
           </a:p>
           <a:p>
-            <a:pPr algn="ctr" indent="0" marL="0">
+            <a:pPr marL="0" indent="0" algn="ctr">
               <a:buNone/>
             </a:pPr>
             <a:r>
@@ -15625,7 +15274,7 @@
           <a:bodyPr wrap="square" lIns="0" tIns="0" rIns="0" bIns="0" rtlCol="0" anchor="ctr"/>
           <a:lstStyle/>
           <a:p>
-            <a:pPr algn="r" indent="0" marL="0">
+            <a:pPr marL="0" indent="0" algn="r">
               <a:buNone/>
             </a:pPr>
             <a:r>
@@ -15688,7 +15337,7 @@
           <a:bodyPr wrap="square" lIns="0" tIns="0" rIns="0" bIns="0" rtlCol="0" anchor="ctr"/>
           <a:lstStyle/>
           <a:p>
-            <a:pPr algn="ctr" indent="0" marL="0">
+            <a:pPr marL="0" indent="0" algn="ctr">
               <a:buNone/>
             </a:pPr>
             <a:r>
@@ -15702,7 +15351,7 @@
             <a:endParaRPr lang="en-US" sz="1300" dirty="0"/>
           </a:p>
           <a:p>
-            <a:pPr algn="ctr" indent="0" marL="0">
+            <a:pPr marL="0" indent="0" algn="ctr">
               <a:buNone/>
             </a:pPr>
             <a:r>
@@ -15765,7 +15414,7 @@
           <a:bodyPr wrap="square" lIns="0" tIns="0" rIns="0" bIns="0" rtlCol="0" anchor="ctr"/>
           <a:lstStyle/>
           <a:p>
-            <a:pPr algn="ctr" indent="0" marL="0">
+            <a:pPr marL="0" indent="0" algn="ctr">
               <a:buNone/>
             </a:pPr>
             <a:r>
@@ -15779,7 +15428,7 @@
             <a:endParaRPr lang="en-US" sz="1300" dirty="0"/>
           </a:p>
           <a:p>
-            <a:pPr algn="ctr" indent="0" marL="0">
+            <a:pPr marL="0" indent="0" algn="ctr">
               <a:buNone/>
             </a:pPr>
             <a:r>
@@ -15842,7 +15491,7 @@
           <a:bodyPr wrap="square" lIns="0" tIns="0" rIns="0" bIns="0" rtlCol="0" anchor="ctr"/>
           <a:lstStyle/>
           <a:p>
-            <a:pPr algn="ctr" indent="0" marL="0">
+            <a:pPr marL="0" indent="0" algn="ctr">
               <a:buNone/>
             </a:pPr>
             <a:r>
@@ -15856,7 +15505,7 @@
             <a:endParaRPr lang="en-US" sz="1300" dirty="0"/>
           </a:p>
           <a:p>
-            <a:pPr algn="ctr" indent="0" marL="0">
+            <a:pPr marL="0" indent="0" algn="ctr">
               <a:buNone/>
             </a:pPr>
             <a:r>
@@ -15919,7 +15568,7 @@
           <a:bodyPr wrap="square" lIns="0" tIns="0" rIns="0" bIns="0" rtlCol="0" anchor="ctr"/>
           <a:lstStyle/>
           <a:p>
-            <a:pPr algn="ctr" indent="0" marL="0">
+            <a:pPr marL="0" indent="0" algn="ctr">
               <a:buNone/>
             </a:pPr>
             <a:r>
@@ -15933,7 +15582,7 @@
             <a:endParaRPr lang="en-US" sz="1300" dirty="0"/>
           </a:p>
           <a:p>
-            <a:pPr algn="ctr" indent="0" marL="0">
+            <a:pPr marL="0" indent="0" algn="ctr">
               <a:buNone/>
             </a:pPr>
             <a:r>
@@ -15969,7 +15618,7 @@
           <a:bodyPr wrap="square" lIns="0" tIns="0" rIns="0" bIns="0" rtlCol="0" anchor="ctr"/>
           <a:lstStyle/>
           <a:p>
-            <a:pPr algn="r" indent="0" marL="0">
+            <a:pPr marL="0" indent="0" algn="r">
               <a:buNone/>
             </a:pPr>
             <a:r>
@@ -16032,7 +15681,7 @@
           <a:bodyPr wrap="square" lIns="0" tIns="0" rIns="0" bIns="0" rtlCol="0" anchor="ctr"/>
           <a:lstStyle/>
           <a:p>
-            <a:pPr algn="ctr" indent="0" marL="0">
+            <a:pPr marL="0" indent="0" algn="ctr">
               <a:buNone/>
             </a:pPr>
             <a:r>
@@ -16046,7 +15695,7 @@
             <a:endParaRPr lang="en-US" sz="1300" dirty="0"/>
           </a:p>
           <a:p>
-            <a:pPr algn="ctr" indent="0" marL="0">
+            <a:pPr marL="0" indent="0" algn="ctr">
               <a:buNone/>
             </a:pPr>
             <a:r>
@@ -16109,7 +15758,7 @@
           <a:bodyPr wrap="square" lIns="0" tIns="0" rIns="0" bIns="0" rtlCol="0" anchor="ctr"/>
           <a:lstStyle/>
           <a:p>
-            <a:pPr algn="ctr" indent="0" marL="0">
+            <a:pPr marL="0" indent="0" algn="ctr">
               <a:buNone/>
             </a:pPr>
             <a:r>
@@ -16123,7 +15772,7 @@
             <a:endParaRPr lang="en-US" sz="1300" dirty="0"/>
           </a:p>
           <a:p>
-            <a:pPr algn="ctr" indent="0" marL="0">
+            <a:pPr marL="0" indent="0" algn="ctr">
               <a:buNone/>
             </a:pPr>
             <a:r>
@@ -16186,7 +15835,7 @@
           <a:bodyPr wrap="square" lIns="0" tIns="0" rIns="0" bIns="0" rtlCol="0" anchor="ctr"/>
           <a:lstStyle/>
           <a:p>
-            <a:pPr algn="ctr" indent="0" marL="0">
+            <a:pPr marL="0" indent="0" algn="ctr">
               <a:buNone/>
             </a:pPr>
             <a:r>
@@ -16200,7 +15849,7 @@
             <a:endParaRPr lang="en-US" sz="1300" dirty="0"/>
           </a:p>
           <a:p>
-            <a:pPr algn="ctr" indent="0" marL="0">
+            <a:pPr marL="0" indent="0" algn="ctr">
               <a:buNone/>
             </a:pPr>
             <a:r>
@@ -16263,7 +15912,7 @@
           <a:bodyPr wrap="square" lIns="0" tIns="0" rIns="0" bIns="0" rtlCol="0" anchor="ctr"/>
           <a:lstStyle/>
           <a:p>
-            <a:pPr algn="ctr" indent="0" marL="0">
+            <a:pPr marL="0" indent="0" algn="ctr">
               <a:buNone/>
             </a:pPr>
             <a:r>
@@ -16277,7 +15926,7 @@
             <a:endParaRPr lang="en-US" sz="1300" dirty="0"/>
           </a:p>
           <a:p>
-            <a:pPr algn="ctr" indent="0" marL="0">
+            <a:pPr marL="0" indent="0" algn="ctr">
               <a:buNone/>
             </a:pPr>
             <a:r>
@@ -16313,7 +15962,7 @@
           <a:bodyPr wrap="square" lIns="0" tIns="0" rIns="0" bIns="0" rtlCol="0" anchor="ctr"/>
           <a:lstStyle/>
           <a:p>
-            <a:pPr indent="0" marL="0">
+            <a:pPr marL="0" indent="0">
               <a:buNone/>
             </a:pPr>
             <a:r>
@@ -16330,7 +15979,7 @@
       </p:sp>
       <p:graphicFrame>
         <p:nvGraphicFramePr>
-          <p:cNvPr id="47" name="reliability chart" descr=""/>
+          <p:cNvPr id="47" name="reliability chart"/>
           <p:cNvGraphicFramePr/>
           <p:nvPr/>
         </p:nvGraphicFramePr>
@@ -16338,9 +15987,9 @@
           <a:off x="5943600" y="1600200"/>
           <a:ext cx="5669280" cy="3749040"/>
         </p:xfrm>
-        <a:graphic xmlns:a="http://schemas.openxmlformats.org/drawingml/2006/main">
+        <a:graphic>
           <a:graphicData uri="http://schemas.openxmlformats.org/drawingml/2006/chart">
-            <c:chart xmlns:c="http://schemas.openxmlformats.org/drawingml/2006/chart" r:id="rId1"/>
+            <c:chart xmlns:c="http://schemas.openxmlformats.org/drawingml/2006/chart" xmlns:r="http://schemas.openxmlformats.org/officeDocument/2006/relationships" r:id="rId3"/>
           </a:graphicData>
         </a:graphic>
       </p:graphicFrame>
@@ -16365,7 +16014,7 @@
           <a:bodyPr wrap="square" lIns="0" tIns="0" rIns="0" bIns="0" rtlCol="0" anchor="ctr"/>
           <a:lstStyle/>
           <a:p>
-            <a:pPr indent="0" marL="0">
+            <a:pPr marL="0" indent="0">
               <a:buNone/>
             </a:pPr>
             <a:r>
@@ -16382,7 +16031,7 @@
       </p:sp>
       <p:sp>
         <p:nvSpPr>
-          <p:cNvPr id="25" name="Slide Number Placeholder 0"/>
+          <p:cNvPr id="49" name="Slide Number Placeholder 0"/>
           <p:cNvSpPr>
             <a:spLocks noGrp="1"/>
           </p:cNvSpPr>
@@ -16400,7 +16049,7 @@
           </a:prstGeom>
           <a:extLst>
             <a:ext uri="{C572A759-6A51-4108-AA02-DFA0A04FC94B}">
-              <ma14:wrappingTextBoxFlag xmlns:ma14="http://schemas.microsoft.com/office/mac/drawingml/2011/main" val="0"/>
+              <ma14:wrappingTextBoxFlag xmlns:ma14="http://schemas.microsoft.com/office/mac/drawingml/2011/main" xmlns="" val="0"/>
             </a:ext>
           </a:extLst>
         </p:spPr>
@@ -16418,7 +16067,7 @@
           <a:p>
             <a:pPr algn="r"/>
             <a:fld id="{F7021451-1387-4CA6-816F-3879F97B5CBC}" type="slidenum">
-              <a:rPr b="0" lang="en-US"/>
+              <a:rPr lang="en-US" b="0"/>
               <a:t>9</a:t>
             </a:fld>
             <a:endParaRPr lang="en-US"/>
@@ -16726,4 +16375,299 @@
     </a:ext>
   </a:extLst>
 </a:theme>
+</file>
+
+<file path=ppt/theme/theme2.xml><?xml version="1.0" encoding="utf-8"?>
+<a:theme xmlns:a="http://schemas.openxmlformats.org/drawingml/2006/main" name="Office Theme">
+  <a:themeElements>
+    <a:clrScheme name="Office">
+      <a:dk1>
+        <a:sysClr val="windowText" lastClr="000000"/>
+      </a:dk1>
+      <a:lt1>
+        <a:sysClr val="window" lastClr="FFFFFF"/>
+      </a:lt1>
+      <a:dk2>
+        <a:srgbClr val="44546A"/>
+      </a:dk2>
+      <a:lt2>
+        <a:srgbClr val="E7E6E6"/>
+      </a:lt2>
+      <a:accent1>
+        <a:srgbClr val="4472C4"/>
+      </a:accent1>
+      <a:accent2>
+        <a:srgbClr val="ED7D31"/>
+      </a:accent2>
+      <a:accent3>
+        <a:srgbClr val="A5A5A5"/>
+      </a:accent3>
+      <a:accent4>
+        <a:srgbClr val="FFC000"/>
+      </a:accent4>
+      <a:accent5>
+        <a:srgbClr val="5B9BD5"/>
+      </a:accent5>
+      <a:accent6>
+        <a:srgbClr val="70AD47"/>
+      </a:accent6>
+      <a:hlink>
+        <a:srgbClr val="0563C1"/>
+      </a:hlink>
+      <a:folHlink>
+        <a:srgbClr val="954F72"/>
+      </a:folHlink>
+    </a:clrScheme>
+    <a:fontScheme name="Office">
+      <a:majorFont>
+        <a:latin typeface="Calibri Light" panose="020F0302020204030204"/>
+        <a:ea typeface=""/>
+        <a:cs typeface=""/>
+        <a:font script="Jpan" typeface="游ゴシック Light"/>
+        <a:font script="Hang" typeface="맑은 고딕"/>
+        <a:font script="Hans" typeface="等线 Light"/>
+        <a:font script="Hant" typeface="新細明體"/>
+        <a:font script="Arab" typeface="Times New Roman"/>
+        <a:font script="Hebr" typeface="Times New Roman"/>
+        <a:font script="Thai" typeface="Angsana New"/>
+        <a:font script="Ethi" typeface="Nyala"/>
+        <a:font script="Beng" typeface="Vrinda"/>
+        <a:font script="Gujr" typeface="Shruti"/>
+        <a:font script="Khmr" typeface="MoolBoran"/>
+        <a:font script="Knda" typeface="Tunga"/>
+        <a:font script="Guru" typeface="Raavi"/>
+        <a:font script="Cans" typeface="Euphemia"/>
+        <a:font script="Cher" typeface="Plantagenet Cherokee"/>
+        <a:font script="Yiii" typeface="Microsoft Yi Baiti"/>
+        <a:font script="Tibt" typeface="Microsoft Himalaya"/>
+        <a:font script="Thaa" typeface="MV Boli"/>
+        <a:font script="Deva" typeface="Mangal"/>
+        <a:font script="Telu" typeface="Gautami"/>
+        <a:font script="Taml" typeface="Latha"/>
+        <a:font script="Syrc" typeface="Estrangelo Edessa"/>
+        <a:font script="Orya" typeface="Kalinga"/>
+        <a:font script="Mlym" typeface="Kartika"/>
+        <a:font script="Laoo" typeface="DokChampa"/>
+        <a:font script="Sinh" typeface="Iskoola Pota"/>
+        <a:font script="Mong" typeface="Mongolian Baiti"/>
+        <a:font script="Viet" typeface="Times New Roman"/>
+        <a:font script="Uigh" typeface="Microsoft Uighur"/>
+        <a:font script="Geor" typeface="Sylfaen"/>
+        <a:font script="Armn" typeface="Arial"/>
+        <a:font script="Bugi" typeface="Leelawadee UI"/>
+        <a:font script="Bopo" typeface="Microsoft JhengHei"/>
+        <a:font script="Java" typeface="Javanese Text"/>
+        <a:font script="Lisu" typeface="Segoe UI"/>
+        <a:font script="Mymr" typeface="Myanmar Text"/>
+        <a:font script="Nkoo" typeface="Ebrima"/>
+        <a:font script="Olck" typeface="Nirmala UI"/>
+        <a:font script="Osma" typeface="Ebrima"/>
+        <a:font script="Phag" typeface="Phagspa"/>
+        <a:font script="Syrn" typeface="Estrangelo Edessa"/>
+        <a:font script="Syrj" typeface="Estrangelo Edessa"/>
+        <a:font script="Syre" typeface="Estrangelo Edessa"/>
+        <a:font script="Sora" typeface="Nirmala UI"/>
+        <a:font script="Tale" typeface="Microsoft Tai Le"/>
+        <a:font script="Talu" typeface="Microsoft New Tai Lue"/>
+        <a:font script="Tfng" typeface="Ebrima"/>
+      </a:majorFont>
+      <a:minorFont>
+        <a:latin typeface="Calibri" panose="020F0502020204030204"/>
+        <a:ea typeface=""/>
+        <a:cs typeface=""/>
+        <a:font script="Jpan" typeface="游ゴシック"/>
+        <a:font script="Hang" typeface="맑은 고딕"/>
+        <a:font script="Hans" typeface="等线"/>
+        <a:font script="Hant" typeface="新細明體"/>
+        <a:font script="Arab" typeface="Arial"/>
+        <a:font script="Hebr" typeface="Arial"/>
+        <a:font script="Thai" typeface="Cordia New"/>
+        <a:font script="Ethi" typeface="Nyala"/>
+        <a:font script="Beng" typeface="Vrinda"/>
+        <a:font script="Gujr" typeface="Shruti"/>
+        <a:font script="Khmr" typeface="DaunPenh"/>
+        <a:font script="Knda" typeface="Tunga"/>
+        <a:font script="Guru" typeface="Raavi"/>
+        <a:font script="Cans" typeface="Euphemia"/>
+        <a:font script="Cher" typeface="Plantagenet Cherokee"/>
+        <a:font script="Yiii" typeface="Microsoft Yi Baiti"/>
+        <a:font script="Tibt" typeface="Microsoft Himalaya"/>
+        <a:font script="Thaa" typeface="MV Boli"/>
+        <a:font script="Deva" typeface="Mangal"/>
+        <a:font script="Telu" typeface="Gautami"/>
+        <a:font script="Taml" typeface="Latha"/>
+        <a:font script="Syrc" typeface="Estrangelo Edessa"/>
+        <a:font script="Orya" typeface="Kalinga"/>
+        <a:font script="Mlym" typeface="Kartika"/>
+        <a:font script="Laoo" typeface="DokChampa"/>
+        <a:font script="Sinh" typeface="Iskoola Pota"/>
+        <a:font script="Mong" typeface="Mongolian Baiti"/>
+        <a:font script="Viet" typeface="Arial"/>
+        <a:font script="Uigh" typeface="Microsoft Uighur"/>
+        <a:font script="Geor" typeface="Sylfaen"/>
+        <a:font script="Armn" typeface="Arial"/>
+        <a:font script="Bugi" typeface="Leelawadee UI"/>
+        <a:font script="Bopo" typeface="Microsoft JhengHei"/>
+        <a:font script="Java" typeface="Javanese Text"/>
+        <a:font script="Lisu" typeface="Segoe UI"/>
+        <a:font script="Mymr" typeface="Myanmar Text"/>
+        <a:font script="Nkoo" typeface="Ebrima"/>
+        <a:font script="Olck" typeface="Nirmala UI"/>
+        <a:font script="Osma" typeface="Ebrima"/>
+        <a:font script="Phag" typeface="Phagspa"/>
+        <a:font script="Syrn" typeface="Estrangelo Edessa"/>
+        <a:font script="Syrj" typeface="Estrangelo Edessa"/>
+        <a:font script="Syre" typeface="Estrangelo Edessa"/>
+        <a:font script="Sora" typeface="Nirmala UI"/>
+        <a:font script="Tale" typeface="Microsoft Tai Le"/>
+        <a:font script="Talu" typeface="Microsoft New Tai Lue"/>
+        <a:font script="Tfng" typeface="Ebrima"/>
+      </a:minorFont>
+    </a:fontScheme>
+    <a:fmtScheme name="Office">
+      <a:fillStyleLst>
+        <a:solidFill>
+          <a:schemeClr val="phClr"/>
+        </a:solidFill>
+        <a:gradFill rotWithShape="1">
+          <a:gsLst>
+            <a:gs pos="0">
+              <a:schemeClr val="phClr">
+                <a:lumMod val="110000"/>
+                <a:satMod val="105000"/>
+                <a:tint val="67000"/>
+              </a:schemeClr>
+            </a:gs>
+            <a:gs pos="50000">
+              <a:schemeClr val="phClr">
+                <a:lumMod val="105000"/>
+                <a:satMod val="103000"/>
+                <a:tint val="73000"/>
+              </a:schemeClr>
+            </a:gs>
+            <a:gs pos="100000">
+              <a:schemeClr val="phClr">
+                <a:lumMod val="105000"/>
+                <a:satMod val="109000"/>
+                <a:tint val="81000"/>
+              </a:schemeClr>
+            </a:gs>
+          </a:gsLst>
+          <a:lin ang="5400000" scaled="0"/>
+        </a:gradFill>
+        <a:gradFill rotWithShape="1">
+          <a:gsLst>
+            <a:gs pos="0">
+              <a:schemeClr val="phClr">
+                <a:satMod val="103000"/>
+                <a:lumMod val="102000"/>
+                <a:tint val="94000"/>
+              </a:schemeClr>
+            </a:gs>
+            <a:gs pos="50000">
+              <a:schemeClr val="phClr">
+                <a:satMod val="110000"/>
+                <a:lumMod val="100000"/>
+                <a:shade val="100000"/>
+              </a:schemeClr>
+            </a:gs>
+            <a:gs pos="100000">
+              <a:schemeClr val="phClr">
+                <a:lumMod val="99000"/>
+                <a:satMod val="120000"/>
+                <a:shade val="78000"/>
+              </a:schemeClr>
+            </a:gs>
+          </a:gsLst>
+          <a:lin ang="5400000" scaled="0"/>
+        </a:gradFill>
+      </a:fillStyleLst>
+      <a:lnStyleLst>
+        <a:ln w="6350" cap="flat" cmpd="sng" algn="ctr">
+          <a:solidFill>
+            <a:schemeClr val="phClr"/>
+          </a:solidFill>
+          <a:prstDash val="solid"/>
+          <a:miter lim="800000"/>
+        </a:ln>
+        <a:ln w="12700" cap="flat" cmpd="sng" algn="ctr">
+          <a:solidFill>
+            <a:schemeClr val="phClr"/>
+          </a:solidFill>
+          <a:prstDash val="solid"/>
+          <a:miter lim="800000"/>
+        </a:ln>
+        <a:ln w="19050" cap="flat" cmpd="sng" algn="ctr">
+          <a:solidFill>
+            <a:schemeClr val="phClr"/>
+          </a:solidFill>
+          <a:prstDash val="solid"/>
+          <a:miter lim="800000"/>
+        </a:ln>
+      </a:lnStyleLst>
+      <a:effectStyleLst>
+        <a:effectStyle>
+          <a:effectLst/>
+        </a:effectStyle>
+        <a:effectStyle>
+          <a:effectLst/>
+        </a:effectStyle>
+        <a:effectStyle>
+          <a:effectLst>
+            <a:outerShdw blurRad="57150" dist="19050" dir="5400000" algn="ctr" rotWithShape="0">
+              <a:srgbClr val="000000">
+                <a:alpha val="63000"/>
+              </a:srgbClr>
+            </a:outerShdw>
+          </a:effectLst>
+        </a:effectStyle>
+      </a:effectStyleLst>
+      <a:bgFillStyleLst>
+        <a:solidFill>
+          <a:schemeClr val="phClr"/>
+        </a:solidFill>
+        <a:solidFill>
+          <a:schemeClr val="phClr">
+            <a:tint val="95000"/>
+            <a:satMod val="170000"/>
+          </a:schemeClr>
+        </a:solidFill>
+        <a:gradFill rotWithShape="1">
+          <a:gsLst>
+            <a:gs pos="0">
+              <a:schemeClr val="phClr">
+                <a:tint val="93000"/>
+                <a:satMod val="150000"/>
+                <a:shade val="98000"/>
+                <a:lumMod val="102000"/>
+              </a:schemeClr>
+            </a:gs>
+            <a:gs pos="50000">
+              <a:schemeClr val="phClr">
+                <a:tint val="98000"/>
+                <a:satMod val="130000"/>
+                <a:shade val="90000"/>
+                <a:lumMod val="103000"/>
+              </a:schemeClr>
+            </a:gs>
+            <a:gs pos="100000">
+              <a:schemeClr val="phClr">
+                <a:shade val="63000"/>
+                <a:satMod val="120000"/>
+              </a:schemeClr>
+            </a:gs>
+          </a:gsLst>
+          <a:lin ang="5400000" scaled="0"/>
+        </a:gradFill>
+      </a:bgFillStyleLst>
+    </a:fmtScheme>
+  </a:themeElements>
+  <a:objectDefaults/>
+  <a:extraClrSchemeLst/>
+  <a:extLst>
+    <a:ext uri="{05A4C25C-085E-4340-85A3-A5531E510DB2}">
+      <thm15:themeFamily xmlns:thm15="http://schemas.microsoft.com/office/thememl/2012/main" name="Office Theme" id="{62F939B6-93AF-4DB8-9C6B-D6C7DFDC589F}" vid="{4A3C46E8-61CC-4603-A589-7422A47A8E4A}"/>
+    </a:ext>
+  </a:extLst>
+</a:theme>
 </file>